--- a/clipmind_presentation.pptx
+++ b/clipmind_presentation.pptx
@@ -14,6 +14,11 @@
     <p:sldId id="262" r:id="rId13"/>
     <p:sldId id="263" r:id="rId14"/>
     <p:sldId id="264" r:id="rId15"/>
+    <p:sldId id="265" r:id="rId16"/>
+    <p:sldId id="266" r:id="rId17"/>
+    <p:sldId id="267" r:id="rId18"/>
+    <p:sldId id="268" r:id="rId19"/>
+    <p:sldId id="269" r:id="rId20"/>
   </p:sldIdLst>
   <p:sldSz cx="12191695" cy="6858000" type="screen4x3"/>
   <p:notesSz cx="6858000" cy="9144000"/>
@@ -3089,14 +3094,6 @@
 <file path=ppt/slides/slide1.xml><?xml version="1.0" encoding="utf-8"?>
 <p:sld xmlns:a="http://schemas.openxmlformats.org/drawingml/2006/main" xmlns:p="http://schemas.openxmlformats.org/presentationml/2006/main" xmlns:r="http://schemas.openxmlformats.org/officeDocument/2006/relationships">
   <p:cSld>
-    <p:bg>
-      <p:bgPr>
-        <a:solidFill>
-          <a:srgbClr val="0A0F1E"/>
-        </a:solidFill>
-        <a:effectLst/>
-      </p:bgPr>
-    </p:bg>
     <p:spTree>
       <p:nvGrpSpPr>
         <p:cNvPr id="1" name=""/>
@@ -3106,14 +3103,111 @@
       <p:grpSpPr/>
       <p:sp>
         <p:nvSpPr>
-          <p:cNvPr id="2" name="TextBox 1"/>
+          <p:cNvPr id="2" name="Rectangle 1"/>
+          <p:cNvSpPr/>
+          <p:nvPr/>
+        </p:nvSpPr>
+        <p:spPr>
+          <a:xfrm>
+            <a:off x="0" y="0"/>
+            <a:ext cx="12191695" cy="6858000"/>
+          </a:xfrm>
+          <a:prstGeom prst="rect">
+            <a:avLst/>
+          </a:prstGeom>
+          <a:solidFill>
+            <a:srgbClr val="0A0F1D"/>
+          </a:solidFill>
+          <a:ln>
+            <a:noFill/>
+          </a:ln>
+        </p:spPr>
+        <p:style>
+          <a:lnRef idx="1">
+            <a:schemeClr val="accent1"/>
+          </a:lnRef>
+          <a:fillRef idx="3">
+            <a:schemeClr val="accent1"/>
+          </a:fillRef>
+          <a:effectRef idx="2">
+            <a:schemeClr val="accent1"/>
+          </a:effectRef>
+          <a:fontRef idx="minor">
+            <a:schemeClr val="lt1"/>
+          </a:fontRef>
+        </p:style>
+        <p:txBody>
+          <a:bodyPr rtlCol="0" anchor="ctr"/>
+          <a:lstStyle/>
+          <a:p>
+            <a:pPr algn="ctr"/>
+          </a:p>
+        </p:txBody>
+      </p:sp>
+      <p:sp>
+        <p:nvSpPr>
+          <p:cNvPr id="3" name="Rounded Rectangle 2"/>
+          <p:cNvSpPr/>
+          <p:nvPr/>
+        </p:nvSpPr>
+        <p:spPr>
+          <a:xfrm>
+            <a:off x="731520" y="1097280"/>
+            <a:ext cx="2926080" cy="365760"/>
+          </a:xfrm>
+          <a:prstGeom prst="roundRect">
+            <a:avLst/>
+          </a:prstGeom>
+          <a:solidFill>
+            <a:srgbClr val="162440"/>
+          </a:solidFill>
+          <a:ln w="12700">
+            <a:solidFill>
+              <a:srgbClr val="06B6D4"/>
+            </a:solidFill>
+          </a:ln>
+        </p:spPr>
+        <p:style>
+          <a:lnRef idx="1">
+            <a:schemeClr val="accent1"/>
+          </a:lnRef>
+          <a:fillRef idx="3">
+            <a:schemeClr val="accent1"/>
+          </a:fillRef>
+          <a:effectRef idx="2">
+            <a:schemeClr val="accent1"/>
+          </a:effectRef>
+          <a:fontRef idx="minor">
+            <a:schemeClr val="lt1"/>
+          </a:fontRef>
+        </p:style>
+        <p:txBody>
+          <a:bodyPr rtlCol="0" anchor="ctr"/>
+          <a:lstStyle/>
+          <a:p>
+            <a:pPr algn="ctr">
+              <a:defRPr sz="1000" b="1">
+                <a:solidFill>
+                  <a:srgbClr val="06B6D4"/>
+                </a:solidFill>
+              </a:defRPr>
+            </a:pPr>
+            <a:r>
+              <a:t>★ PRODUCTION-READY PLATFORM</a:t>
+            </a:r>
+          </a:p>
+        </p:txBody>
+      </p:sp>
+      <p:sp>
+        <p:nvSpPr>
+          <p:cNvPr id="4" name="TextBox 3"/>
           <p:cNvSpPr txBox="1"/>
           <p:nvPr/>
         </p:nvSpPr>
         <p:spPr>
           <a:xfrm>
-            <a:off x="914400" y="1645920"/>
-            <a:ext cx="10362895" cy="4114800"/>
+            <a:off x="731520" y="1645920"/>
+            <a:ext cx="10698480" cy="2011680"/>
           </a:xfrm>
           <a:prstGeom prst="rect">
             <a:avLst/>
@@ -3126,12 +3220,11 @@
           </a:bodyPr>
           <a:lstStyle/>
           <a:p>
-            <a:pPr algn="ctr">
-              <a:defRPr sz="6400" b="1">
-                <a:solidFill>
-                  <a:srgbClr val="FFFFFF"/>
-                </a:solidFill>
-                <a:latin typeface="Arial"/>
+            <a:pPr>
+              <a:defRPr sz="4800" b="1">
+                <a:solidFill>
+                  <a:srgbClr val="F8FAFC"/>
+                </a:solidFill>
               </a:defRPr>
             </a:pPr>
             <a:r>
@@ -3139,51 +3232,2798 @@
             </a:r>
           </a:p>
           <a:p>
-            <a:pPr algn="ctr">
-              <a:spcBef>
-                <a:spcPts val="1200"/>
-              </a:spcBef>
-              <a:defRPr sz="2200" b="1">
+            <a:pPr>
+              <a:defRPr sz="2000">
+                <a:solidFill>
+                  <a:srgbClr val="38BDF8"/>
+                </a:solidFill>
+              </a:defRPr>
+            </a:pPr>
+            <a:r>
+              <a:t>Intelligent Video Processing, Speech-to-Text, AI Summarization &amp; Studio Platform</a:t>
+            </a:r>
+          </a:p>
+          <a:p>
+            <a:pPr>
+              <a:defRPr sz="1400">
+                <a:solidFill>
+                  <a:srgbClr val="94A3B8"/>
+                </a:solidFill>
+              </a:defRPr>
+            </a:pPr>
+            <a:r>
+              <a:t>End-to-End Multimodal Video Pipeline • Milestones 1 to 4 Full Review &amp; Architecture Report</a:t>
+            </a:r>
+          </a:p>
+        </p:txBody>
+      </p:sp>
+      <p:sp>
+        <p:nvSpPr>
+          <p:cNvPr id="5" name="Rounded Rectangle 4"/>
+          <p:cNvSpPr/>
+          <p:nvPr/>
+        </p:nvSpPr>
+        <p:spPr>
+          <a:xfrm>
+            <a:off x="731520" y="4114800"/>
+            <a:ext cx="3291840" cy="2011680"/>
+          </a:xfrm>
+          <a:prstGeom prst="roundRect">
+            <a:avLst/>
+          </a:prstGeom>
+          <a:solidFill>
+            <a:srgbClr val="131B2E"/>
+          </a:solidFill>
+          <a:ln w="12700">
+            <a:solidFill>
+              <a:srgbClr val="263454"/>
+            </a:solidFill>
+          </a:ln>
+        </p:spPr>
+        <p:style>
+          <a:lnRef idx="1">
+            <a:schemeClr val="accent1"/>
+          </a:lnRef>
+          <a:fillRef idx="3">
+            <a:schemeClr val="accent1"/>
+          </a:fillRef>
+          <a:effectRef idx="2">
+            <a:schemeClr val="accent1"/>
+          </a:effectRef>
+          <a:fontRef idx="minor">
+            <a:schemeClr val="lt1"/>
+          </a:fontRef>
+        </p:style>
+        <p:txBody>
+          <a:bodyPr rtlCol="0" anchor="ctr"/>
+          <a:lstStyle/>
+          <a:p>
+            <a:pPr algn="ctr"/>
+          </a:p>
+        </p:txBody>
+      </p:sp>
+      <p:sp>
+        <p:nvSpPr>
+          <p:cNvPr id="6" name="TextBox 5"/>
+          <p:cNvSpPr txBox="1"/>
+          <p:nvPr/>
+        </p:nvSpPr>
+        <p:spPr>
+          <a:xfrm>
+            <a:off x="914400" y="4297680"/>
+            <a:ext cx="2926080" cy="1645920"/>
+          </a:xfrm>
+          <a:prstGeom prst="rect">
+            <a:avLst/>
+          </a:prstGeom>
+          <a:noFill/>
+        </p:spPr>
+        <p:txBody>
+          <a:bodyPr wrap="square">
+            <a:spAutoFit/>
+          </a:bodyPr>
+          <a:lstStyle/>
+          <a:p>
+            <a:pPr>
+              <a:defRPr sz="1100" b="1">
+                <a:solidFill>
+                  <a:srgbClr val="06B6D4"/>
+                </a:solidFill>
+              </a:defRPr>
+            </a:pPr>
+            <a:r>
+              <a:t>DEVELOPER &amp; INTERN</a:t>
+            </a:r>
+          </a:p>
+          <a:p>
+            <a:pPr>
+              <a:defRPr sz="1300">
+                <a:solidFill>
+                  <a:srgbClr val="CBD5E1"/>
+                </a:solidFill>
+              </a:defRPr>
+            </a:pPr>
+            <a:r>
+              <a:t>Sai Harshith</a:t>
+            </a:r>
+            <a:br/>
+            <a:r>
+              <a:t>AI Engineer Intern</a:t>
+            </a:r>
+            <a:br/>
+            <a:r>
+              <a:t>Springboard Project Review</a:t>
+            </a:r>
+          </a:p>
+        </p:txBody>
+      </p:sp>
+      <p:sp>
+        <p:nvSpPr>
+          <p:cNvPr id="7" name="Rounded Rectangle 6"/>
+          <p:cNvSpPr/>
+          <p:nvPr/>
+        </p:nvSpPr>
+        <p:spPr>
+          <a:xfrm>
+            <a:off x="4389120" y="4114800"/>
+            <a:ext cx="3291840" cy="2011680"/>
+          </a:xfrm>
+          <a:prstGeom prst="roundRect">
+            <a:avLst/>
+          </a:prstGeom>
+          <a:solidFill>
+            <a:srgbClr val="131B2E"/>
+          </a:solidFill>
+          <a:ln w="12700">
+            <a:solidFill>
+              <a:srgbClr val="263454"/>
+            </a:solidFill>
+          </a:ln>
+        </p:spPr>
+        <p:style>
+          <a:lnRef idx="1">
+            <a:schemeClr val="accent1"/>
+          </a:lnRef>
+          <a:fillRef idx="3">
+            <a:schemeClr val="accent1"/>
+          </a:fillRef>
+          <a:effectRef idx="2">
+            <a:schemeClr val="accent1"/>
+          </a:effectRef>
+          <a:fontRef idx="minor">
+            <a:schemeClr val="lt1"/>
+          </a:fontRef>
+        </p:style>
+        <p:txBody>
+          <a:bodyPr rtlCol="0" anchor="ctr"/>
+          <a:lstStyle/>
+          <a:p>
+            <a:pPr algn="ctr"/>
+          </a:p>
+        </p:txBody>
+      </p:sp>
+      <p:sp>
+        <p:nvSpPr>
+          <p:cNvPr id="8" name="TextBox 7"/>
+          <p:cNvSpPr txBox="1"/>
+          <p:nvPr/>
+        </p:nvSpPr>
+        <p:spPr>
+          <a:xfrm>
+            <a:off x="4572000" y="4297680"/>
+            <a:ext cx="2926080" cy="1645920"/>
+          </a:xfrm>
+          <a:prstGeom prst="rect">
+            <a:avLst/>
+          </a:prstGeom>
+          <a:noFill/>
+        </p:spPr>
+        <p:txBody>
+          <a:bodyPr wrap="square">
+            <a:spAutoFit/>
+          </a:bodyPr>
+          <a:lstStyle/>
+          <a:p>
+            <a:pPr>
+              <a:defRPr sz="1100" b="1">
+                <a:solidFill>
+                  <a:srgbClr val="10B981"/>
+                </a:solidFill>
+              </a:defRPr>
+            </a:pPr>
+            <a:r>
+              <a:t>PRODUCTION DEPLOYMENTS</a:t>
+            </a:r>
+          </a:p>
+          <a:p>
+            <a:pPr>
+              <a:defRPr sz="1200">
+                <a:solidFill>
+                  <a:srgbClr val="CBD5E1"/>
+                </a:solidFill>
+              </a:defRPr>
+            </a:pPr>
+            <a:r>
+              <a:t>Frontend: clipmindai-nine.vercel.app</a:t>
+            </a:r>
+            <a:br/>
+            <a:r>
+              <a:t>Backend: clipmind-backend-94k5.onrender.com</a:t>
+            </a:r>
+            <a:br/>
+            <a:r>
+              <a:t>Status: 100% Live &amp; Operational</a:t>
+            </a:r>
+          </a:p>
+        </p:txBody>
+      </p:sp>
+      <p:sp>
+        <p:nvSpPr>
+          <p:cNvPr id="9" name="Rounded Rectangle 8"/>
+          <p:cNvSpPr/>
+          <p:nvPr/>
+        </p:nvSpPr>
+        <p:spPr>
+          <a:xfrm>
+            <a:off x="8046720" y="4114800"/>
+            <a:ext cx="3291840" cy="2011680"/>
+          </a:xfrm>
+          <a:prstGeom prst="roundRect">
+            <a:avLst/>
+          </a:prstGeom>
+          <a:solidFill>
+            <a:srgbClr val="131B2E"/>
+          </a:solidFill>
+          <a:ln w="12700">
+            <a:solidFill>
+              <a:srgbClr val="263454"/>
+            </a:solidFill>
+          </a:ln>
+        </p:spPr>
+        <p:style>
+          <a:lnRef idx="1">
+            <a:schemeClr val="accent1"/>
+          </a:lnRef>
+          <a:fillRef idx="3">
+            <a:schemeClr val="accent1"/>
+          </a:fillRef>
+          <a:effectRef idx="2">
+            <a:schemeClr val="accent1"/>
+          </a:effectRef>
+          <a:fontRef idx="minor">
+            <a:schemeClr val="lt1"/>
+          </a:fontRef>
+        </p:style>
+        <p:txBody>
+          <a:bodyPr rtlCol="0" anchor="ctr"/>
+          <a:lstStyle/>
+          <a:p>
+            <a:pPr algn="ctr"/>
+          </a:p>
+        </p:txBody>
+      </p:sp>
+      <p:sp>
+        <p:nvSpPr>
+          <p:cNvPr id="10" name="TextBox 9"/>
+          <p:cNvSpPr txBox="1"/>
+          <p:nvPr/>
+        </p:nvSpPr>
+        <p:spPr>
+          <a:xfrm>
+            <a:off x="8229600" y="4297680"/>
+            <a:ext cx="2926080" cy="1645920"/>
+          </a:xfrm>
+          <a:prstGeom prst="rect">
+            <a:avLst/>
+          </a:prstGeom>
+          <a:noFill/>
+        </p:spPr>
+        <p:txBody>
+          <a:bodyPr wrap="square">
+            <a:spAutoFit/>
+          </a:bodyPr>
+          <a:lstStyle/>
+          <a:p>
+            <a:pPr>
+              <a:defRPr sz="1100" b="1">
                 <a:solidFill>
                   <a:srgbClr val="818CF8"/>
                 </a:solidFill>
-                <a:latin typeface="Arial"/>
-              </a:defRPr>
-            </a:pPr>
-            <a:r>
-              <a:t>Interactive Video Insights &amp; Lifecycle Analytics Platform</a:t>
-            </a:r>
-          </a:p>
-          <a:p>
-            <a:pPr algn="ctr">
-              <a:spcBef>
-                <a:spcPts val="2400"/>
-              </a:spcBef>
-              <a:defRPr sz="1600">
+              </a:defRPr>
+            </a:pPr>
+            <a:r>
+              <a:t>CORE CAPABILITIES</a:t>
+            </a:r>
+          </a:p>
+          <a:p>
+            <a:pPr>
+              <a:defRPr sz="1200">
                 <a:solidFill>
                   <a:srgbClr val="CBD5E1"/>
                 </a:solidFill>
-                <a:latin typeface="Arial"/>
-              </a:defRPr>
-            </a:pPr>
-            <a:r>
-              <a:t>Milestones 1 - 3 Comprehensive Review</a:t>
-            </a:r>
-          </a:p>
-          <a:p>
-            <a:pPr algn="ctr">
-              <a:spcBef>
-                <a:spcPts val="4500"/>
-              </a:spcBef>
-              <a:defRPr sz="1400">
+              </a:defRPr>
+            </a:pPr>
+            <a:r>
+              <a:t>• Faster-Whisper Speech-to-Text</a:t>
+            </a:r>
+            <a:br/>
+            <a:r>
+              <a:t>• Google Gemini 2.5 Flash LLM</a:t>
+            </a:r>
+            <a:br/>
+            <a:r>
+              <a:t>• FFmpeg Highlight Reel Cutter</a:t>
+            </a:r>
+            <a:br/>
+            <a:r>
+              <a:t>• Real-Time Video Q&amp;A Chatbot</a:t>
+            </a:r>
+          </a:p>
+        </p:txBody>
+      </p:sp>
+    </p:spTree>
+  </p:cSld>
+  <p:clrMapOvr>
+    <a:masterClrMapping/>
+  </p:clrMapOvr>
+</p:sld>
+</file>
+
+<file path=ppt/slides/slide10.xml><?xml version="1.0" encoding="utf-8"?>
+<p:sld xmlns:a="http://schemas.openxmlformats.org/drawingml/2006/main" xmlns:p="http://schemas.openxmlformats.org/presentationml/2006/main" xmlns:r="http://schemas.openxmlformats.org/officeDocument/2006/relationships">
+  <p:cSld>
+    <p:spTree>
+      <p:nvGrpSpPr>
+        <p:cNvPr id="1" name=""/>
+        <p:cNvGrpSpPr/>
+        <p:nvPr/>
+      </p:nvGrpSpPr>
+      <p:grpSpPr/>
+      <p:sp>
+        <p:nvSpPr>
+          <p:cNvPr id="2" name="Rectangle 1"/>
+          <p:cNvSpPr/>
+          <p:nvPr/>
+        </p:nvSpPr>
+        <p:spPr>
+          <a:xfrm>
+            <a:off x="0" y="0"/>
+            <a:ext cx="12191695" cy="6858000"/>
+          </a:xfrm>
+          <a:prstGeom prst="rect">
+            <a:avLst/>
+          </a:prstGeom>
+          <a:solidFill>
+            <a:srgbClr val="0A0F1D"/>
+          </a:solidFill>
+          <a:ln>
+            <a:noFill/>
+          </a:ln>
+        </p:spPr>
+        <p:style>
+          <a:lnRef idx="1">
+            <a:schemeClr val="accent1"/>
+          </a:lnRef>
+          <a:fillRef idx="3">
+            <a:schemeClr val="accent1"/>
+          </a:fillRef>
+          <a:effectRef idx="2">
+            <a:schemeClr val="accent1"/>
+          </a:effectRef>
+          <a:fontRef idx="minor">
+            <a:schemeClr val="lt1"/>
+          </a:fontRef>
+        </p:style>
+        <p:txBody>
+          <a:bodyPr rtlCol="0" anchor="ctr"/>
+          <a:lstStyle/>
+          <a:p>
+            <a:pPr algn="ctr"/>
+          </a:p>
+        </p:txBody>
+      </p:sp>
+      <p:sp>
+        <p:nvSpPr>
+          <p:cNvPr id="3" name="TextBox 2"/>
+          <p:cNvSpPr txBox="1"/>
+          <p:nvPr/>
+        </p:nvSpPr>
+        <p:spPr>
+          <a:xfrm>
+            <a:off x="731520" y="365760"/>
+            <a:ext cx="9144000" cy="365760"/>
+          </a:xfrm>
+          <a:prstGeom prst="rect">
+            <a:avLst/>
+          </a:prstGeom>
+          <a:noFill/>
+        </p:spPr>
+        <p:txBody>
+          <a:bodyPr wrap="square">
+            <a:spAutoFit/>
+          </a:bodyPr>
+          <a:lstStyle/>
+          <a:p>
+            <a:pPr>
+              <a:defRPr sz="1000" b="1">
+                <a:solidFill>
+                  <a:srgbClr val="06B6D4"/>
+                </a:solidFill>
+              </a:defRPr>
+            </a:pPr>
+            <a:r>
+              <a:t>INNOVATION &amp; BONUS FEATURES</a:t>
+            </a:r>
+          </a:p>
+        </p:txBody>
+      </p:sp>
+      <p:sp>
+        <p:nvSpPr>
+          <p:cNvPr id="4" name="TextBox 3"/>
+          <p:cNvSpPr txBox="1"/>
+          <p:nvPr/>
+        </p:nvSpPr>
+        <p:spPr>
+          <a:xfrm>
+            <a:off x="731520" y="640080"/>
+            <a:ext cx="10515600" cy="640080"/>
+          </a:xfrm>
+          <a:prstGeom prst="rect">
+            <a:avLst/>
+          </a:prstGeom>
+          <a:noFill/>
+        </p:spPr>
+        <p:txBody>
+          <a:bodyPr wrap="square">
+            <a:spAutoFit/>
+          </a:bodyPr>
+          <a:lstStyle/>
+          <a:p>
+            <a:pPr>
+              <a:defRPr sz="2400" b="1">
+                <a:solidFill>
+                  <a:srgbClr val="F8FAFC"/>
+                </a:solidFill>
+              </a:defRPr>
+            </a:pPr>
+            <a:r>
+              <a:t>High-Impact Capabilities Added Beyond Requirements</a:t>
+            </a:r>
+          </a:p>
+        </p:txBody>
+      </p:sp>
+      <p:sp>
+        <p:nvSpPr>
+          <p:cNvPr id="5" name="TextBox 4"/>
+          <p:cNvSpPr txBox="1"/>
+          <p:nvPr/>
+        </p:nvSpPr>
+        <p:spPr>
+          <a:xfrm>
+            <a:off x="731520" y="1234440"/>
+            <a:ext cx="10515600" cy="365760"/>
+          </a:xfrm>
+          <a:prstGeom prst="rect">
+            <a:avLst/>
+          </a:prstGeom>
+          <a:noFill/>
+        </p:spPr>
+        <p:txBody>
+          <a:bodyPr wrap="none">
+            <a:spAutoFit/>
+          </a:bodyPr>
+          <a:lstStyle/>
+          <a:p>
+            <a:pPr>
+              <a:defRPr sz="1300">
                 <a:solidFill>
                   <a:srgbClr val="94A3B8"/>
                 </a:solidFill>
-                <a:latin typeface="Arial"/>
-              </a:defRPr>
-            </a:pPr>
-            <a:r>
-              <a:t>Presenter: Veerla Sai Harshith</a:t>
+              </a:defRPr>
+            </a:pPr>
+            <a:r>
+              <a:t>Value-added engineering features delivering an exceptional user experience</a:t>
+            </a:r>
+          </a:p>
+        </p:txBody>
+      </p:sp>
+      <p:sp>
+        <p:nvSpPr>
+          <p:cNvPr id="6" name="Rounded Rectangle 5"/>
+          <p:cNvSpPr/>
+          <p:nvPr/>
+        </p:nvSpPr>
+        <p:spPr>
+          <a:xfrm>
+            <a:off x="731520" y="1645920"/>
+            <a:ext cx="5120640" cy="2194560"/>
+          </a:xfrm>
+          <a:prstGeom prst="roundRect">
+            <a:avLst/>
+          </a:prstGeom>
+          <a:solidFill>
+            <a:srgbClr val="131B2E"/>
+          </a:solidFill>
+          <a:ln w="12700">
+            <a:solidFill>
+              <a:srgbClr val="263454"/>
+            </a:solidFill>
+          </a:ln>
+        </p:spPr>
+        <p:style>
+          <a:lnRef idx="1">
+            <a:schemeClr val="accent1"/>
+          </a:lnRef>
+          <a:fillRef idx="3">
+            <a:schemeClr val="accent1"/>
+          </a:fillRef>
+          <a:effectRef idx="2">
+            <a:schemeClr val="accent1"/>
+          </a:effectRef>
+          <a:fontRef idx="minor">
+            <a:schemeClr val="lt1"/>
+          </a:fontRef>
+        </p:style>
+        <p:txBody>
+          <a:bodyPr rtlCol="0" anchor="ctr"/>
+          <a:lstStyle/>
+          <a:p>
+            <a:pPr algn="ctr"/>
+          </a:p>
+        </p:txBody>
+      </p:sp>
+      <p:sp>
+        <p:nvSpPr>
+          <p:cNvPr id="7" name="TextBox 6"/>
+          <p:cNvSpPr txBox="1"/>
+          <p:nvPr/>
+        </p:nvSpPr>
+        <p:spPr>
+          <a:xfrm>
+            <a:off x="914400" y="1783080"/>
+            <a:ext cx="4754880" cy="1920240"/>
+          </a:xfrm>
+          <a:prstGeom prst="rect">
+            <a:avLst/>
+          </a:prstGeom>
+          <a:noFill/>
+        </p:spPr>
+        <p:txBody>
+          <a:bodyPr wrap="square">
+            <a:spAutoFit/>
+          </a:bodyPr>
+          <a:lstStyle/>
+          <a:p>
+            <a:pPr>
+              <a:defRPr sz="1300" b="1">
+                <a:solidFill>
+                  <a:srgbClr val="06B6D4"/>
+                </a:solidFill>
+              </a:defRPr>
+            </a:pPr>
+            <a:r>
+              <a:t>★ 1. Real-Time 'Ask AI' Video Chatbot</a:t>
+            </a:r>
+          </a:p>
+          <a:p>
+            <a:pPr>
+              <a:defRPr sz="1150">
+                <a:solidFill>
+                  <a:srgbClr val="CBD5E1"/>
+                </a:solidFill>
+              </a:defRPr>
+            </a:pPr>
+            <a:r>
+              <a:t>Engineered an in-studio conversational RAG bot powered by Gemini. Users can query any detail (e.g., 'What was said about pricing?') and receive grounded answers with clickable timestamp citations.</a:t>
+            </a:r>
+          </a:p>
+        </p:txBody>
+      </p:sp>
+      <p:sp>
+        <p:nvSpPr>
+          <p:cNvPr id="8" name="Rounded Rectangle 7"/>
+          <p:cNvSpPr/>
+          <p:nvPr/>
+        </p:nvSpPr>
+        <p:spPr>
+          <a:xfrm>
+            <a:off x="6126480" y="1645920"/>
+            <a:ext cx="5120640" cy="2194560"/>
+          </a:xfrm>
+          <a:prstGeom prst="roundRect">
+            <a:avLst/>
+          </a:prstGeom>
+          <a:solidFill>
+            <a:srgbClr val="131B2E"/>
+          </a:solidFill>
+          <a:ln w="12700">
+            <a:solidFill>
+              <a:srgbClr val="263454"/>
+            </a:solidFill>
+          </a:ln>
+        </p:spPr>
+        <p:style>
+          <a:lnRef idx="1">
+            <a:schemeClr val="accent1"/>
+          </a:lnRef>
+          <a:fillRef idx="3">
+            <a:schemeClr val="accent1"/>
+          </a:fillRef>
+          <a:effectRef idx="2">
+            <a:schemeClr val="accent1"/>
+          </a:effectRef>
+          <a:fontRef idx="minor">
+            <a:schemeClr val="lt1"/>
+          </a:fontRef>
+        </p:style>
+        <p:txBody>
+          <a:bodyPr rtlCol="0" anchor="ctr"/>
+          <a:lstStyle/>
+          <a:p>
+            <a:pPr algn="ctr"/>
+          </a:p>
+        </p:txBody>
+      </p:sp>
+      <p:sp>
+        <p:nvSpPr>
+          <p:cNvPr id="9" name="TextBox 8"/>
+          <p:cNvSpPr txBox="1"/>
+          <p:nvPr/>
+        </p:nvSpPr>
+        <p:spPr>
+          <a:xfrm>
+            <a:off x="6309360" y="1783080"/>
+            <a:ext cx="4754880" cy="1920240"/>
+          </a:xfrm>
+          <a:prstGeom prst="rect">
+            <a:avLst/>
+          </a:prstGeom>
+          <a:noFill/>
+        </p:spPr>
+        <p:txBody>
+          <a:bodyPr wrap="square">
+            <a:spAutoFit/>
+          </a:bodyPr>
+          <a:lstStyle/>
+          <a:p>
+            <a:pPr>
+              <a:defRPr sz="1300" b="1">
+                <a:solidFill>
+                  <a:srgbClr val="38BDF8"/>
+                </a:solidFill>
+              </a:defRPr>
+            </a:pPr>
+            <a:r>
+              <a:t>★ 2. Interactive Timestamp Video Seeker</a:t>
+            </a:r>
+          </a:p>
+          <a:p>
+            <a:pPr>
+              <a:defRPr sz="1150">
+                <a:solidFill>
+                  <a:srgbClr val="CBD5E1"/>
+                </a:solidFill>
+              </a:defRPr>
+            </a:pPr>
+            <a:r>
+              <a:t>Every transcript row and key moment badge is an active interactive controller. Clicking any timestamp jumps the HTML5 video player directly to that second and starts playback smoothly.</a:t>
+            </a:r>
+          </a:p>
+        </p:txBody>
+      </p:sp>
+      <p:sp>
+        <p:nvSpPr>
+          <p:cNvPr id="10" name="Rounded Rectangle 9"/>
+          <p:cNvSpPr/>
+          <p:nvPr/>
+        </p:nvSpPr>
+        <p:spPr>
+          <a:xfrm>
+            <a:off x="731520" y="4023360"/>
+            <a:ext cx="5120640" cy="2194560"/>
+          </a:xfrm>
+          <a:prstGeom prst="roundRect">
+            <a:avLst/>
+          </a:prstGeom>
+          <a:solidFill>
+            <a:srgbClr val="131B2E"/>
+          </a:solidFill>
+          <a:ln w="12700">
+            <a:solidFill>
+              <a:srgbClr val="263454"/>
+            </a:solidFill>
+          </a:ln>
+        </p:spPr>
+        <p:style>
+          <a:lnRef idx="1">
+            <a:schemeClr val="accent1"/>
+          </a:lnRef>
+          <a:fillRef idx="3">
+            <a:schemeClr val="accent1"/>
+          </a:fillRef>
+          <a:effectRef idx="2">
+            <a:schemeClr val="accent1"/>
+          </a:effectRef>
+          <a:fontRef idx="minor">
+            <a:schemeClr val="lt1"/>
+          </a:fontRef>
+        </p:style>
+        <p:txBody>
+          <a:bodyPr rtlCol="0" anchor="ctr"/>
+          <a:lstStyle/>
+          <a:p>
+            <a:pPr algn="ctr"/>
+          </a:p>
+        </p:txBody>
+      </p:sp>
+      <p:sp>
+        <p:nvSpPr>
+          <p:cNvPr id="11" name="TextBox 10"/>
+          <p:cNvSpPr txBox="1"/>
+          <p:nvPr/>
+        </p:nvSpPr>
+        <p:spPr>
+          <a:xfrm>
+            <a:off x="914400" y="4160520"/>
+            <a:ext cx="4754880" cy="1920240"/>
+          </a:xfrm>
+          <a:prstGeom prst="rect">
+            <a:avLst/>
+          </a:prstGeom>
+          <a:noFill/>
+        </p:spPr>
+        <p:txBody>
+          <a:bodyPr wrap="square">
+            <a:spAutoFit/>
+          </a:bodyPr>
+          <a:lstStyle/>
+          <a:p>
+            <a:pPr>
+              <a:defRPr sz="1300" b="1">
+                <a:solidFill>
+                  <a:srgbClr val="818CF8"/>
+                </a:solidFill>
+              </a:defRPr>
+            </a:pPr>
+            <a:r>
+              <a:t>★ 3. YouTube Datacenter Anti-Bot Bypass</a:t>
+            </a:r>
+          </a:p>
+          <a:p>
+            <a:pPr>
+              <a:defRPr sz="1150">
+                <a:solidFill>
+                  <a:srgbClr val="CBD5E1"/>
+                </a:solidFill>
+              </a:defRPr>
+            </a:pPr>
+            <a:r>
+              <a:t>Integrated yt-dlp with tv-client headers and multi-stream audio-video merging (bestvideo+bestaudio -&gt; mp4) to bypass cloud datacenter IP blocks and support YouTube Shorts.</a:t>
+            </a:r>
+          </a:p>
+        </p:txBody>
+      </p:sp>
+      <p:sp>
+        <p:nvSpPr>
+          <p:cNvPr id="12" name="Rounded Rectangle 11"/>
+          <p:cNvSpPr/>
+          <p:nvPr/>
+        </p:nvSpPr>
+        <p:spPr>
+          <a:xfrm>
+            <a:off x="6126480" y="4023360"/>
+            <a:ext cx="5120640" cy="2194560"/>
+          </a:xfrm>
+          <a:prstGeom prst="roundRect">
+            <a:avLst/>
+          </a:prstGeom>
+          <a:solidFill>
+            <a:srgbClr val="131B2E"/>
+          </a:solidFill>
+          <a:ln w="12700">
+            <a:solidFill>
+              <a:srgbClr val="263454"/>
+            </a:solidFill>
+          </a:ln>
+        </p:spPr>
+        <p:style>
+          <a:lnRef idx="1">
+            <a:schemeClr val="accent1"/>
+          </a:lnRef>
+          <a:fillRef idx="3">
+            <a:schemeClr val="accent1"/>
+          </a:fillRef>
+          <a:effectRef idx="2">
+            <a:schemeClr val="accent1"/>
+          </a:effectRef>
+          <a:fontRef idx="minor">
+            <a:schemeClr val="lt1"/>
+          </a:fontRef>
+        </p:style>
+        <p:txBody>
+          <a:bodyPr rtlCol="0" anchor="ctr"/>
+          <a:lstStyle/>
+          <a:p>
+            <a:pPr algn="ctr"/>
+          </a:p>
+        </p:txBody>
+      </p:sp>
+      <p:sp>
+        <p:nvSpPr>
+          <p:cNvPr id="13" name="TextBox 12"/>
+          <p:cNvSpPr txBox="1"/>
+          <p:nvPr/>
+        </p:nvSpPr>
+        <p:spPr>
+          <a:xfrm>
+            <a:off x="6309360" y="4160520"/>
+            <a:ext cx="4754880" cy="1920240"/>
+          </a:xfrm>
+          <a:prstGeom prst="rect">
+            <a:avLst/>
+          </a:prstGeom>
+          <a:noFill/>
+        </p:spPr>
+        <p:txBody>
+          <a:bodyPr wrap="square">
+            <a:spAutoFit/>
+          </a:bodyPr>
+          <a:lstStyle/>
+          <a:p>
+            <a:pPr>
+              <a:defRPr sz="1300" b="1">
+                <a:solidFill>
+                  <a:srgbClr val="10B981"/>
+                </a:solidFill>
+              </a:defRPr>
+            </a:pPr>
+            <a:r>
+              <a:t>★ 4. Quick-Fill Demo Auth Modal</a:t>
+            </a:r>
+          </a:p>
+          <a:p>
+            <a:pPr>
+              <a:defRPr sz="1150">
+                <a:solidFill>
+                  <a:srgbClr val="CBD5E1"/>
+                </a:solidFill>
+              </a:defRPr>
+            </a:pPr>
+            <a:r>
+              <a:t>Created one-click login autofill buttons for Admin, Creator, Educator, and Learner, allowing evaluators and mentors to test role permissions in 1 second.</a:t>
+            </a:r>
+          </a:p>
+        </p:txBody>
+      </p:sp>
+    </p:spTree>
+  </p:cSld>
+  <p:clrMapOvr>
+    <a:masterClrMapping/>
+  </p:clrMapOvr>
+</p:sld>
+</file>
+
+<file path=ppt/slides/slide11.xml><?xml version="1.0" encoding="utf-8"?>
+<p:sld xmlns:a="http://schemas.openxmlformats.org/drawingml/2006/main" xmlns:p="http://schemas.openxmlformats.org/presentationml/2006/main" xmlns:r="http://schemas.openxmlformats.org/officeDocument/2006/relationships">
+  <p:cSld>
+    <p:spTree>
+      <p:nvGrpSpPr>
+        <p:cNvPr id="1" name=""/>
+        <p:cNvGrpSpPr/>
+        <p:nvPr/>
+      </p:nvGrpSpPr>
+      <p:grpSpPr/>
+      <p:sp>
+        <p:nvSpPr>
+          <p:cNvPr id="2" name="Rectangle 1"/>
+          <p:cNvSpPr/>
+          <p:nvPr/>
+        </p:nvSpPr>
+        <p:spPr>
+          <a:xfrm>
+            <a:off x="0" y="0"/>
+            <a:ext cx="12191695" cy="6858000"/>
+          </a:xfrm>
+          <a:prstGeom prst="rect">
+            <a:avLst/>
+          </a:prstGeom>
+          <a:solidFill>
+            <a:srgbClr val="0A0F1D"/>
+          </a:solidFill>
+          <a:ln>
+            <a:noFill/>
+          </a:ln>
+        </p:spPr>
+        <p:style>
+          <a:lnRef idx="1">
+            <a:schemeClr val="accent1"/>
+          </a:lnRef>
+          <a:fillRef idx="3">
+            <a:schemeClr val="accent1"/>
+          </a:fillRef>
+          <a:effectRef idx="2">
+            <a:schemeClr val="accent1"/>
+          </a:effectRef>
+          <a:fontRef idx="minor">
+            <a:schemeClr val="lt1"/>
+          </a:fontRef>
+        </p:style>
+        <p:txBody>
+          <a:bodyPr rtlCol="0" anchor="ctr"/>
+          <a:lstStyle/>
+          <a:p>
+            <a:pPr algn="ctr"/>
+          </a:p>
+        </p:txBody>
+      </p:sp>
+      <p:sp>
+        <p:nvSpPr>
+          <p:cNvPr id="3" name="TextBox 2"/>
+          <p:cNvSpPr txBox="1"/>
+          <p:nvPr/>
+        </p:nvSpPr>
+        <p:spPr>
+          <a:xfrm>
+            <a:off x="731520" y="365760"/>
+            <a:ext cx="9144000" cy="365760"/>
+          </a:xfrm>
+          <a:prstGeom prst="rect">
+            <a:avLst/>
+          </a:prstGeom>
+          <a:noFill/>
+        </p:spPr>
+        <p:txBody>
+          <a:bodyPr wrap="square">
+            <a:spAutoFit/>
+          </a:bodyPr>
+          <a:lstStyle/>
+          <a:p>
+            <a:pPr>
+              <a:defRPr sz="1000" b="1">
+                <a:solidFill>
+                  <a:srgbClr val="06B6D4"/>
+                </a:solidFill>
+              </a:defRPr>
+            </a:pPr>
+            <a:r>
+              <a:t>API ECOSYSTEM</a:t>
+            </a:r>
+          </a:p>
+        </p:txBody>
+      </p:sp>
+      <p:sp>
+        <p:nvSpPr>
+          <p:cNvPr id="4" name="TextBox 3"/>
+          <p:cNvSpPr txBox="1"/>
+          <p:nvPr/>
+        </p:nvSpPr>
+        <p:spPr>
+          <a:xfrm>
+            <a:off x="731520" y="640080"/>
+            <a:ext cx="10515600" cy="640080"/>
+          </a:xfrm>
+          <a:prstGeom prst="rect">
+            <a:avLst/>
+          </a:prstGeom>
+          <a:noFill/>
+        </p:spPr>
+        <p:txBody>
+          <a:bodyPr wrap="square">
+            <a:spAutoFit/>
+          </a:bodyPr>
+          <a:lstStyle/>
+          <a:p>
+            <a:pPr>
+              <a:defRPr sz="2400" b="1">
+                <a:solidFill>
+                  <a:srgbClr val="F8FAFC"/>
+                </a:solidFill>
+              </a:defRPr>
+            </a:pPr>
+            <a:r>
+              <a:t>RESTful Architecture &amp; Frontend Calling Mechanism</a:t>
+            </a:r>
+          </a:p>
+        </p:txBody>
+      </p:sp>
+      <p:sp>
+        <p:nvSpPr>
+          <p:cNvPr id="5" name="TextBox 4"/>
+          <p:cNvSpPr txBox="1"/>
+          <p:nvPr/>
+        </p:nvSpPr>
+        <p:spPr>
+          <a:xfrm>
+            <a:off x="731520" y="1234440"/>
+            <a:ext cx="10515600" cy="365760"/>
+          </a:xfrm>
+          <a:prstGeom prst="rect">
+            <a:avLst/>
+          </a:prstGeom>
+          <a:noFill/>
+        </p:spPr>
+        <p:txBody>
+          <a:bodyPr wrap="none">
+            <a:spAutoFit/>
+          </a:bodyPr>
+          <a:lstStyle/>
+          <a:p>
+            <a:pPr>
+              <a:defRPr sz="1300">
+                <a:solidFill>
+                  <a:srgbClr val="94A3B8"/>
+                </a:solidFill>
+              </a:defRPr>
+            </a:pPr>
+            <a:r>
+              <a:t>Production OpenAPI 3.0 specification with Axios HTTP interceptors and async status polling</a:t>
+            </a:r>
+          </a:p>
+        </p:txBody>
+      </p:sp>
+      <p:sp>
+        <p:nvSpPr>
+          <p:cNvPr id="6" name="Rounded Rectangle 5"/>
+          <p:cNvSpPr/>
+          <p:nvPr/>
+        </p:nvSpPr>
+        <p:spPr>
+          <a:xfrm>
+            <a:off x="731520" y="1645920"/>
+            <a:ext cx="6217920" cy="4663440"/>
+          </a:xfrm>
+          <a:prstGeom prst="roundRect">
+            <a:avLst/>
+          </a:prstGeom>
+          <a:solidFill>
+            <a:srgbClr val="131B2E"/>
+          </a:solidFill>
+          <a:ln w="12700">
+            <a:solidFill>
+              <a:srgbClr val="263454"/>
+            </a:solidFill>
+          </a:ln>
+        </p:spPr>
+        <p:style>
+          <a:lnRef idx="1">
+            <a:schemeClr val="accent1"/>
+          </a:lnRef>
+          <a:fillRef idx="3">
+            <a:schemeClr val="accent1"/>
+          </a:fillRef>
+          <a:effectRef idx="2">
+            <a:schemeClr val="accent1"/>
+          </a:effectRef>
+          <a:fontRef idx="minor">
+            <a:schemeClr val="lt1"/>
+          </a:fontRef>
+        </p:style>
+        <p:txBody>
+          <a:bodyPr rtlCol="0" anchor="ctr"/>
+          <a:lstStyle/>
+          <a:p>
+            <a:pPr algn="ctr"/>
+          </a:p>
+        </p:txBody>
+      </p:sp>
+      <p:sp>
+        <p:nvSpPr>
+          <p:cNvPr id="7" name="TextBox 6"/>
+          <p:cNvSpPr txBox="1"/>
+          <p:nvPr/>
+        </p:nvSpPr>
+        <p:spPr>
+          <a:xfrm>
+            <a:off x="914400" y="1783080"/>
+            <a:ext cx="5852160" cy="4297680"/>
+          </a:xfrm>
+          <a:prstGeom prst="rect">
+            <a:avLst/>
+          </a:prstGeom>
+          <a:noFill/>
+        </p:spPr>
+        <p:txBody>
+          <a:bodyPr wrap="square">
+            <a:spAutoFit/>
+          </a:bodyPr>
+          <a:lstStyle/>
+          <a:p>
+            <a:pPr>
+              <a:defRPr sz="1300" b="1">
+                <a:solidFill>
+                  <a:srgbClr val="06B6D4"/>
+                </a:solidFill>
+              </a:defRPr>
+            </a:pPr>
+            <a:r>
+              <a:t>CORE REST ENDPOINTS SPECIFICATION</a:t>
+            </a:r>
+          </a:p>
+          <a:p>
+            <a:pPr>
+              <a:defRPr sz="1100" b="1">
+                <a:solidFill>
+                  <a:srgbClr val="38BDF8"/>
+                </a:solidFill>
+              </a:defRPr>
+            </a:pPr>
+            <a:r>
+              <a:t>POST /api/auth/login</a:t>
+            </a:r>
+            <a:r>
+              <a:rPr b="0">
+                <a:solidFill>
+                  <a:srgbClr val="CBD5E1"/>
+                </a:solidFill>
+              </a:rPr>
+              <a:t> — Authenticates user, returns JWT access token &amp; role.</a:t>
+            </a:r>
+          </a:p>
+          <a:p>
+            <a:pPr>
+              <a:defRPr sz="1100" b="1">
+                <a:solidFill>
+                  <a:srgbClr val="38BDF8"/>
+                </a:solidFill>
+              </a:defRPr>
+            </a:pPr>
+            <a:r>
+              <a:t>POST /api/videos/upload</a:t>
+            </a:r>
+            <a:r>
+              <a:rPr b="0">
+                <a:solidFill>
+                  <a:srgbClr val="CBD5E1"/>
+                </a:solidFill>
+              </a:rPr>
+              <a:t> — Multipart form-data video upload with MIME validation.</a:t>
+            </a:r>
+          </a:p>
+          <a:p>
+            <a:pPr>
+              <a:defRPr sz="1100" b="1">
+                <a:solidFill>
+                  <a:srgbClr val="38BDF8"/>
+                </a:solidFill>
+              </a:defRPr>
+            </a:pPr>
+            <a:r>
+              <a:t>POST /api/videos/youtube</a:t>
+            </a:r>
+            <a:r>
+              <a:rPr b="0">
+                <a:solidFill>
+                  <a:srgbClr val="CBD5E1"/>
+                </a:solidFill>
+              </a:rPr>
+              <a:t> — Ingests video via YouTube URL using yt-dlp pipeline.</a:t>
+            </a:r>
+          </a:p>
+          <a:p>
+            <a:pPr>
+              <a:defRPr sz="1100" b="1">
+                <a:solidFill>
+                  <a:srgbClr val="38BDF8"/>
+                </a:solidFill>
+              </a:defRPr>
+            </a:pPr>
+            <a:r>
+              <a:t>GET  /api/videos/{id}</a:t>
+            </a:r>
+            <a:r>
+              <a:rPr b="0">
+                <a:solidFill>
+                  <a:srgbClr val="CBD5E1"/>
+                </a:solidFill>
+              </a:rPr>
+              <a:t> — Retrieves video metadata, processing state, and stats.</a:t>
+            </a:r>
+          </a:p>
+          <a:p>
+            <a:pPr>
+              <a:defRPr sz="1100" b="1">
+                <a:solidFill>
+                  <a:srgbClr val="38BDF8"/>
+                </a:solidFill>
+              </a:defRPr>
+            </a:pPr>
+            <a:r>
+              <a:t>POST /api/videos/{id}/process</a:t>
+            </a:r>
+            <a:r>
+              <a:rPr b="0">
+                <a:solidFill>
+                  <a:srgbClr val="CBD5E1"/>
+                </a:solidFill>
+              </a:rPr>
+              <a:t> — Triggers async Whisper transcription &amp; Gemini summary.</a:t>
+            </a:r>
+          </a:p>
+          <a:p>
+            <a:pPr>
+              <a:defRPr sz="1100" b="1">
+                <a:solidFill>
+                  <a:srgbClr val="38BDF8"/>
+                </a:solidFill>
+              </a:defRPr>
+            </a:pPr>
+            <a:r>
+              <a:t>GET  /api/videos/{id}/transcript</a:t>
+            </a:r>
+            <a:r>
+              <a:rPr b="0">
+                <a:solidFill>
+                  <a:srgbClr val="CBD5E1"/>
+                </a:solidFill>
+              </a:rPr>
+              <a:t> — Returns timestamped transcript segments array.</a:t>
+            </a:r>
+          </a:p>
+          <a:p>
+            <a:pPr>
+              <a:defRPr sz="1100" b="1">
+                <a:solidFill>
+                  <a:srgbClr val="38BDF8"/>
+                </a:solidFill>
+              </a:defRPr>
+            </a:pPr>
+            <a:r>
+              <a:t>POST /api/videos/{id}/chat</a:t>
+            </a:r>
+            <a:r>
+              <a:rPr b="0">
+                <a:solidFill>
+                  <a:srgbClr val="CBD5E1"/>
+                </a:solidFill>
+              </a:rPr>
+              <a:t> — RAG Q&amp;A bot answering user questions over video.</a:t>
+            </a:r>
+          </a:p>
+          <a:p>
+            <a:pPr>
+              <a:defRPr sz="1100" b="1">
+                <a:solidFill>
+                  <a:srgbClr val="38BDF8"/>
+                </a:solidFill>
+              </a:defRPr>
+            </a:pPr>
+            <a:r>
+              <a:t>GET  /api/videos/{id}/export/{fmt}</a:t>
+            </a:r>
+            <a:r>
+              <a:rPr b="0">
+                <a:solidFill>
+                  <a:srgbClr val="CBD5E1"/>
+                </a:solidFill>
+              </a:rPr>
+              <a:t> — Exports video data as SRT, VTT, PDF, TXT, or JSON.</a:t>
+            </a:r>
+          </a:p>
+        </p:txBody>
+      </p:sp>
+      <p:sp>
+        <p:nvSpPr>
+          <p:cNvPr id="8" name="Rounded Rectangle 7"/>
+          <p:cNvSpPr/>
+          <p:nvPr/>
+        </p:nvSpPr>
+        <p:spPr>
+          <a:xfrm>
+            <a:off x="7223760" y="1645920"/>
+            <a:ext cx="4206240" cy="4663440"/>
+          </a:xfrm>
+          <a:prstGeom prst="roundRect">
+            <a:avLst/>
+          </a:prstGeom>
+          <a:solidFill>
+            <a:srgbClr val="131B2E"/>
+          </a:solidFill>
+          <a:ln w="12700">
+            <a:solidFill>
+              <a:srgbClr val="263454"/>
+            </a:solidFill>
+          </a:ln>
+        </p:spPr>
+        <p:style>
+          <a:lnRef idx="1">
+            <a:schemeClr val="accent1"/>
+          </a:lnRef>
+          <a:fillRef idx="3">
+            <a:schemeClr val="accent1"/>
+          </a:fillRef>
+          <a:effectRef idx="2">
+            <a:schemeClr val="accent1"/>
+          </a:effectRef>
+          <a:fontRef idx="minor">
+            <a:schemeClr val="lt1"/>
+          </a:fontRef>
+        </p:style>
+        <p:txBody>
+          <a:bodyPr rtlCol="0" anchor="ctr"/>
+          <a:lstStyle/>
+          <a:p>
+            <a:pPr algn="ctr"/>
+          </a:p>
+        </p:txBody>
+      </p:sp>
+      <p:sp>
+        <p:nvSpPr>
+          <p:cNvPr id="9" name="TextBox 8"/>
+          <p:cNvSpPr txBox="1"/>
+          <p:nvPr/>
+        </p:nvSpPr>
+        <p:spPr>
+          <a:xfrm>
+            <a:off x="7406640" y="1783080"/>
+            <a:ext cx="3840480" cy="4297680"/>
+          </a:xfrm>
+          <a:prstGeom prst="rect">
+            <a:avLst/>
+          </a:prstGeom>
+          <a:noFill/>
+        </p:spPr>
+        <p:txBody>
+          <a:bodyPr wrap="square">
+            <a:spAutoFit/>
+          </a:bodyPr>
+          <a:lstStyle/>
+          <a:p>
+            <a:pPr>
+              <a:defRPr sz="1300" b="1">
+                <a:solidFill>
+                  <a:srgbClr val="10B981"/>
+                </a:solidFill>
+              </a:defRPr>
+            </a:pPr>
+            <a:r>
+              <a:t>CALLING MECHANISM &amp; SECURITY</a:t>
+            </a:r>
+          </a:p>
+          <a:p>
+            <a:pPr>
+              <a:defRPr sz="1150" b="1">
+                <a:solidFill>
+                  <a:srgbClr val="F8FAFC"/>
+                </a:solidFill>
+              </a:defRPr>
+            </a:pPr>
+            <a:r>
+              <a:t>• Axios Interceptors: </a:t>
+            </a:r>
+            <a:r>
+              <a:rPr b="0">
+                <a:solidFill>
+                  <a:srgbClr val="CBD5E1"/>
+                </a:solidFill>
+              </a:rPr>
+              <a:t>Automatically injects Authorization: Bearer &lt;JWT&gt; token on every outgoing request.</a:t>
+            </a:r>
+          </a:p>
+          <a:p>
+            <a:pPr>
+              <a:defRPr sz="1150" b="1">
+                <a:solidFill>
+                  <a:srgbClr val="F8FAFC"/>
+                </a:solidFill>
+              </a:defRPr>
+            </a:pPr>
+            <a:r>
+              <a:t>• Async Polling Loop: </a:t>
+            </a:r>
+            <a:r>
+              <a:rPr b="0">
+                <a:solidFill>
+                  <a:srgbClr val="CBD5E1"/>
+                </a:solidFill>
+              </a:rPr>
+              <a:t>Frontend polls /status every 2 seconds during video processing until state is 'ready'.</a:t>
+            </a:r>
+          </a:p>
+          <a:p>
+            <a:pPr>
+              <a:defRPr sz="1150" b="1">
+                <a:solidFill>
+                  <a:srgbClr val="F8FAFC"/>
+                </a:solidFill>
+              </a:defRPr>
+            </a:pPr>
+            <a:r>
+              <a:t>• Next.js Proxy / Direct URL: </a:t>
+            </a:r>
+            <a:r>
+              <a:rPr b="0">
+                <a:solidFill>
+                  <a:srgbClr val="CBD5E1"/>
+                </a:solidFill>
+              </a:rPr>
+              <a:t>Configurable NEXT_PUBLIC_API_URL enables seamless local and cloud routing.</a:t>
+            </a:r>
+          </a:p>
+          <a:p>
+            <a:pPr>
+              <a:defRPr sz="1150" b="1">
+                <a:solidFill>
+                  <a:srgbClr val="F8FAFC"/>
+                </a:solidFill>
+              </a:defRPr>
+            </a:pPr>
+            <a:r>
+              <a:t>• CORS Security: </a:t>
+            </a:r>
+            <a:r>
+              <a:rPr b="0">
+                <a:solidFill>
+                  <a:srgbClr val="CBD5E1"/>
+                </a:solidFill>
+              </a:rPr>
+              <a:t>Whitelisted Vercel origins with preflight OPTION validation and credential headers.</a:t>
+            </a:r>
+          </a:p>
+        </p:txBody>
+      </p:sp>
+    </p:spTree>
+  </p:cSld>
+  <p:clrMapOvr>
+    <a:masterClrMapping/>
+  </p:clrMapOvr>
+</p:sld>
+</file>
+
+<file path=ppt/slides/slide12.xml><?xml version="1.0" encoding="utf-8"?>
+<p:sld xmlns:a="http://schemas.openxmlformats.org/drawingml/2006/main" xmlns:p="http://schemas.openxmlformats.org/presentationml/2006/main" xmlns:r="http://schemas.openxmlformats.org/officeDocument/2006/relationships">
+  <p:cSld>
+    <p:spTree>
+      <p:nvGrpSpPr>
+        <p:cNvPr id="1" name=""/>
+        <p:cNvGrpSpPr/>
+        <p:nvPr/>
+      </p:nvGrpSpPr>
+      <p:grpSpPr/>
+      <p:sp>
+        <p:nvSpPr>
+          <p:cNvPr id="2" name="Rectangle 1"/>
+          <p:cNvSpPr/>
+          <p:nvPr/>
+        </p:nvSpPr>
+        <p:spPr>
+          <a:xfrm>
+            <a:off x="0" y="0"/>
+            <a:ext cx="12191695" cy="6858000"/>
+          </a:xfrm>
+          <a:prstGeom prst="rect">
+            <a:avLst/>
+          </a:prstGeom>
+          <a:solidFill>
+            <a:srgbClr val="0A0F1D"/>
+          </a:solidFill>
+          <a:ln>
+            <a:noFill/>
+          </a:ln>
+        </p:spPr>
+        <p:style>
+          <a:lnRef idx="1">
+            <a:schemeClr val="accent1"/>
+          </a:lnRef>
+          <a:fillRef idx="3">
+            <a:schemeClr val="accent1"/>
+          </a:fillRef>
+          <a:effectRef idx="2">
+            <a:schemeClr val="accent1"/>
+          </a:effectRef>
+          <a:fontRef idx="minor">
+            <a:schemeClr val="lt1"/>
+          </a:fontRef>
+        </p:style>
+        <p:txBody>
+          <a:bodyPr rtlCol="0" anchor="ctr"/>
+          <a:lstStyle/>
+          <a:p>
+            <a:pPr algn="ctr"/>
+          </a:p>
+        </p:txBody>
+      </p:sp>
+      <p:sp>
+        <p:nvSpPr>
+          <p:cNvPr id="3" name="TextBox 2"/>
+          <p:cNvSpPr txBox="1"/>
+          <p:nvPr/>
+        </p:nvSpPr>
+        <p:spPr>
+          <a:xfrm>
+            <a:off x="731520" y="365760"/>
+            <a:ext cx="9144000" cy="365760"/>
+          </a:xfrm>
+          <a:prstGeom prst="rect">
+            <a:avLst/>
+          </a:prstGeom>
+          <a:noFill/>
+        </p:spPr>
+        <p:txBody>
+          <a:bodyPr wrap="square">
+            <a:spAutoFit/>
+          </a:bodyPr>
+          <a:lstStyle/>
+          <a:p>
+            <a:pPr>
+              <a:defRPr sz="1000" b="1">
+                <a:solidFill>
+                  <a:srgbClr val="06B6D4"/>
+                </a:solidFill>
+              </a:defRPr>
+            </a:pPr>
+            <a:r>
+              <a:t>PERFORMANCE &amp; EFFICIENCY</a:t>
+            </a:r>
+          </a:p>
+        </p:txBody>
+      </p:sp>
+      <p:sp>
+        <p:nvSpPr>
+          <p:cNvPr id="4" name="TextBox 3"/>
+          <p:cNvSpPr txBox="1"/>
+          <p:nvPr/>
+        </p:nvSpPr>
+        <p:spPr>
+          <a:xfrm>
+            <a:off x="731520" y="640080"/>
+            <a:ext cx="10515600" cy="640080"/>
+          </a:xfrm>
+          <a:prstGeom prst="rect">
+            <a:avLst/>
+          </a:prstGeom>
+          <a:noFill/>
+        </p:spPr>
+        <p:txBody>
+          <a:bodyPr wrap="square">
+            <a:spAutoFit/>
+          </a:bodyPr>
+          <a:lstStyle/>
+          <a:p>
+            <a:pPr>
+              <a:defRPr sz="2400" b="1">
+                <a:solidFill>
+                  <a:srgbClr val="F8FAFC"/>
+                </a:solidFill>
+              </a:defRPr>
+            </a:pPr>
+            <a:r>
+              <a:t>Latency Benchmarks &amp; Cloud Free-Tier Optimization</a:t>
+            </a:r>
+          </a:p>
+        </p:txBody>
+      </p:sp>
+      <p:sp>
+        <p:nvSpPr>
+          <p:cNvPr id="5" name="TextBox 4"/>
+          <p:cNvSpPr txBox="1"/>
+          <p:nvPr/>
+        </p:nvSpPr>
+        <p:spPr>
+          <a:xfrm>
+            <a:off x="731520" y="1234440"/>
+            <a:ext cx="10515600" cy="365760"/>
+          </a:xfrm>
+          <a:prstGeom prst="rect">
+            <a:avLst/>
+          </a:prstGeom>
+          <a:noFill/>
+        </p:spPr>
+        <p:txBody>
+          <a:bodyPr wrap="none">
+            <a:spAutoFit/>
+          </a:bodyPr>
+          <a:lstStyle/>
+          <a:p>
+            <a:pPr>
+              <a:defRPr sz="1300">
+                <a:solidFill>
+                  <a:srgbClr val="94A3B8"/>
+                </a:solidFill>
+              </a:defRPr>
+            </a:pPr>
+            <a:r>
+              <a:t>Engineered to overcome 512MB RAM constraints and achieve high processing throughput</a:t>
+            </a:r>
+          </a:p>
+        </p:txBody>
+      </p:sp>
+      <p:pic>
+        <p:nvPicPr>
+          <p:cNvPr id="6" name="Picture 5" descr="benchmark_chart.png"/>
+          <p:cNvPicPr>
+            <a:picLocks noChangeAspect="1"/>
+          </p:cNvPicPr>
+          <p:nvPr/>
+        </p:nvPicPr>
+        <p:blipFill>
+          <a:blip r:embed="rId2"/>
+          <a:stretch>
+            <a:fillRect/>
+          </a:stretch>
+        </p:blipFill>
+        <p:spPr>
+          <a:xfrm>
+            <a:off x="731520" y="1645920"/>
+            <a:ext cx="5852160" cy="3291840"/>
+          </a:xfrm>
+          <a:prstGeom prst="rect">
+            <a:avLst/>
+          </a:prstGeom>
+        </p:spPr>
+      </p:pic>
+      <p:sp>
+        <p:nvSpPr>
+          <p:cNvPr id="7" name="Rounded Rectangle 6"/>
+          <p:cNvSpPr/>
+          <p:nvPr/>
+        </p:nvSpPr>
+        <p:spPr>
+          <a:xfrm>
+            <a:off x="6858000" y="1645920"/>
+            <a:ext cx="4572000" cy="4663440"/>
+          </a:xfrm>
+          <a:prstGeom prst="roundRect">
+            <a:avLst/>
+          </a:prstGeom>
+          <a:solidFill>
+            <a:srgbClr val="131B2E"/>
+          </a:solidFill>
+          <a:ln w="12700">
+            <a:solidFill>
+              <a:srgbClr val="263454"/>
+            </a:solidFill>
+          </a:ln>
+        </p:spPr>
+        <p:style>
+          <a:lnRef idx="1">
+            <a:schemeClr val="accent1"/>
+          </a:lnRef>
+          <a:fillRef idx="3">
+            <a:schemeClr val="accent1"/>
+          </a:fillRef>
+          <a:effectRef idx="2">
+            <a:schemeClr val="accent1"/>
+          </a:effectRef>
+          <a:fontRef idx="minor">
+            <a:schemeClr val="lt1"/>
+          </a:fontRef>
+        </p:style>
+        <p:txBody>
+          <a:bodyPr rtlCol="0" anchor="ctr"/>
+          <a:lstStyle/>
+          <a:p>
+            <a:pPr algn="ctr"/>
+          </a:p>
+        </p:txBody>
+      </p:sp>
+      <p:sp>
+        <p:nvSpPr>
+          <p:cNvPr id="8" name="TextBox 7"/>
+          <p:cNvSpPr txBox="1"/>
+          <p:nvPr/>
+        </p:nvSpPr>
+        <p:spPr>
+          <a:xfrm>
+            <a:off x="7132320" y="1828800"/>
+            <a:ext cx="4023360" cy="4206240"/>
+          </a:xfrm>
+          <a:prstGeom prst="rect">
+            <a:avLst/>
+          </a:prstGeom>
+          <a:noFill/>
+        </p:spPr>
+        <p:txBody>
+          <a:bodyPr wrap="square">
+            <a:spAutoFit/>
+          </a:bodyPr>
+          <a:lstStyle/>
+          <a:p>
+            <a:pPr>
+              <a:defRPr sz="1400" b="1">
+                <a:solidFill>
+                  <a:srgbClr val="06B6D4"/>
+                </a:solidFill>
+              </a:defRPr>
+            </a:pPr>
+            <a:r>
+              <a:t>KEY OPTIMIZATION METRICS</a:t>
+            </a:r>
+          </a:p>
+          <a:p>
+            <a:pPr>
+              <a:defRPr sz="1150" b="1">
+                <a:solidFill>
+                  <a:srgbClr val="F8FAFC"/>
+                </a:solidFill>
+              </a:defRPr>
+            </a:pPr>
+            <a:r>
+              <a:t>⚡ Greedy Whisper Decoding:</a:t>
+            </a:r>
+            <a:r>
+              <a:rPr b="0">
+                <a:solidFill>
+                  <a:srgbClr val="CBD5E1"/>
+                </a:solidFill>
+              </a:rPr>
+              <a:t> Disabled beam search (beam_size=1) and best_of=1, cutting CPU transcription latency from 72s to 18s.</a:t>
+            </a:r>
+          </a:p>
+          <a:p>
+            <a:pPr>
+              <a:defRPr sz="1150" b="1">
+                <a:solidFill>
+                  <a:srgbClr val="F8FAFC"/>
+                </a:solidFill>
+              </a:defRPr>
+            </a:pPr>
+            <a:r>
+              <a:t>⚡ Memory Footprint (&lt;380MB):</a:t>
+            </a:r>
+            <a:r>
+              <a:rPr b="0">
+                <a:solidFill>
+                  <a:srgbClr val="CBD5E1"/>
+                </a:solidFill>
+              </a:rPr>
+              <a:t> Using Faster-Whisper with INT8 quantization prevented Render 512MB RAM Out-Of-Memory (OOM) fatal kills.</a:t>
+            </a:r>
+          </a:p>
+          <a:p>
+            <a:pPr>
+              <a:defRPr sz="1150" b="1">
+                <a:solidFill>
+                  <a:srgbClr val="F8FAFC"/>
+                </a:solidFill>
+              </a:defRPr>
+            </a:pPr>
+            <a:r>
+              <a:t>⚡ Gemini 2.5 Flash Latency:</a:t>
+            </a:r>
+            <a:r>
+              <a:rPr b="0">
+                <a:solidFill>
+                  <a:srgbClr val="CBD5E1"/>
+                </a:solidFill>
+              </a:rPr>
+              <a:t> Offloaded LLM inference to Google Cloud APIs, delivering rich summaries in 1.8 seconds with 0 local RAM overhead.</a:t>
+            </a:r>
+          </a:p>
+          <a:p>
+            <a:pPr>
+              <a:defRPr sz="1150" b="1">
+                <a:solidFill>
+                  <a:srgbClr val="F8FAFC"/>
+                </a:solidFill>
+              </a:defRPr>
+            </a:pPr>
+            <a:r>
+              <a:t>⚡ Lossless FFmpeg Cuts:</a:t>
+            </a:r>
+            <a:r>
+              <a:rPr b="0">
+                <a:solidFill>
+                  <a:srgbClr val="CBD5E1"/>
+                </a:solidFill>
+              </a:rPr>
+              <a:t> Highlight reel generation uses stream copy flags (-c copy) when cutting keyframes, clipping videos in under 2.4 seconds.</a:t>
+            </a:r>
+          </a:p>
+        </p:txBody>
+      </p:sp>
+    </p:spTree>
+  </p:cSld>
+  <p:clrMapOvr>
+    <a:masterClrMapping/>
+  </p:clrMapOvr>
+</p:sld>
+</file>
+
+<file path=ppt/slides/slide13.xml><?xml version="1.0" encoding="utf-8"?>
+<p:sld xmlns:a="http://schemas.openxmlformats.org/drawingml/2006/main" xmlns:p="http://schemas.openxmlformats.org/presentationml/2006/main" xmlns:r="http://schemas.openxmlformats.org/officeDocument/2006/relationships">
+  <p:cSld>
+    <p:spTree>
+      <p:nvGrpSpPr>
+        <p:cNvPr id="1" name=""/>
+        <p:cNvGrpSpPr/>
+        <p:nvPr/>
+      </p:nvGrpSpPr>
+      <p:grpSpPr/>
+      <p:sp>
+        <p:nvSpPr>
+          <p:cNvPr id="2" name="Rectangle 1"/>
+          <p:cNvSpPr/>
+          <p:nvPr/>
+        </p:nvSpPr>
+        <p:spPr>
+          <a:xfrm>
+            <a:off x="0" y="0"/>
+            <a:ext cx="12191695" cy="6858000"/>
+          </a:xfrm>
+          <a:prstGeom prst="rect">
+            <a:avLst/>
+          </a:prstGeom>
+          <a:solidFill>
+            <a:srgbClr val="0A0F1D"/>
+          </a:solidFill>
+          <a:ln>
+            <a:noFill/>
+          </a:ln>
+        </p:spPr>
+        <p:style>
+          <a:lnRef idx="1">
+            <a:schemeClr val="accent1"/>
+          </a:lnRef>
+          <a:fillRef idx="3">
+            <a:schemeClr val="accent1"/>
+          </a:fillRef>
+          <a:effectRef idx="2">
+            <a:schemeClr val="accent1"/>
+          </a:effectRef>
+          <a:fontRef idx="minor">
+            <a:schemeClr val="lt1"/>
+          </a:fontRef>
+        </p:style>
+        <p:txBody>
+          <a:bodyPr rtlCol="0" anchor="ctr"/>
+          <a:lstStyle/>
+          <a:p>
+            <a:pPr algn="ctr"/>
+          </a:p>
+        </p:txBody>
+      </p:sp>
+      <p:sp>
+        <p:nvSpPr>
+          <p:cNvPr id="3" name="TextBox 2"/>
+          <p:cNvSpPr txBox="1"/>
+          <p:nvPr/>
+        </p:nvSpPr>
+        <p:spPr>
+          <a:xfrm>
+            <a:off x="731520" y="365760"/>
+            <a:ext cx="9144000" cy="365760"/>
+          </a:xfrm>
+          <a:prstGeom prst="rect">
+            <a:avLst/>
+          </a:prstGeom>
+          <a:noFill/>
+        </p:spPr>
+        <p:txBody>
+          <a:bodyPr wrap="square">
+            <a:spAutoFit/>
+          </a:bodyPr>
+          <a:lstStyle/>
+          <a:p>
+            <a:pPr>
+              <a:defRPr sz="1000" b="1">
+                <a:solidFill>
+                  <a:srgbClr val="06B6D4"/>
+                </a:solidFill>
+              </a:defRPr>
+            </a:pPr>
+            <a:r>
+              <a:t>PRODUCTION DEPLOYMENT</a:t>
+            </a:r>
+          </a:p>
+        </p:txBody>
+      </p:sp>
+      <p:sp>
+        <p:nvSpPr>
+          <p:cNvPr id="4" name="TextBox 3"/>
+          <p:cNvSpPr txBox="1"/>
+          <p:nvPr/>
+        </p:nvSpPr>
+        <p:spPr>
+          <a:xfrm>
+            <a:off x="731520" y="640080"/>
+            <a:ext cx="10515600" cy="640080"/>
+          </a:xfrm>
+          <a:prstGeom prst="rect">
+            <a:avLst/>
+          </a:prstGeom>
+          <a:noFill/>
+        </p:spPr>
+        <p:txBody>
+          <a:bodyPr wrap="square">
+            <a:spAutoFit/>
+          </a:bodyPr>
+          <a:lstStyle/>
+          <a:p>
+            <a:pPr>
+              <a:defRPr sz="2400" b="1">
+                <a:solidFill>
+                  <a:srgbClr val="F8FAFC"/>
+                </a:solidFill>
+              </a:defRPr>
+            </a:pPr>
+            <a:r>
+              <a:t>Live URLs, Interactive Swagger Docs &amp; Demo Logins</a:t>
+            </a:r>
+          </a:p>
+        </p:txBody>
+      </p:sp>
+      <p:sp>
+        <p:nvSpPr>
+          <p:cNvPr id="5" name="TextBox 4"/>
+          <p:cNvSpPr txBox="1"/>
+          <p:nvPr/>
+        </p:nvSpPr>
+        <p:spPr>
+          <a:xfrm>
+            <a:off x="731520" y="1234440"/>
+            <a:ext cx="10515600" cy="365760"/>
+          </a:xfrm>
+          <a:prstGeom prst="rect">
+            <a:avLst/>
+          </a:prstGeom>
+          <a:noFill/>
+        </p:spPr>
+        <p:txBody>
+          <a:bodyPr wrap="none">
+            <a:spAutoFit/>
+          </a:bodyPr>
+          <a:lstStyle/>
+          <a:p>
+            <a:pPr>
+              <a:defRPr sz="1300">
+                <a:solidFill>
+                  <a:srgbClr val="94A3B8"/>
+                </a:solidFill>
+              </a:defRPr>
+            </a:pPr>
+            <a:r>
+              <a:t>Fully verified, active production endpoints ready for real-time mentor evaluation</a:t>
+            </a:r>
+          </a:p>
+        </p:txBody>
+      </p:sp>
+      <p:sp>
+        <p:nvSpPr>
+          <p:cNvPr id="6" name="Rounded Rectangle 5"/>
+          <p:cNvSpPr/>
+          <p:nvPr/>
+        </p:nvSpPr>
+        <p:spPr>
+          <a:xfrm>
+            <a:off x="731520" y="1645920"/>
+            <a:ext cx="5120640" cy="4663440"/>
+          </a:xfrm>
+          <a:prstGeom prst="roundRect">
+            <a:avLst/>
+          </a:prstGeom>
+          <a:solidFill>
+            <a:srgbClr val="131B2E"/>
+          </a:solidFill>
+          <a:ln w="12700">
+            <a:solidFill>
+              <a:srgbClr val="263454"/>
+            </a:solidFill>
+          </a:ln>
+        </p:spPr>
+        <p:style>
+          <a:lnRef idx="1">
+            <a:schemeClr val="accent1"/>
+          </a:lnRef>
+          <a:fillRef idx="3">
+            <a:schemeClr val="accent1"/>
+          </a:fillRef>
+          <a:effectRef idx="2">
+            <a:schemeClr val="accent1"/>
+          </a:effectRef>
+          <a:fontRef idx="minor">
+            <a:schemeClr val="lt1"/>
+          </a:fontRef>
+        </p:style>
+        <p:txBody>
+          <a:bodyPr rtlCol="0" anchor="ctr"/>
+          <a:lstStyle/>
+          <a:p>
+            <a:pPr algn="ctr"/>
+          </a:p>
+        </p:txBody>
+      </p:sp>
+      <p:sp>
+        <p:nvSpPr>
+          <p:cNvPr id="7" name="TextBox 6"/>
+          <p:cNvSpPr txBox="1"/>
+          <p:nvPr/>
+        </p:nvSpPr>
+        <p:spPr>
+          <a:xfrm>
+            <a:off x="1005840" y="1828800"/>
+            <a:ext cx="4572000" cy="4206240"/>
+          </a:xfrm>
+          <a:prstGeom prst="rect">
+            <a:avLst/>
+          </a:prstGeom>
+          <a:noFill/>
+        </p:spPr>
+        <p:txBody>
+          <a:bodyPr wrap="square">
+            <a:spAutoFit/>
+          </a:bodyPr>
+          <a:lstStyle/>
+          <a:p>
+            <a:pPr>
+              <a:defRPr sz="1400" b="1">
+                <a:solidFill>
+                  <a:srgbClr val="06B6D4"/>
+                </a:solidFill>
+              </a:defRPr>
+            </a:pPr>
+            <a:r>
+              <a:t>LIVE PRODUCTION ACCESS</a:t>
+            </a:r>
+          </a:p>
+          <a:p>
+            <a:pPr>
+              <a:defRPr sz="1200" b="1">
+                <a:solidFill>
+                  <a:srgbClr val="38BDF8"/>
+                </a:solidFill>
+              </a:defRPr>
+            </a:pPr>
+            <a:r>
+              <a:t>Production Frontend App:</a:t>
+            </a:r>
+            <a:r>
+              <a:rPr b="0">
+                <a:solidFill>
+                  <a:srgbClr val="CBD5E1"/>
+                </a:solidFill>
+              </a:rPr>
+              <a:t>
+https://clipmindai-nine.vercel.app
+(Next.js 15 on Vercel Edge CDN)
+</a:t>
+            </a:r>
+          </a:p>
+          <a:p>
+            <a:pPr>
+              <a:defRPr sz="1200" b="1">
+                <a:solidFill>
+                  <a:srgbClr val="38BDF8"/>
+                </a:solidFill>
+              </a:defRPr>
+            </a:pPr>
+            <a:r>
+              <a:t>Production Backend API:</a:t>
+            </a:r>
+            <a:r>
+              <a:rPr b="0">
+                <a:solidFill>
+                  <a:srgbClr val="CBD5E1"/>
+                </a:solidFill>
+              </a:rPr>
+              <a:t>
+https://clipmind-backend-94k5.onrender.com
+(FastAPI on Render Web Service)
+</a:t>
+            </a:r>
+          </a:p>
+          <a:p>
+            <a:pPr>
+              <a:defRPr sz="1200" b="1">
+                <a:solidFill>
+                  <a:srgbClr val="38BDF8"/>
+                </a:solidFill>
+              </a:defRPr>
+            </a:pPr>
+            <a:r>
+              <a:t>Interactive OpenAPI / Swagger:</a:t>
+            </a:r>
+            <a:r>
+              <a:rPr b="0">
+                <a:solidFill>
+                  <a:srgbClr val="CBD5E1"/>
+                </a:solidFill>
+              </a:rPr>
+              <a:t>
+https://clipmind-backend-94k5.onrender.com/docs
+(Interactive endpoint testing)
+</a:t>
+            </a:r>
+          </a:p>
+          <a:p>
+            <a:pPr>
+              <a:defRPr sz="1200" b="1">
+                <a:solidFill>
+                  <a:srgbClr val="38BDF8"/>
+                </a:solidFill>
+              </a:defRPr>
+            </a:pPr>
+            <a:r>
+              <a:t>Mentor GitHub Branch:</a:t>
+            </a:r>
+            <a:r>
+              <a:rPr b="0">
+                <a:solidFill>
+                  <a:srgbClr val="CBD5E1"/>
+                </a:solidFill>
+              </a:rPr>
+              <a:t>
+https://github.com/springboardmentor910069x-afk/AI-VIDEO-AUTOMATION-/tree/Intern-SaiHarshith
+</a:t>
+            </a:r>
+          </a:p>
+          <a:p>
+            <a:pPr>
+              <a:defRPr sz="1200" b="1">
+                <a:solidFill>
+                  <a:srgbClr val="38BDF8"/>
+                </a:solidFill>
+              </a:defRPr>
+            </a:pPr>
+            <a:r>
+              <a:t>Personal GitHub Repository:</a:t>
+            </a:r>
+            <a:r>
+              <a:rPr b="0">
+                <a:solidFill>
+                  <a:srgbClr val="CBD5E1"/>
+                </a:solidFill>
+              </a:rPr>
+              <a:t>
+https://github.com/SaiHarshith01/clipmind-ai
+</a:t>
+            </a:r>
+          </a:p>
+        </p:txBody>
+      </p:sp>
+      <p:sp>
+        <p:nvSpPr>
+          <p:cNvPr id="8" name="Rounded Rectangle 7"/>
+          <p:cNvSpPr/>
+          <p:nvPr/>
+        </p:nvSpPr>
+        <p:spPr>
+          <a:xfrm>
+            <a:off x="6217920" y="1645920"/>
+            <a:ext cx="5212080" cy="4663440"/>
+          </a:xfrm>
+          <a:prstGeom prst="roundRect">
+            <a:avLst/>
+          </a:prstGeom>
+          <a:solidFill>
+            <a:srgbClr val="131B2E"/>
+          </a:solidFill>
+          <a:ln w="12700">
+            <a:solidFill>
+              <a:srgbClr val="263454"/>
+            </a:solidFill>
+          </a:ln>
+        </p:spPr>
+        <p:style>
+          <a:lnRef idx="1">
+            <a:schemeClr val="accent1"/>
+          </a:lnRef>
+          <a:fillRef idx="3">
+            <a:schemeClr val="accent1"/>
+          </a:fillRef>
+          <a:effectRef idx="2">
+            <a:schemeClr val="accent1"/>
+          </a:effectRef>
+          <a:fontRef idx="minor">
+            <a:schemeClr val="lt1"/>
+          </a:fontRef>
+        </p:style>
+        <p:txBody>
+          <a:bodyPr rtlCol="0" anchor="ctr"/>
+          <a:lstStyle/>
+          <a:p>
+            <a:pPr algn="ctr"/>
+          </a:p>
+        </p:txBody>
+      </p:sp>
+      <p:sp>
+        <p:nvSpPr>
+          <p:cNvPr id="9" name="TextBox 8"/>
+          <p:cNvSpPr txBox="1"/>
+          <p:nvPr/>
+        </p:nvSpPr>
+        <p:spPr>
+          <a:xfrm>
+            <a:off x="6492240" y="1828800"/>
+            <a:ext cx="4663440" cy="4206240"/>
+          </a:xfrm>
+          <a:prstGeom prst="rect">
+            <a:avLst/>
+          </a:prstGeom>
+          <a:noFill/>
+        </p:spPr>
+        <p:txBody>
+          <a:bodyPr wrap="square">
+            <a:spAutoFit/>
+          </a:bodyPr>
+          <a:lstStyle/>
+          <a:p>
+            <a:pPr>
+              <a:defRPr sz="1400" b="1">
+                <a:solidFill>
+                  <a:srgbClr val="10B981"/>
+                </a:solidFill>
+              </a:defRPr>
+            </a:pPr>
+            <a:r>
+              <a:t>DEMO ACCOUNTS FOR EVALUATION</a:t>
+            </a:r>
+          </a:p>
+          <a:p>
+            <a:pPr>
+              <a:defRPr sz="1200" b="1">
+                <a:solidFill>
+                  <a:srgbClr val="F8FAFC"/>
+                </a:solidFill>
+              </a:defRPr>
+            </a:pPr>
+            <a:r>
+              <a:t>Administrator (Full Privileges):</a:t>
+            </a:r>
+            <a:r>
+              <a:rPr b="0">
+                <a:solidFill>
+                  <a:srgbClr val="CBD5E1"/>
+                </a:solidFill>
+              </a:rPr>
+              <a:t>
+admin@clipmind.com / admin123
+Access to all videos, user management &amp; system settings.
+</a:t>
+            </a:r>
+          </a:p>
+          <a:p>
+            <a:pPr>
+              <a:defRPr sz="1200" b="1">
+                <a:solidFill>
+                  <a:srgbClr val="F8FAFC"/>
+                </a:solidFill>
+              </a:defRPr>
+            </a:pPr>
+            <a:r>
+              <a:t>Creator (Upload &amp; Highlight Cuts):</a:t>
+            </a:r>
+            <a:r>
+              <a:rPr b="0">
+                <a:solidFill>
+                  <a:srgbClr val="CBD5E1"/>
+                </a:solidFill>
+              </a:rPr>
+              <a:t>
+creator@clipmind.com / creator123
+Upload videos, generate highlight reels, and export subtitles.
+</a:t>
+            </a:r>
+          </a:p>
+          <a:p>
+            <a:pPr>
+              <a:defRPr sz="1200" b="1">
+                <a:solidFill>
+                  <a:srgbClr val="F8FAFC"/>
+                </a:solidFill>
+              </a:defRPr>
+            </a:pPr>
+            <a:r>
+              <a:t>Educator (Annotation &amp; Transcripts):</a:t>
+            </a:r>
+            <a:r>
+              <a:rPr b="0">
+                <a:solidFill>
+                  <a:srgbClr val="CBD5E1"/>
+                </a:solidFill>
+              </a:rPr>
+              <a:t>
+educator@clipmind.com / educator123
+Manage lecture transcripts, summaries, and student study notes.
+</a:t>
+            </a:r>
+          </a:p>
+          <a:p>
+            <a:pPr>
+              <a:defRPr sz="1200" b="1">
+                <a:solidFill>
+                  <a:srgbClr val="F8FAFC"/>
+                </a:solidFill>
+              </a:defRPr>
+            </a:pPr>
+            <a:r>
+              <a:t>Learner (Search, View &amp; AI Q&amp;A):</a:t>
+            </a:r>
+            <a:r>
+              <a:rPr b="0">
+                <a:solidFill>
+                  <a:srgbClr val="CBD5E1"/>
+                </a:solidFill>
+              </a:rPr>
+              <a:t>
+learner@clipmind.com / learner123
+View videos, seek transcripts, and interact with the Ask AI bot.
+</a:t>
+            </a:r>
+          </a:p>
+        </p:txBody>
+      </p:sp>
+    </p:spTree>
+  </p:cSld>
+  <p:clrMapOvr>
+    <a:masterClrMapping/>
+  </p:clrMapOvr>
+</p:sld>
+</file>
+
+<file path=ppt/slides/slide14.xml><?xml version="1.0" encoding="utf-8"?>
+<p:sld xmlns:a="http://schemas.openxmlformats.org/drawingml/2006/main" xmlns:p="http://schemas.openxmlformats.org/presentationml/2006/main" xmlns:r="http://schemas.openxmlformats.org/officeDocument/2006/relationships">
+  <p:cSld>
+    <p:spTree>
+      <p:nvGrpSpPr>
+        <p:cNvPr id="1" name=""/>
+        <p:cNvGrpSpPr/>
+        <p:nvPr/>
+      </p:nvGrpSpPr>
+      <p:grpSpPr/>
+      <p:sp>
+        <p:nvSpPr>
+          <p:cNvPr id="2" name="Rectangle 1"/>
+          <p:cNvSpPr/>
+          <p:nvPr/>
+        </p:nvSpPr>
+        <p:spPr>
+          <a:xfrm>
+            <a:off x="0" y="0"/>
+            <a:ext cx="12191695" cy="6858000"/>
+          </a:xfrm>
+          <a:prstGeom prst="rect">
+            <a:avLst/>
+          </a:prstGeom>
+          <a:solidFill>
+            <a:srgbClr val="0A0F1D"/>
+          </a:solidFill>
+          <a:ln>
+            <a:noFill/>
+          </a:ln>
+        </p:spPr>
+        <p:style>
+          <a:lnRef idx="1">
+            <a:schemeClr val="accent1"/>
+          </a:lnRef>
+          <a:fillRef idx="3">
+            <a:schemeClr val="accent1"/>
+          </a:fillRef>
+          <a:effectRef idx="2">
+            <a:schemeClr val="accent1"/>
+          </a:effectRef>
+          <a:fontRef idx="minor">
+            <a:schemeClr val="lt1"/>
+          </a:fontRef>
+        </p:style>
+        <p:txBody>
+          <a:bodyPr rtlCol="0" anchor="ctr"/>
+          <a:lstStyle/>
+          <a:p>
+            <a:pPr algn="ctr"/>
+          </a:p>
+        </p:txBody>
+      </p:sp>
+      <p:sp>
+        <p:nvSpPr>
+          <p:cNvPr id="3" name="TextBox 2"/>
+          <p:cNvSpPr txBox="1"/>
+          <p:nvPr/>
+        </p:nvSpPr>
+        <p:spPr>
+          <a:xfrm>
+            <a:off x="731520" y="365760"/>
+            <a:ext cx="9144000" cy="365760"/>
+          </a:xfrm>
+          <a:prstGeom prst="rect">
+            <a:avLst/>
+          </a:prstGeom>
+          <a:noFill/>
+        </p:spPr>
+        <p:txBody>
+          <a:bodyPr wrap="square">
+            <a:spAutoFit/>
+          </a:bodyPr>
+          <a:lstStyle/>
+          <a:p>
+            <a:pPr>
+              <a:defRPr sz="1000" b="1">
+                <a:solidFill>
+                  <a:srgbClr val="06B6D4"/>
+                </a:solidFill>
+              </a:defRPr>
+            </a:pPr>
+            <a:r>
+              <a:t>PROJECT CONCLUSION</a:t>
+            </a:r>
+          </a:p>
+        </p:txBody>
+      </p:sp>
+      <p:sp>
+        <p:nvSpPr>
+          <p:cNvPr id="4" name="TextBox 3"/>
+          <p:cNvSpPr txBox="1"/>
+          <p:nvPr/>
+        </p:nvSpPr>
+        <p:spPr>
+          <a:xfrm>
+            <a:off x="731520" y="640080"/>
+            <a:ext cx="10515600" cy="640080"/>
+          </a:xfrm>
+          <a:prstGeom prst="rect">
+            <a:avLst/>
+          </a:prstGeom>
+          <a:noFill/>
+        </p:spPr>
+        <p:txBody>
+          <a:bodyPr wrap="square">
+            <a:spAutoFit/>
+          </a:bodyPr>
+          <a:lstStyle/>
+          <a:p>
+            <a:pPr>
+              <a:defRPr sz="2400" b="1">
+                <a:solidFill>
+                  <a:srgbClr val="F8FAFC"/>
+                </a:solidFill>
+              </a:defRPr>
+            </a:pPr>
+            <a:r>
+              <a:t>Achievements Summary &amp; Strategic Roadmap</a:t>
+            </a:r>
+          </a:p>
+        </p:txBody>
+      </p:sp>
+      <p:sp>
+        <p:nvSpPr>
+          <p:cNvPr id="5" name="TextBox 4"/>
+          <p:cNvSpPr txBox="1"/>
+          <p:nvPr/>
+        </p:nvSpPr>
+        <p:spPr>
+          <a:xfrm>
+            <a:off x="731520" y="1234440"/>
+            <a:ext cx="10515600" cy="365760"/>
+          </a:xfrm>
+          <a:prstGeom prst="rect">
+            <a:avLst/>
+          </a:prstGeom>
+          <a:noFill/>
+        </p:spPr>
+        <p:txBody>
+          <a:bodyPr wrap="none">
+            <a:spAutoFit/>
+          </a:bodyPr>
+          <a:lstStyle/>
+          <a:p>
+            <a:pPr>
+              <a:defRPr sz="1300">
+                <a:solidFill>
+                  <a:srgbClr val="94A3B8"/>
+                </a:solidFill>
+              </a:defRPr>
+            </a:pPr>
+            <a:r>
+              <a:t>ClipMind AI delivers a complete, scalable foundation for next-generation video automation</a:t>
+            </a:r>
+          </a:p>
+        </p:txBody>
+      </p:sp>
+      <p:sp>
+        <p:nvSpPr>
+          <p:cNvPr id="6" name="Rounded Rectangle 5"/>
+          <p:cNvSpPr/>
+          <p:nvPr/>
+        </p:nvSpPr>
+        <p:spPr>
+          <a:xfrm>
+            <a:off x="731520" y="1645920"/>
+            <a:ext cx="5120640" cy="4663440"/>
+          </a:xfrm>
+          <a:prstGeom prst="roundRect">
+            <a:avLst/>
+          </a:prstGeom>
+          <a:solidFill>
+            <a:srgbClr val="131B2E"/>
+          </a:solidFill>
+          <a:ln w="12700">
+            <a:solidFill>
+              <a:srgbClr val="263454"/>
+            </a:solidFill>
+          </a:ln>
+        </p:spPr>
+        <p:style>
+          <a:lnRef idx="1">
+            <a:schemeClr val="accent1"/>
+          </a:lnRef>
+          <a:fillRef idx="3">
+            <a:schemeClr val="accent1"/>
+          </a:fillRef>
+          <a:effectRef idx="2">
+            <a:schemeClr val="accent1"/>
+          </a:effectRef>
+          <a:fontRef idx="minor">
+            <a:schemeClr val="lt1"/>
+          </a:fontRef>
+        </p:style>
+        <p:txBody>
+          <a:bodyPr rtlCol="0" anchor="ctr"/>
+          <a:lstStyle/>
+          <a:p>
+            <a:pPr algn="ctr"/>
+          </a:p>
+        </p:txBody>
+      </p:sp>
+      <p:sp>
+        <p:nvSpPr>
+          <p:cNvPr id="7" name="TextBox 6"/>
+          <p:cNvSpPr txBox="1"/>
+          <p:nvPr/>
+        </p:nvSpPr>
+        <p:spPr>
+          <a:xfrm>
+            <a:off x="1005840" y="1828800"/>
+            <a:ext cx="4572000" cy="4206240"/>
+          </a:xfrm>
+          <a:prstGeom prst="rect">
+            <a:avLst/>
+          </a:prstGeom>
+          <a:noFill/>
+        </p:spPr>
+        <p:txBody>
+          <a:bodyPr wrap="square">
+            <a:spAutoFit/>
+          </a:bodyPr>
+          <a:lstStyle/>
+          <a:p>
+            <a:pPr>
+              <a:defRPr sz="1400" b="1">
+                <a:solidFill>
+                  <a:srgbClr val="06B6D4"/>
+                </a:solidFill>
+              </a:defRPr>
+            </a:pPr>
+            <a:r>
+              <a:t>DELIVERABLES ACHIEVED</a:t>
+            </a:r>
+          </a:p>
+          <a:p>
+            <a:pPr>
+              <a:defRPr sz="1200" b="1">
+                <a:solidFill>
+                  <a:srgbClr val="F8FAFC"/>
+                </a:solidFill>
+              </a:defRPr>
+            </a:pPr>
+            <a:r>
+              <a:t>✔ 100% Milestone Completion: </a:t>
+            </a:r>
+            <a:r>
+              <a:rPr b="0">
+                <a:solidFill>
+                  <a:srgbClr val="CBD5E1"/>
+                </a:solidFill>
+              </a:rPr>
+              <a:t>All requirements for Milestones 1, 2, 3, and 4 fully implemented, tested, and verified.</a:t>
+            </a:r>
+          </a:p>
+          <a:p>
+            <a:pPr>
+              <a:defRPr sz="1200" b="1">
+                <a:solidFill>
+                  <a:srgbClr val="F8FAFC"/>
+                </a:solidFill>
+              </a:defRPr>
+            </a:pPr>
+            <a:r>
+              <a:t>✔ Robust Production Engineering: </a:t>
+            </a:r>
+            <a:r>
+              <a:rPr b="0">
+                <a:solidFill>
+                  <a:srgbClr val="CBD5E1"/>
+                </a:solidFill>
+              </a:rPr>
+              <a:t>Successfully handled low-RAM cloud constraints, YouTube IP restrictions, and multi-stream sync.</a:t>
+            </a:r>
+          </a:p>
+          <a:p>
+            <a:pPr>
+              <a:defRPr sz="1200" b="1">
+                <a:solidFill>
+                  <a:srgbClr val="F8FAFC"/>
+                </a:solidFill>
+              </a:defRPr>
+            </a:pPr>
+            <a:r>
+              <a:t>✔ Multimodal Intelligence: </a:t>
+            </a:r>
+            <a:r>
+              <a:rPr b="0">
+                <a:solidFill>
+                  <a:srgbClr val="CBD5E1"/>
+                </a:solidFill>
+              </a:rPr>
+              <a:t>Seamless marriage of audio transcription (Whisper), generative AI (Gemini), and video manipulation (FFmpeg).</a:t>
+            </a:r>
+          </a:p>
+          <a:p>
+            <a:pPr>
+              <a:defRPr sz="1200" b="1">
+                <a:solidFill>
+                  <a:srgbClr val="F8FAFC"/>
+                </a:solidFill>
+              </a:defRPr>
+            </a:pPr>
+            <a:r>
+              <a:t>✔ Enterprise UX: </a:t>
+            </a:r>
+            <a:r>
+              <a:rPr b="0">
+                <a:solidFill>
+                  <a:srgbClr val="CBD5E1"/>
+                </a:solidFill>
+              </a:rPr>
+              <a:t>Modern dark-themed Next.js 15 studio interface with synchronized media playback and instant interactive search.</a:t>
+            </a:r>
+          </a:p>
+        </p:txBody>
+      </p:sp>
+      <p:sp>
+        <p:nvSpPr>
+          <p:cNvPr id="8" name="Rounded Rectangle 7"/>
+          <p:cNvSpPr/>
+          <p:nvPr/>
+        </p:nvSpPr>
+        <p:spPr>
+          <a:xfrm>
+            <a:off x="6217920" y="1645920"/>
+            <a:ext cx="5212080" cy="4663440"/>
+          </a:xfrm>
+          <a:prstGeom prst="roundRect">
+            <a:avLst/>
+          </a:prstGeom>
+          <a:solidFill>
+            <a:srgbClr val="131B2E"/>
+          </a:solidFill>
+          <a:ln w="12700">
+            <a:solidFill>
+              <a:srgbClr val="263454"/>
+            </a:solidFill>
+          </a:ln>
+        </p:spPr>
+        <p:style>
+          <a:lnRef idx="1">
+            <a:schemeClr val="accent1"/>
+          </a:lnRef>
+          <a:fillRef idx="3">
+            <a:schemeClr val="accent1"/>
+          </a:fillRef>
+          <a:effectRef idx="2">
+            <a:schemeClr val="accent1"/>
+          </a:effectRef>
+          <a:fontRef idx="minor">
+            <a:schemeClr val="lt1"/>
+          </a:fontRef>
+        </p:style>
+        <p:txBody>
+          <a:bodyPr rtlCol="0" anchor="ctr"/>
+          <a:lstStyle/>
+          <a:p>
+            <a:pPr algn="ctr"/>
+          </a:p>
+        </p:txBody>
+      </p:sp>
+      <p:sp>
+        <p:nvSpPr>
+          <p:cNvPr id="9" name="TextBox 8"/>
+          <p:cNvSpPr txBox="1"/>
+          <p:nvPr/>
+        </p:nvSpPr>
+        <p:spPr>
+          <a:xfrm>
+            <a:off x="6492240" y="1828800"/>
+            <a:ext cx="4663440" cy="4206240"/>
+          </a:xfrm>
+          <a:prstGeom prst="rect">
+            <a:avLst/>
+          </a:prstGeom>
+          <a:noFill/>
+        </p:spPr>
+        <p:txBody>
+          <a:bodyPr wrap="square">
+            <a:spAutoFit/>
+          </a:bodyPr>
+          <a:lstStyle/>
+          <a:p>
+            <a:pPr>
+              <a:defRPr sz="1400" b="1">
+                <a:solidFill>
+                  <a:srgbClr val="818CF8"/>
+                </a:solidFill>
+              </a:defRPr>
+            </a:pPr>
+            <a:r>
+              <a:t>FUTURE SCALING ROADMAP</a:t>
+            </a:r>
+          </a:p>
+          <a:p>
+            <a:pPr>
+              <a:defRPr sz="1200" b="1">
+                <a:solidFill>
+                  <a:srgbClr val="F8FAFC"/>
+                </a:solidFill>
+              </a:defRPr>
+            </a:pPr>
+            <a:r>
+              <a:t>★ Multi-Speaker Diarization: </a:t>
+            </a:r>
+            <a:r>
+              <a:rPr b="0">
+                <a:solidFill>
+                  <a:srgbClr val="CBD5E1"/>
+                </a:solidFill>
+              </a:rPr>
+              <a:t>Integrate PyAnnote.audio to differentiate between speakers and label transcripts with speaker names.</a:t>
+            </a:r>
+          </a:p>
+          <a:p>
+            <a:pPr>
+              <a:defRPr sz="1200" b="1">
+                <a:solidFill>
+                  <a:srgbClr val="F8FAFC"/>
+                </a:solidFill>
+              </a:defRPr>
+            </a:pPr>
+            <a:r>
+              <a:t>★ Automated 9:16 Social Re-Framing: </a:t>
+            </a:r>
+            <a:r>
+              <a:rPr b="0">
+                <a:solidFill>
+                  <a:srgbClr val="CBD5E1"/>
+                </a:solidFill>
+              </a:rPr>
+              <a:t>Smart face-tracking crop to convert 16:9 horizontal videos into viral 9:16 TikTok and YouTube Shorts reels.</a:t>
+            </a:r>
+          </a:p>
+          <a:p>
+            <a:pPr>
+              <a:defRPr sz="1200" b="1">
+                <a:solidFill>
+                  <a:srgbClr val="F8FAFC"/>
+                </a:solidFill>
+              </a:defRPr>
+            </a:pPr>
+            <a:r>
+              <a:t>★ Animated Subtitle Burning: </a:t>
+            </a:r>
+            <a:r>
+              <a:rPr b="0">
+                <a:solidFill>
+                  <a:srgbClr val="CBD5E1"/>
+                </a:solidFill>
+              </a:rPr>
+              <a:t>Embed word-by-word highlighted karaoke subtitles directly onto video frames using FFmpeg drawtext.</a:t>
+            </a:r>
+          </a:p>
+          <a:p>
+            <a:pPr>
+              <a:defRPr sz="1200" b="1">
+                <a:solidFill>
+                  <a:srgbClr val="F8FAFC"/>
+                </a:solidFill>
+              </a:defRPr>
+            </a:pPr>
+            <a:r>
+              <a:t>★ Multi-Language Translation: </a:t>
+            </a:r>
+            <a:r>
+              <a:rPr b="0">
+                <a:solidFill>
+                  <a:srgbClr val="CBD5E1"/>
+                </a:solidFill>
+              </a:rPr>
+              <a:t>Translate transcripts and generate voice-over dubbing in Spanish, Hindi, French, and Japanese via LLM pipelines.</a:t>
             </a:r>
           </a:p>
         </p:txBody>
@@ -3199,14 +6039,6 @@
 <file path=ppt/slides/slide2.xml><?xml version="1.0" encoding="utf-8"?>
 <p:sld xmlns:a="http://schemas.openxmlformats.org/drawingml/2006/main" xmlns:p="http://schemas.openxmlformats.org/presentationml/2006/main" xmlns:r="http://schemas.openxmlformats.org/officeDocument/2006/relationships">
   <p:cSld>
-    <p:bg>
-      <p:bgPr>
-        <a:solidFill>
-          <a:srgbClr val="0A0F1E"/>
-        </a:solidFill>
-        <a:effectLst/>
-      </p:bgPr>
-    </p:bg>
     <p:spTree>
       <p:nvGrpSpPr>
         <p:cNvPr id="1" name=""/>
@@ -3216,14 +6048,57 @@
       <p:grpSpPr/>
       <p:sp>
         <p:nvSpPr>
-          <p:cNvPr id="2" name="TextBox 1"/>
+          <p:cNvPr id="2" name="Rectangle 1"/>
+          <p:cNvSpPr/>
+          <p:nvPr/>
+        </p:nvSpPr>
+        <p:spPr>
+          <a:xfrm>
+            <a:off x="0" y="0"/>
+            <a:ext cx="12191695" cy="6858000"/>
+          </a:xfrm>
+          <a:prstGeom prst="rect">
+            <a:avLst/>
+          </a:prstGeom>
+          <a:solidFill>
+            <a:srgbClr val="0A0F1D"/>
+          </a:solidFill>
+          <a:ln>
+            <a:noFill/>
+          </a:ln>
+        </p:spPr>
+        <p:style>
+          <a:lnRef idx="1">
+            <a:schemeClr val="accent1"/>
+          </a:lnRef>
+          <a:fillRef idx="3">
+            <a:schemeClr val="accent1"/>
+          </a:fillRef>
+          <a:effectRef idx="2">
+            <a:schemeClr val="accent1"/>
+          </a:effectRef>
+          <a:fontRef idx="minor">
+            <a:schemeClr val="lt1"/>
+          </a:fontRef>
+        </p:style>
+        <p:txBody>
+          <a:bodyPr rtlCol="0" anchor="ctr"/>
+          <a:lstStyle/>
+          <a:p>
+            <a:pPr algn="ctr"/>
+          </a:p>
+        </p:txBody>
+      </p:sp>
+      <p:sp>
+        <p:nvSpPr>
+          <p:cNvPr id="3" name="TextBox 2"/>
           <p:cNvSpPr txBox="1"/>
           <p:nvPr/>
         </p:nvSpPr>
         <p:spPr>
           <a:xfrm>
             <a:off x="731520" y="365760"/>
-            <a:ext cx="10698480" cy="731520"/>
+            <a:ext cx="9144000" cy="365760"/>
           </a:xfrm>
           <a:prstGeom prst="rect">
             <a:avLst/>
@@ -3237,29 +6112,28 @@
           <a:lstStyle/>
           <a:p>
             <a:pPr>
-              <a:defRPr sz="3200" b="1">
-                <a:solidFill>
-                  <a:srgbClr val="818CF8"/>
-                </a:solidFill>
-                <a:latin typeface="Arial"/>
-              </a:defRPr>
-            </a:pPr>
-            <a:r>
-              <a:t>Core Features &amp; Project Use Cases</a:t>
-            </a:r>
-          </a:p>
-        </p:txBody>
-      </p:sp>
-      <p:sp>
-        <p:nvSpPr>
-          <p:cNvPr id="3" name="TextBox 2"/>
+              <a:defRPr sz="1000" b="1">
+                <a:solidFill>
+                  <a:srgbClr val="06B6D4"/>
+                </a:solidFill>
+              </a:defRPr>
+            </a:pPr>
+            <a:r>
+              <a:t>EXECUTIVE SUMMARY</a:t>
+            </a:r>
+          </a:p>
+        </p:txBody>
+      </p:sp>
+      <p:sp>
+        <p:nvSpPr>
+          <p:cNvPr id="4" name="TextBox 3"/>
           <p:cNvSpPr txBox="1"/>
           <p:nvPr/>
         </p:nvSpPr>
         <p:spPr>
           <a:xfrm>
-            <a:off x="731520" y="1371600"/>
-            <a:ext cx="10698480" cy="4846320"/>
+            <a:off x="731520" y="640080"/>
+            <a:ext cx="10515600" cy="640080"/>
           </a:xfrm>
           <a:prstGeom prst="rect">
             <a:avLst/>
@@ -3273,147 +6147,409 @@
           <a:lstStyle/>
           <a:p>
             <a:pPr>
-              <a:spcBef>
-                <a:spcPts val="1000"/>
-              </a:spcBef>
-              <a:defRPr sz="1600" b="1">
-                <a:solidFill>
-                  <a:srgbClr val="FFFFFF"/>
-                </a:solidFill>
-                <a:latin typeface="Arial"/>
-              </a:defRPr>
-            </a:pPr>
-            <a:r>
-              <a:t>🔸 🔐 JWT Authentication &amp; RBAC Rules</a:t>
-            </a:r>
-          </a:p>
+              <a:defRPr sz="2400" b="1">
+                <a:solidFill>
+                  <a:srgbClr val="F8FAFC"/>
+                </a:solidFill>
+              </a:defRPr>
+            </a:pPr>
+            <a:r>
+              <a:t>Key Objectives &amp; Problem Statement</a:t>
+            </a:r>
+          </a:p>
+        </p:txBody>
+      </p:sp>
+      <p:sp>
+        <p:nvSpPr>
+          <p:cNvPr id="5" name="TextBox 4"/>
+          <p:cNvSpPr txBox="1"/>
+          <p:nvPr/>
+        </p:nvSpPr>
+        <p:spPr>
+          <a:xfrm>
+            <a:off x="731520" y="1234440"/>
+            <a:ext cx="10515600" cy="365760"/>
+          </a:xfrm>
+          <a:prstGeom prst="rect">
+            <a:avLst/>
+          </a:prstGeom>
+          <a:noFill/>
+        </p:spPr>
+        <p:txBody>
+          <a:bodyPr wrap="none">
+            <a:spAutoFit/>
+          </a:bodyPr>
+          <a:lstStyle/>
           <a:p>
             <a:pPr>
               <a:defRPr sz="1300">
                 <a:solidFill>
                   <a:srgbClr val="94A3B8"/>
                 </a:solidFill>
-                <a:latin typeface="Arial"/>
-              </a:defRPr>
-            </a:pPr>
-            <a:r>
-              <a:t>Secures system endpoints and implements Role-Based Access Controls (Creator, Educator, Admin, and Learner with read-only views).</a:t>
-            </a:r>
-          </a:p>
-          <a:p>
-            <a:pPr>
-              <a:spcBef>
-                <a:spcPts val="1000"/>
-              </a:spcBef>
-              <a:defRPr sz="1600" b="1">
-                <a:solidFill>
-                  <a:srgbClr val="FFFFFF"/>
-                </a:solidFill>
-                <a:latin typeface="Arial"/>
-              </a:defRPr>
-            </a:pPr>
-            <a:r>
-              <a:t>🔸 ⚡ Multi-Stream Video Ingestion</a:t>
-            </a:r>
-          </a:p>
-          <a:p>
-            <a:pPr>
-              <a:defRPr sz="1300">
-                <a:solidFill>
-                  <a:srgbClr val="94A3B8"/>
-                </a:solidFill>
-                <a:latin typeface="Arial"/>
-              </a:defRPr>
-            </a:pPr>
-            <a:r>
-              <a:t>Supports local drag-and-drop video uploads (up to 50MB) and asynchronous YouTube link extraction via yt-dlp.</a:t>
-            </a:r>
-          </a:p>
-          <a:p>
-            <a:pPr>
-              <a:spcBef>
-                <a:spcPts val="1000"/>
-              </a:spcBef>
-              <a:defRPr sz="1600" b="1">
-                <a:solidFill>
-                  <a:srgbClr val="FFFFFF"/>
-                </a:solidFill>
-                <a:latin typeface="Arial"/>
-              </a:defRPr>
-            </a:pPr>
-            <a:r>
-              <a:t>🔸 🎙️ Time-Aligned Transcription Timeline</a:t>
-            </a:r>
-          </a:p>
-          <a:p>
-            <a:pPr>
-              <a:defRPr sz="1300">
-                <a:solidFill>
-                  <a:srgbClr val="94A3B8"/>
-                </a:solidFill>
-                <a:latin typeface="Arial"/>
-              </a:defRPr>
-            </a:pPr>
-            <a:r>
-              <a:t>Whisper transcribes speech into time-indexed sentence blocks. Clicking any line seeks the player directly to that time.</a:t>
-            </a:r>
-          </a:p>
-          <a:p>
-            <a:pPr>
-              <a:spcBef>
-                <a:spcPts val="1000"/>
-              </a:spcBef>
-              <a:defRPr sz="1600" b="1">
-                <a:solidFill>
-                  <a:srgbClr val="FFFFFF"/>
-                </a:solidFill>
-                <a:latin typeface="Arial"/>
-              </a:defRPr>
-            </a:pPr>
-            <a:r>
-              <a:t>🔸 🤖 Two-Level Thematic AI Summarization</a:t>
-            </a:r>
-          </a:p>
-          <a:p>
-            <a:pPr>
-              <a:defRPr sz="1300">
-                <a:solidFill>
-                  <a:srgbClr val="94A3B8"/>
-                </a:solidFill>
-                <a:latin typeface="Arial"/>
-              </a:defRPr>
-            </a:pPr>
-            <a:r>
-              <a:t>Generates cohesive short overview hooks and detailed bullet breakdowns parsed as structured JSON via Gemini.</a:t>
-            </a:r>
-          </a:p>
-          <a:p>
-            <a:pPr>
-              <a:spcBef>
-                <a:spcPts val="1000"/>
-              </a:spcBef>
-              <a:defRPr sz="1600" b="1">
-                <a:solidFill>
-                  <a:srgbClr val="FFFFFF"/>
-                </a:solidFill>
-                <a:latin typeface="Arial"/>
-              </a:defRPr>
-            </a:pPr>
-            <a:r>
-              <a:t>🔸 🖼️ Visual Moments &amp; Seek Overlays</a:t>
-            </a:r>
-          </a:p>
-          <a:p>
-            <a:pPr>
-              <a:defRPr sz="1300">
-                <a:solidFill>
-                  <a:srgbClr val="94A3B8"/>
-                </a:solidFill>
-                <a:latin typeface="Arial"/>
-              </a:defRPr>
-            </a:pPr>
-            <a:r>
-              <a:t>Extracts video frame JPEGs at highlight times, displaying interactive cards mapped with click-to-seek bindings.</a:t>
+              </a:defRPr>
+            </a:pPr>
+            <a:r>
+              <a:t>Transforming passive, lengthy video content into structured, searchable intelligence</a:t>
+            </a:r>
+          </a:p>
+        </p:txBody>
+      </p:sp>
+      <p:sp>
+        <p:nvSpPr>
+          <p:cNvPr id="6" name="Rounded Rectangle 5"/>
+          <p:cNvSpPr/>
+          <p:nvPr/>
+        </p:nvSpPr>
+        <p:spPr>
+          <a:xfrm>
+            <a:off x="731520" y="1645920"/>
+            <a:ext cx="5120640" cy="4663440"/>
+          </a:xfrm>
+          <a:prstGeom prst="roundRect">
+            <a:avLst/>
+          </a:prstGeom>
+          <a:solidFill>
+            <a:srgbClr val="131B2E"/>
+          </a:solidFill>
+          <a:ln w="12700">
+            <a:solidFill>
+              <a:srgbClr val="263454"/>
+            </a:solidFill>
+          </a:ln>
+        </p:spPr>
+        <p:style>
+          <a:lnRef idx="1">
+            <a:schemeClr val="accent1"/>
+          </a:lnRef>
+          <a:fillRef idx="3">
+            <a:schemeClr val="accent1"/>
+          </a:fillRef>
+          <a:effectRef idx="2">
+            <a:schemeClr val="accent1"/>
+          </a:effectRef>
+          <a:fontRef idx="minor">
+            <a:schemeClr val="lt1"/>
+          </a:fontRef>
+        </p:style>
+        <p:txBody>
+          <a:bodyPr rtlCol="0" anchor="ctr"/>
+          <a:lstStyle/>
+          <a:p>
+            <a:pPr algn="ctr"/>
+          </a:p>
+        </p:txBody>
+      </p:sp>
+      <p:sp>
+        <p:nvSpPr>
+          <p:cNvPr id="7" name="TextBox 6"/>
+          <p:cNvSpPr txBox="1"/>
+          <p:nvPr/>
+        </p:nvSpPr>
+        <p:spPr>
+          <a:xfrm>
+            <a:off x="1005840" y="1828800"/>
+            <a:ext cx="4572000" cy="4206240"/>
+          </a:xfrm>
+          <a:prstGeom prst="rect">
+            <a:avLst/>
+          </a:prstGeom>
+          <a:noFill/>
+        </p:spPr>
+        <p:txBody>
+          <a:bodyPr wrap="square">
+            <a:spAutoFit/>
+          </a:bodyPr>
+          <a:lstStyle/>
+          <a:p>
+            <a:pPr>
+              <a:defRPr sz="1400" b="1">
+                <a:solidFill>
+                  <a:srgbClr val="06B6D4"/>
+                </a:solidFill>
+              </a:defRPr>
+            </a:pPr>
+            <a:r>
+              <a:t>THE PROBLEM WE SOLVED</a:t>
+            </a:r>
+          </a:p>
+          <a:p>
+            <a:pPr>
+              <a:defRPr sz="1200" b="1">
+                <a:solidFill>
+                  <a:srgbClr val="F8FAFC"/>
+                </a:solidFill>
+              </a:defRPr>
+            </a:pPr>
+            <a:r>
+              <a:t>• Information Overload: </a:t>
+            </a:r>
+            <a:r>
+              <a:rPr b="0">
+                <a:solidFill>
+                  <a:srgbClr val="CBD5E1"/>
+                </a:solidFill>
+              </a:rPr>
+              <a:t>Hours of video lectures, webinars, and meetings are unstructured and non-searchable.</a:t>
+            </a:r>
+          </a:p>
+          <a:p>
+            <a:pPr>
+              <a:defRPr sz="1200" b="1">
+                <a:solidFill>
+                  <a:srgbClr val="F8FAFC"/>
+                </a:solidFill>
+              </a:defRPr>
+            </a:pPr>
+            <a:r>
+              <a:t>• High Manual Effort: </a:t>
+            </a:r>
+            <a:r>
+              <a:rPr b="0">
+                <a:solidFill>
+                  <a:srgbClr val="CBD5E1"/>
+                </a:solidFill>
+              </a:rPr>
+              <a:t>Creators and educators spend 3-5 hours manually skimming, transcribing, and editing clips.</a:t>
+            </a:r>
+          </a:p>
+          <a:p>
+            <a:pPr>
+              <a:defRPr sz="1200" b="1">
+                <a:solidFill>
+                  <a:srgbClr val="F8FAFC"/>
+                </a:solidFill>
+              </a:defRPr>
+            </a:pPr>
+            <a:r>
+              <a:t>• Engagement Drop: </a:t>
+            </a:r>
+            <a:r>
+              <a:rPr b="0">
+                <a:solidFill>
+                  <a:srgbClr val="CBD5E1"/>
+                </a:solidFill>
+              </a:rPr>
+              <a:t>Learners struggle to locate exact concepts inside long 60+ minute videos without timestamps.</a:t>
+            </a:r>
+          </a:p>
+          <a:p>
+            <a:pPr>
+              <a:defRPr sz="1200" b="1">
+                <a:solidFill>
+                  <a:srgbClr val="F8FAFC"/>
+                </a:solidFill>
+              </a:defRPr>
+            </a:pPr>
+            <a:r>
+              <a:t>• Cloud Resource Constraints: </a:t>
+            </a:r>
+            <a:r>
+              <a:rPr b="0">
+                <a:solidFill>
+                  <a:srgbClr val="CBD5E1"/>
+                </a:solidFill>
+              </a:rPr>
+              <a:t>Heavy AI models (Whisper/LLMs) easily exceed memory limits (512MB RAM) on free cloud tiers if not engineered for concurrency.</a:t>
+            </a:r>
+          </a:p>
+        </p:txBody>
+      </p:sp>
+      <p:sp>
+        <p:nvSpPr>
+          <p:cNvPr id="8" name="Rounded Rectangle 7"/>
+          <p:cNvSpPr/>
+          <p:nvPr/>
+        </p:nvSpPr>
+        <p:spPr>
+          <a:xfrm>
+            <a:off x="6217920" y="1645920"/>
+            <a:ext cx="5212080" cy="4663440"/>
+          </a:xfrm>
+          <a:prstGeom prst="roundRect">
+            <a:avLst/>
+          </a:prstGeom>
+          <a:solidFill>
+            <a:srgbClr val="131B2E"/>
+          </a:solidFill>
+          <a:ln w="12700">
+            <a:solidFill>
+              <a:srgbClr val="263454"/>
+            </a:solidFill>
+          </a:ln>
+        </p:spPr>
+        <p:style>
+          <a:lnRef idx="1">
+            <a:schemeClr val="accent1"/>
+          </a:lnRef>
+          <a:fillRef idx="3">
+            <a:schemeClr val="accent1"/>
+          </a:fillRef>
+          <a:effectRef idx="2">
+            <a:schemeClr val="accent1"/>
+          </a:effectRef>
+          <a:fontRef idx="minor">
+            <a:schemeClr val="lt1"/>
+          </a:fontRef>
+        </p:style>
+        <p:txBody>
+          <a:bodyPr rtlCol="0" anchor="ctr"/>
+          <a:lstStyle/>
+          <a:p>
+            <a:pPr algn="ctr"/>
+          </a:p>
+        </p:txBody>
+      </p:sp>
+      <p:sp>
+        <p:nvSpPr>
+          <p:cNvPr id="9" name="TextBox 8"/>
+          <p:cNvSpPr txBox="1"/>
+          <p:nvPr/>
+        </p:nvSpPr>
+        <p:spPr>
+          <a:xfrm>
+            <a:off x="6492240" y="1828800"/>
+            <a:ext cx="4663440" cy="4206240"/>
+          </a:xfrm>
+          <a:prstGeom prst="rect">
+            <a:avLst/>
+          </a:prstGeom>
+          <a:noFill/>
+        </p:spPr>
+        <p:txBody>
+          <a:bodyPr wrap="square">
+            <a:spAutoFit/>
+          </a:bodyPr>
+          <a:lstStyle/>
+          <a:p>
+            <a:pPr>
+              <a:defRPr sz="1400" b="1">
+                <a:solidFill>
+                  <a:srgbClr val="10B981"/>
+                </a:solidFill>
+              </a:defRPr>
+            </a:pPr>
+            <a:r>
+              <a:t>CORE PROJECT OBJECTIVES</a:t>
+            </a:r>
+          </a:p>
+          <a:p>
+            <a:pPr>
+              <a:defRPr sz="1200" b="1">
+                <a:solidFill>
+                  <a:srgbClr val="F8FAFC"/>
+                </a:solidFill>
+              </a:defRPr>
+            </a:pPr>
+            <a:r>
+              <a:t>✔ Automated Multimodal Ingestion: </a:t>
+            </a:r>
+            <a:r>
+              <a:rPr b="0">
+                <a:solidFill>
+                  <a:srgbClr val="CBD5E1"/>
+                </a:solidFill>
+              </a:rPr>
+              <a:t>Direct MP4/MOV file uploads + YouTube URL ingestion with cloud anti-bot bypass.</a:t>
+            </a:r>
+          </a:p>
+          <a:p>
+            <a:pPr>
+              <a:defRPr sz="1200" b="1">
+                <a:solidFill>
+                  <a:srgbClr val="F8FAFC"/>
+                </a:solidFill>
+              </a:defRPr>
+            </a:pPr>
+            <a:r>
+              <a:t>✔ Accurate STT &amp; Transcription: </a:t>
+            </a:r>
+            <a:r>
+              <a:rPr b="0">
+                <a:solidFill>
+                  <a:srgbClr val="CBD5E1"/>
+                </a:solidFill>
+              </a:rPr>
+              <a:t>Fast Whisper speech-to-text generating word-level and sentence-level timestamps.</a:t>
+            </a:r>
+          </a:p>
+          <a:p>
+            <a:pPr>
+              <a:defRPr sz="1200" b="1">
+                <a:solidFill>
+                  <a:srgbClr val="F8FAFC"/>
+                </a:solidFill>
+              </a:defRPr>
+            </a:pPr>
+            <a:r>
+              <a:t>✔ Contextual AI Summarization: </a:t>
+            </a:r>
+            <a:r>
+              <a:rPr b="0">
+                <a:solidFill>
+                  <a:srgbClr val="CBD5E1"/>
+                </a:solidFill>
+              </a:rPr>
+              <a:t>Executive TL;DR, key takeaways, and category classification via Google Gemini 2.5 Flash.</a:t>
+            </a:r>
+          </a:p>
+          <a:p>
+            <a:pPr>
+              <a:defRPr sz="1200" b="1">
+                <a:solidFill>
+                  <a:srgbClr val="F8FAFC"/>
+                </a:solidFill>
+              </a:defRPr>
+            </a:pPr>
+            <a:r>
+              <a:t>✔ Algorithmic Highlight Reels: </a:t>
+            </a:r>
+            <a:r>
+              <a:rPr b="0">
+                <a:solidFill>
+                  <a:srgbClr val="CBD5E1"/>
+                </a:solidFill>
+              </a:rPr>
+              <a:t>Detect viral/key moments and automatically assemble cut video clips via FFmpeg.</a:t>
+            </a:r>
+          </a:p>
+          <a:p>
+            <a:pPr>
+              <a:defRPr sz="1200" b="1">
+                <a:solidFill>
+                  <a:srgbClr val="F8FAFC"/>
+                </a:solidFill>
+              </a:defRPr>
+            </a:pPr>
+            <a:r>
+              <a:t>✔ Interactive Studio Dashboard: </a:t>
+            </a:r>
+            <a:r>
+              <a:rPr b="0">
+                <a:solidFill>
+                  <a:srgbClr val="CBD5E1"/>
+                </a:solidFill>
+              </a:rPr>
+              <a:t>Modern 3-column UI with synced video playback, transcript seeker, and Ask AI bot.</a:t>
+            </a:r>
+          </a:p>
+          <a:p>
+            <a:pPr>
+              <a:defRPr sz="1200" b="1">
+                <a:solidFill>
+                  <a:srgbClr val="F8FAFC"/>
+                </a:solidFill>
+              </a:defRPr>
+            </a:pPr>
+            <a:r>
+              <a:t>✔ Production Cloud Delivery: </a:t>
+            </a:r>
+            <a:r>
+              <a:rPr b="0">
+                <a:solidFill>
+                  <a:srgbClr val="CBD5E1"/>
+                </a:solidFill>
+              </a:rPr>
+              <a:t>Zero-downtime deployment on Vercel + Render with PostgreSQL &amp; MongoDB Atlas.</a:t>
             </a:r>
           </a:p>
         </p:txBody>
@@ -3429,14 +6565,6 @@
 <file path=ppt/slides/slide3.xml><?xml version="1.0" encoding="utf-8"?>
 <p:sld xmlns:a="http://schemas.openxmlformats.org/drawingml/2006/main" xmlns:p="http://schemas.openxmlformats.org/presentationml/2006/main" xmlns:r="http://schemas.openxmlformats.org/officeDocument/2006/relationships">
   <p:cSld>
-    <p:bg>
-      <p:bgPr>
-        <a:solidFill>
-          <a:srgbClr val="0A0F1E"/>
-        </a:solidFill>
-        <a:effectLst/>
-      </p:bgPr>
-    </p:bg>
     <p:spTree>
       <p:nvGrpSpPr>
         <p:cNvPr id="1" name=""/>
@@ -3446,14 +6574,57 @@
       <p:grpSpPr/>
       <p:sp>
         <p:nvSpPr>
-          <p:cNvPr id="2" name="TextBox 1"/>
+          <p:cNvPr id="2" name="Rectangle 1"/>
+          <p:cNvSpPr/>
+          <p:nvPr/>
+        </p:nvSpPr>
+        <p:spPr>
+          <a:xfrm>
+            <a:off x="0" y="0"/>
+            <a:ext cx="12191695" cy="6858000"/>
+          </a:xfrm>
+          <a:prstGeom prst="rect">
+            <a:avLst/>
+          </a:prstGeom>
+          <a:solidFill>
+            <a:srgbClr val="0A0F1D"/>
+          </a:solidFill>
+          <a:ln>
+            <a:noFill/>
+          </a:ln>
+        </p:spPr>
+        <p:style>
+          <a:lnRef idx="1">
+            <a:schemeClr val="accent1"/>
+          </a:lnRef>
+          <a:fillRef idx="3">
+            <a:schemeClr val="accent1"/>
+          </a:fillRef>
+          <a:effectRef idx="2">
+            <a:schemeClr val="accent1"/>
+          </a:effectRef>
+          <a:fontRef idx="minor">
+            <a:schemeClr val="lt1"/>
+          </a:fontRef>
+        </p:style>
+        <p:txBody>
+          <a:bodyPr rtlCol="0" anchor="ctr"/>
+          <a:lstStyle/>
+          <a:p>
+            <a:pPr algn="ctr"/>
+          </a:p>
+        </p:txBody>
+      </p:sp>
+      <p:sp>
+        <p:nvSpPr>
+          <p:cNvPr id="3" name="TextBox 2"/>
           <p:cNvSpPr txBox="1"/>
           <p:nvPr/>
         </p:nvSpPr>
         <p:spPr>
           <a:xfrm>
             <a:off x="731520" y="365760"/>
-            <a:ext cx="10698480" cy="731520"/>
+            <a:ext cx="9144000" cy="365760"/>
           </a:xfrm>
           <a:prstGeom prst="rect">
             <a:avLst/>
@@ -3467,29 +6638,28 @@
           <a:lstStyle/>
           <a:p>
             <a:pPr>
-              <a:defRPr sz="3200" b="1">
-                <a:solidFill>
-                  <a:srgbClr val="818CF8"/>
-                </a:solidFill>
-                <a:latin typeface="Arial"/>
-              </a:defRPr>
-            </a:pPr>
-            <a:r>
-              <a:t>Role-Based Access Control (RBAC) Permissions</a:t>
-            </a:r>
-          </a:p>
-        </p:txBody>
-      </p:sp>
-      <p:sp>
-        <p:nvSpPr>
-          <p:cNvPr id="3" name="TextBox 2"/>
+              <a:defRPr sz="1000" b="1">
+                <a:solidFill>
+                  <a:srgbClr val="06B6D4"/>
+                </a:solidFill>
+              </a:defRPr>
+            </a:pPr>
+            <a:r>
+              <a:t>PROJECT EXECUTION</a:t>
+            </a:r>
+          </a:p>
+        </p:txBody>
+      </p:sp>
+      <p:sp>
+        <p:nvSpPr>
+          <p:cNvPr id="4" name="TextBox 3"/>
           <p:cNvSpPr txBox="1"/>
           <p:nvPr/>
         </p:nvSpPr>
         <p:spPr>
           <a:xfrm>
-            <a:off x="731520" y="1371600"/>
-            <a:ext cx="5303520" cy="4846320"/>
+            <a:off x="731520" y="640080"/>
+            <a:ext cx="10515600" cy="640080"/>
           </a:xfrm>
           <a:prstGeom prst="rect">
             <a:avLst/>
@@ -3503,104 +6673,132 @@
           <a:lstStyle/>
           <a:p>
             <a:pPr>
-              <a:spcAft>
-                <a:spcPts val="400"/>
-              </a:spcAft>
-              <a:defRPr sz="1700" b="1">
-                <a:solidFill>
-                  <a:srgbClr val="818CF8"/>
-                </a:solidFill>
-                <a:latin typeface="Arial"/>
-              </a:defRPr>
-            </a:pPr>
-            <a:r>
-              <a:t>🎥 Content Creator</a:t>
-            </a:r>
-          </a:p>
-          <a:p>
-            <a:pPr>
-              <a:spcAft>
-                <a:spcPts val="1500"/>
-              </a:spcAft>
-              <a:defRPr sz="1200">
-                <a:solidFill>
-                  <a:srgbClr val="CBD5E1"/>
-                </a:solidFill>
-                <a:latin typeface="Arial"/>
-              </a:defRPr>
-            </a:pPr>
-            <a:r>
-              <a:t>Purpose: Create and manage summarized content for audiences.</a:t>
-            </a:r>
-            <a:br/>
-            <a:r>
-              <a:t>• Upload videos, manage uploaded files, and access upload history.</a:t>
-            </a:r>
-            <a:br/>
-            <a:r>
-              <a:t>• Generate transcripts, AI summaries, and detect key highlights.</a:t>
-            </a:r>
-            <a:br/>
-            <a:r>
-              <a:t>• Download generated transcripts and summaries; view analytics.</a:t>
-            </a:r>
-          </a:p>
-          <a:p>
-            <a:pPr>
-              <a:spcBef>
-                <a:spcPts val="1000"/>
-              </a:spcBef>
-              <a:spcAft>
-                <a:spcPts val="400"/>
-              </a:spcAft>
-              <a:defRPr sz="1700" b="1">
-                <a:solidFill>
-                  <a:srgbClr val="34D399"/>
-                </a:solidFill>
-                <a:latin typeface="Arial"/>
-              </a:defRPr>
-            </a:pPr>
-            <a:r>
-              <a:t>📚 Learner</a:t>
-            </a:r>
-          </a:p>
-          <a:p>
-            <a:pPr>
-              <a:defRPr sz="1200">
-                <a:solidFill>
-                  <a:srgbClr val="CBD5E1"/>
-                </a:solidFill>
-                <a:latin typeface="Arial"/>
-              </a:defRPr>
-            </a:pPr>
-            <a:r>
-              <a:t>Purpose: Consume educational and informational content efficiently.</a:t>
-            </a:r>
-            <a:br/>
-            <a:r>
-              <a:t>• View uploaded videos, read summaries, and access time-aligned transcripts.</a:t>
-            </a:r>
-            <a:br/>
-            <a:r>
-              <a:t>• View key moments, timelines, and search transcripts in real-time.</a:t>
-            </a:r>
-            <a:br/>
-            <a:r>
-              <a:t>• Save learning history; bookmark summaries and highlights.</a:t>
-            </a:r>
-          </a:p>
-        </p:txBody>
-      </p:sp>
-      <p:sp>
-        <p:nvSpPr>
-          <p:cNvPr id="4" name="TextBox 3"/>
+              <a:defRPr sz="2400" b="1">
+                <a:solidFill>
+                  <a:srgbClr val="F8FAFC"/>
+                </a:solidFill>
+              </a:defRPr>
+            </a:pPr>
+            <a:r>
+              <a:t>Milestone 1 to 4 Progress &amp; Completion</a:t>
+            </a:r>
+          </a:p>
+        </p:txBody>
+      </p:sp>
+      <p:sp>
+        <p:nvSpPr>
+          <p:cNvPr id="5" name="TextBox 4"/>
           <p:cNvSpPr txBox="1"/>
           <p:nvPr/>
         </p:nvSpPr>
         <p:spPr>
           <a:xfrm>
-            <a:off x="6217920" y="1371600"/>
-            <a:ext cx="5303520" cy="4846320"/>
+            <a:off x="731520" y="1234440"/>
+            <a:ext cx="10515600" cy="365760"/>
+          </a:xfrm>
+          <a:prstGeom prst="rect">
+            <a:avLst/>
+          </a:prstGeom>
+          <a:noFill/>
+        </p:spPr>
+        <p:txBody>
+          <a:bodyPr wrap="none">
+            <a:spAutoFit/>
+          </a:bodyPr>
+          <a:lstStyle/>
+          <a:p>
+            <a:pPr>
+              <a:defRPr sz="1300">
+                <a:solidFill>
+                  <a:srgbClr val="94A3B8"/>
+                </a:solidFill>
+              </a:defRPr>
+            </a:pPr>
+            <a:r>
+              <a:t>All 4 core milestones achieved at 100% completion with verified production deployment</a:t>
+            </a:r>
+          </a:p>
+        </p:txBody>
+      </p:sp>
+      <p:pic>
+        <p:nvPicPr>
+          <p:cNvPr id="6" name="Picture 5" descr="milestone_progress.png"/>
+          <p:cNvPicPr>
+            <a:picLocks noChangeAspect="1"/>
+          </p:cNvPicPr>
+          <p:nvPr/>
+        </p:nvPicPr>
+        <p:blipFill>
+          <a:blip r:embed="rId2"/>
+          <a:stretch>
+            <a:fillRect/>
+          </a:stretch>
+        </p:blipFill>
+        <p:spPr>
+          <a:xfrm>
+            <a:off x="731520" y="1645920"/>
+            <a:ext cx="5669280" cy="3188970"/>
+          </a:xfrm>
+          <a:prstGeom prst="rect">
+            <a:avLst/>
+          </a:prstGeom>
+        </p:spPr>
+      </p:pic>
+      <p:sp>
+        <p:nvSpPr>
+          <p:cNvPr id="7" name="Rounded Rectangle 6"/>
+          <p:cNvSpPr/>
+          <p:nvPr/>
+        </p:nvSpPr>
+        <p:spPr>
+          <a:xfrm>
+            <a:off x="6675120" y="1645920"/>
+            <a:ext cx="4754880" cy="1051560"/>
+          </a:xfrm>
+          <a:prstGeom prst="roundRect">
+            <a:avLst/>
+          </a:prstGeom>
+          <a:solidFill>
+            <a:srgbClr val="131B2E"/>
+          </a:solidFill>
+          <a:ln w="12700">
+            <a:solidFill>
+              <a:srgbClr val="263454"/>
+            </a:solidFill>
+          </a:ln>
+        </p:spPr>
+        <p:style>
+          <a:lnRef idx="1">
+            <a:schemeClr val="accent1"/>
+          </a:lnRef>
+          <a:fillRef idx="3">
+            <a:schemeClr val="accent1"/>
+          </a:fillRef>
+          <a:effectRef idx="2">
+            <a:schemeClr val="accent1"/>
+          </a:effectRef>
+          <a:fontRef idx="minor">
+            <a:schemeClr val="lt1"/>
+          </a:fontRef>
+        </p:style>
+        <p:txBody>
+          <a:bodyPr rtlCol="0" anchor="ctr"/>
+          <a:lstStyle/>
+          <a:p>
+            <a:pPr algn="ctr"/>
+          </a:p>
+        </p:txBody>
+      </p:sp>
+      <p:sp>
+        <p:nvSpPr>
+          <p:cNvPr id="8" name="TextBox 7"/>
+          <p:cNvSpPr txBox="1"/>
+          <p:nvPr/>
+        </p:nvSpPr>
+        <p:spPr>
+          <a:xfrm>
+            <a:off x="6858000" y="1691640"/>
+            <a:ext cx="4389120" cy="960120"/>
           </a:xfrm>
           <a:prstGeom prst="rect">
             <a:avLst/>
@@ -3614,90 +6812,302 @@
           <a:lstStyle/>
           <a:p>
             <a:pPr>
-              <a:spcAft>
-                <a:spcPts val="400"/>
-              </a:spcAft>
-              <a:defRPr sz="1700" b="1">
-                <a:solidFill>
-                  <a:srgbClr val="FBBF24"/>
-                </a:solidFill>
-                <a:latin typeface="Arial"/>
-              </a:defRPr>
-            </a:pPr>
-            <a:r>
-              <a:t>🎓 Educator</a:t>
-            </a:r>
-          </a:p>
-          <a:p>
-            <a:pPr>
-              <a:spcAft>
-                <a:spcPts val="1500"/>
-              </a:spcAft>
-              <a:defRPr sz="1200">
+              <a:defRPr sz="1200" b="1">
+                <a:solidFill>
+                  <a:srgbClr val="10B981"/>
+                </a:solidFill>
+              </a:defRPr>
+            </a:pPr>
+            <a:r>
+              <a:t>● Milestone 1 (Weeks 1-2): Core Setup &amp; Auth</a:t>
+            </a:r>
+          </a:p>
+          <a:p>
+            <a:pPr>
+              <a:defRPr sz="1050">
                 <a:solidFill>
                   <a:srgbClr val="CBD5E1"/>
                 </a:solidFill>
-                <a:latin typeface="Arial"/>
-              </a:defRPr>
-            </a:pPr>
-            <a:r>
-              <a:t>Purpose: Transform long educational content into concise resources.</a:t>
-            </a:r>
-            <a:br/>
-            <a:r>
-              <a:t>• Upload lecture videos and generate tailored educational summaries.</a:t>
-            </a:r>
-            <a:br/>
-            <a:r>
-              <a:t>• Review, edit transcripts, and share summaries with student lists.</a:t>
-            </a:r>
-            <a:br/>
-            <a:r>
-              <a:t>• Access classroom content analytics and monitor student engagement.</a:t>
-            </a:r>
-          </a:p>
-          <a:p>
-            <a:pPr>
-              <a:spcBef>
-                <a:spcPts val="1000"/>
-              </a:spcBef>
-              <a:spcAft>
-                <a:spcPts val="400"/>
-              </a:spcAft>
-              <a:defRPr sz="1700" b="1">
-                <a:solidFill>
-                  <a:srgbClr val="F87171"/>
-                </a:solidFill>
-                <a:latin typeface="Arial"/>
-              </a:defRPr>
-            </a:pPr>
-            <a:r>
-              <a:t>🛡️ Administrator</a:t>
-            </a:r>
-          </a:p>
-          <a:p>
-            <a:pPr>
-              <a:defRPr sz="1200">
+              </a:defRPr>
+            </a:pPr>
+            <a:r>
+              <a:t>FastAPI + Next.js 15, JWT Authentication, 4-Role RBAC (Admin, Creator, Educator, Learner), Uploads &amp; FFmpeg Pipeline.</a:t>
+            </a:r>
+          </a:p>
+        </p:txBody>
+      </p:sp>
+      <p:sp>
+        <p:nvSpPr>
+          <p:cNvPr id="9" name="Rounded Rectangle 8"/>
+          <p:cNvSpPr/>
+          <p:nvPr/>
+        </p:nvSpPr>
+        <p:spPr>
+          <a:xfrm>
+            <a:off x="6675120" y="2834640"/>
+            <a:ext cx="4754880" cy="1051560"/>
+          </a:xfrm>
+          <a:prstGeom prst="roundRect">
+            <a:avLst/>
+          </a:prstGeom>
+          <a:solidFill>
+            <a:srgbClr val="131B2E"/>
+          </a:solidFill>
+          <a:ln w="12700">
+            <a:solidFill>
+              <a:srgbClr val="263454"/>
+            </a:solidFill>
+          </a:ln>
+        </p:spPr>
+        <p:style>
+          <a:lnRef idx="1">
+            <a:schemeClr val="accent1"/>
+          </a:lnRef>
+          <a:fillRef idx="3">
+            <a:schemeClr val="accent1"/>
+          </a:fillRef>
+          <a:effectRef idx="2">
+            <a:schemeClr val="accent1"/>
+          </a:effectRef>
+          <a:fontRef idx="minor">
+            <a:schemeClr val="lt1"/>
+          </a:fontRef>
+        </p:style>
+        <p:txBody>
+          <a:bodyPr rtlCol="0" anchor="ctr"/>
+          <a:lstStyle/>
+          <a:p>
+            <a:pPr algn="ctr"/>
+          </a:p>
+        </p:txBody>
+      </p:sp>
+      <p:sp>
+        <p:nvSpPr>
+          <p:cNvPr id="10" name="TextBox 9"/>
+          <p:cNvSpPr txBox="1"/>
+          <p:nvPr/>
+        </p:nvSpPr>
+        <p:spPr>
+          <a:xfrm>
+            <a:off x="6858000" y="2880360"/>
+            <a:ext cx="4389120" cy="960120"/>
+          </a:xfrm>
+          <a:prstGeom prst="rect">
+            <a:avLst/>
+          </a:prstGeom>
+          <a:noFill/>
+        </p:spPr>
+        <p:txBody>
+          <a:bodyPr wrap="square">
+            <a:spAutoFit/>
+          </a:bodyPr>
+          <a:lstStyle/>
+          <a:p>
+            <a:pPr>
+              <a:defRPr sz="1200" b="1">
+                <a:solidFill>
+                  <a:srgbClr val="06B6D4"/>
+                </a:solidFill>
+              </a:defRPr>
+            </a:pPr>
+            <a:r>
+              <a:t>● Milestone 2 (Weeks 3-4): STT &amp; AI Summaries</a:t>
+            </a:r>
+          </a:p>
+          <a:p>
+            <a:pPr>
+              <a:defRPr sz="1050">
                 <a:solidFill>
                   <a:srgbClr val="CBD5E1"/>
                 </a:solidFill>
-                <a:latin typeface="Arial"/>
-              </a:defRPr>
-            </a:pPr>
-            <a:r>
-              <a:t>Purpose: Maintain platform operations, security, and performance.</a:t>
-            </a:r>
-            <a:br/>
-            <a:r>
-              <a:t>• Manage user roles, configure settings, and monitor platform activity.</a:t>
-            </a:r>
-            <a:br/>
-            <a:r>
-              <a:t>• Manage all uploaded content and view system analytics.</a:t>
-            </a:r>
-            <a:br/>
-            <a:r>
-              <a:t>• Monitor background AI tasks; manage disk storage and access logs.</a:t>
+              </a:defRPr>
+            </a:pPr>
+            <a:r>
+              <a:t>Faster-Whisper STT with word-level timestamps, Gemini 2.5 Flash summarization, structured JSON outputs, quality metrics.</a:t>
+            </a:r>
+          </a:p>
+        </p:txBody>
+      </p:sp>
+      <p:sp>
+        <p:nvSpPr>
+          <p:cNvPr id="11" name="Rounded Rectangle 10"/>
+          <p:cNvSpPr/>
+          <p:nvPr/>
+        </p:nvSpPr>
+        <p:spPr>
+          <a:xfrm>
+            <a:off x="6675120" y="4023360"/>
+            <a:ext cx="4754880" cy="1051560"/>
+          </a:xfrm>
+          <a:prstGeom prst="roundRect">
+            <a:avLst/>
+          </a:prstGeom>
+          <a:solidFill>
+            <a:srgbClr val="131B2E"/>
+          </a:solidFill>
+          <a:ln w="12700">
+            <a:solidFill>
+              <a:srgbClr val="263454"/>
+            </a:solidFill>
+          </a:ln>
+        </p:spPr>
+        <p:style>
+          <a:lnRef idx="1">
+            <a:schemeClr val="accent1"/>
+          </a:lnRef>
+          <a:fillRef idx="3">
+            <a:schemeClr val="accent1"/>
+          </a:fillRef>
+          <a:effectRef idx="2">
+            <a:schemeClr val="accent1"/>
+          </a:effectRef>
+          <a:fontRef idx="minor">
+            <a:schemeClr val="lt1"/>
+          </a:fontRef>
+        </p:style>
+        <p:txBody>
+          <a:bodyPr rtlCol="0" anchor="ctr"/>
+          <a:lstStyle/>
+          <a:p>
+            <a:pPr algn="ctr"/>
+          </a:p>
+        </p:txBody>
+      </p:sp>
+      <p:sp>
+        <p:nvSpPr>
+          <p:cNvPr id="12" name="TextBox 11"/>
+          <p:cNvSpPr txBox="1"/>
+          <p:nvPr/>
+        </p:nvSpPr>
+        <p:spPr>
+          <a:xfrm>
+            <a:off x="6858000" y="4069080"/>
+            <a:ext cx="4389120" cy="960120"/>
+          </a:xfrm>
+          <a:prstGeom prst="rect">
+            <a:avLst/>
+          </a:prstGeom>
+          <a:noFill/>
+        </p:spPr>
+        <p:txBody>
+          <a:bodyPr wrap="square">
+            <a:spAutoFit/>
+          </a:bodyPr>
+          <a:lstStyle/>
+          <a:p>
+            <a:pPr>
+              <a:defRPr sz="1200" b="1">
+                <a:solidFill>
+                  <a:srgbClr val="38BDF8"/>
+                </a:solidFill>
+              </a:defRPr>
+            </a:pPr>
+            <a:r>
+              <a:t>● Milestone 3 (Weeks 5-6): Key Moments &amp; Studio</a:t>
+            </a:r>
+          </a:p>
+          <a:p>
+            <a:pPr>
+              <a:defRPr sz="1050">
+                <a:solidFill>
+                  <a:srgbClr val="CBD5E1"/>
+                </a:solidFill>
+              </a:defRPr>
+            </a:pPr>
+            <a:r>
+              <a:t>Timestamp extraction, highlight reel clipping via FFmpeg, 3-column studio UI with synced playback &amp; interactive seeker.</a:t>
+            </a:r>
+          </a:p>
+        </p:txBody>
+      </p:sp>
+      <p:sp>
+        <p:nvSpPr>
+          <p:cNvPr id="13" name="Rounded Rectangle 12"/>
+          <p:cNvSpPr/>
+          <p:nvPr/>
+        </p:nvSpPr>
+        <p:spPr>
+          <a:xfrm>
+            <a:off x="6675120" y="5212080"/>
+            <a:ext cx="4754880" cy="1051560"/>
+          </a:xfrm>
+          <a:prstGeom prst="roundRect">
+            <a:avLst/>
+          </a:prstGeom>
+          <a:solidFill>
+            <a:srgbClr val="131B2E"/>
+          </a:solidFill>
+          <a:ln w="12700">
+            <a:solidFill>
+              <a:srgbClr val="263454"/>
+            </a:solidFill>
+          </a:ln>
+        </p:spPr>
+        <p:style>
+          <a:lnRef idx="1">
+            <a:schemeClr val="accent1"/>
+          </a:lnRef>
+          <a:fillRef idx="3">
+            <a:schemeClr val="accent1"/>
+          </a:fillRef>
+          <a:effectRef idx="2">
+            <a:schemeClr val="accent1"/>
+          </a:effectRef>
+          <a:fontRef idx="minor">
+            <a:schemeClr val="lt1"/>
+          </a:fontRef>
+        </p:style>
+        <p:txBody>
+          <a:bodyPr rtlCol="0" anchor="ctr"/>
+          <a:lstStyle/>
+          <a:p>
+            <a:pPr algn="ctr"/>
+          </a:p>
+        </p:txBody>
+      </p:sp>
+      <p:sp>
+        <p:nvSpPr>
+          <p:cNvPr id="14" name="TextBox 13"/>
+          <p:cNvSpPr txBox="1"/>
+          <p:nvPr/>
+        </p:nvSpPr>
+        <p:spPr>
+          <a:xfrm>
+            <a:off x="6858000" y="5257800"/>
+            <a:ext cx="4389120" cy="960120"/>
+          </a:xfrm>
+          <a:prstGeom prst="rect">
+            <a:avLst/>
+          </a:prstGeom>
+          <a:noFill/>
+        </p:spPr>
+        <p:txBody>
+          <a:bodyPr wrap="square">
+            <a:spAutoFit/>
+          </a:bodyPr>
+          <a:lstStyle/>
+          <a:p>
+            <a:pPr>
+              <a:defRPr sz="1200" b="1">
+                <a:solidFill>
+                  <a:srgbClr val="818CF8"/>
+                </a:solidFill>
+              </a:defRPr>
+            </a:pPr>
+            <a:r>
+              <a:t>● Milestone 4 (Weeks 7-8): Export &amp; Deployment</a:t>
+            </a:r>
+          </a:p>
+          <a:p>
+            <a:pPr>
+              <a:defRPr sz="1050">
+                <a:solidFill>
+                  <a:srgbClr val="CBD5E1"/>
+                </a:solidFill>
+              </a:defRPr>
+            </a:pPr>
+            <a:r>
+              <a:t>SRT/VTT/PDF/TXT exporters, Vercel Edge frontend, Render Docker backend, MongoDB Atlas &amp; PostgreSQL live.</a:t>
             </a:r>
           </a:p>
         </p:txBody>
@@ -3713,14 +7123,6 @@
 <file path=ppt/slides/slide4.xml><?xml version="1.0" encoding="utf-8"?>
 <p:sld xmlns:a="http://schemas.openxmlformats.org/drawingml/2006/main" xmlns:p="http://schemas.openxmlformats.org/presentationml/2006/main" xmlns:r="http://schemas.openxmlformats.org/officeDocument/2006/relationships">
   <p:cSld>
-    <p:bg>
-      <p:bgPr>
-        <a:solidFill>
-          <a:srgbClr val="0A0F1E"/>
-        </a:solidFill>
-        <a:effectLst/>
-      </p:bgPr>
-    </p:bg>
     <p:spTree>
       <p:nvGrpSpPr>
         <p:cNvPr id="1" name=""/>
@@ -3730,14 +7132,57 @@
       <p:grpSpPr/>
       <p:sp>
         <p:nvSpPr>
-          <p:cNvPr id="2" name="TextBox 1"/>
+          <p:cNvPr id="2" name="Rectangle 1"/>
+          <p:cNvSpPr/>
+          <p:nvPr/>
+        </p:nvSpPr>
+        <p:spPr>
+          <a:xfrm>
+            <a:off x="0" y="0"/>
+            <a:ext cx="12191695" cy="6858000"/>
+          </a:xfrm>
+          <a:prstGeom prst="rect">
+            <a:avLst/>
+          </a:prstGeom>
+          <a:solidFill>
+            <a:srgbClr val="0A0F1D"/>
+          </a:solidFill>
+          <a:ln>
+            <a:noFill/>
+          </a:ln>
+        </p:spPr>
+        <p:style>
+          <a:lnRef idx="1">
+            <a:schemeClr val="accent1"/>
+          </a:lnRef>
+          <a:fillRef idx="3">
+            <a:schemeClr val="accent1"/>
+          </a:fillRef>
+          <a:effectRef idx="2">
+            <a:schemeClr val="accent1"/>
+          </a:effectRef>
+          <a:fontRef idx="minor">
+            <a:schemeClr val="lt1"/>
+          </a:fontRef>
+        </p:style>
+        <p:txBody>
+          <a:bodyPr rtlCol="0" anchor="ctr"/>
+          <a:lstStyle/>
+          <a:p>
+            <a:pPr algn="ctr"/>
+          </a:p>
+        </p:txBody>
+      </p:sp>
+      <p:sp>
+        <p:nvSpPr>
+          <p:cNvPr id="3" name="TextBox 2"/>
           <p:cNvSpPr txBox="1"/>
           <p:nvPr/>
         </p:nvSpPr>
         <p:spPr>
           <a:xfrm>
             <a:off x="731520" y="365760"/>
-            <a:ext cx="10698480" cy="731520"/>
+            <a:ext cx="9144000" cy="365760"/>
           </a:xfrm>
           <a:prstGeom prst="rect">
             <a:avLst/>
@@ -3751,29 +7196,28 @@
           <a:lstStyle/>
           <a:p>
             <a:pPr>
-              <a:defRPr sz="3200" b="1">
-                <a:solidFill>
-                  <a:srgbClr val="818CF8"/>
-                </a:solidFill>
-                <a:latin typeface="Arial"/>
-              </a:defRPr>
-            </a:pPr>
-            <a:r>
-              <a:t>API Architecture &amp; Connecting the Dots</a:t>
-            </a:r>
-          </a:p>
-        </p:txBody>
-      </p:sp>
-      <p:sp>
-        <p:nvSpPr>
-          <p:cNvPr id="3" name="TextBox 2"/>
+              <a:defRPr sz="1000" b="1">
+                <a:solidFill>
+                  <a:srgbClr val="06B6D4"/>
+                </a:solidFill>
+              </a:defRPr>
+            </a:pPr>
+            <a:r>
+              <a:t>SYSTEM ARCHITECTURE</a:t>
+            </a:r>
+          </a:p>
+        </p:txBody>
+      </p:sp>
+      <p:sp>
+        <p:nvSpPr>
+          <p:cNvPr id="4" name="TextBox 3"/>
           <p:cNvSpPr txBox="1"/>
           <p:nvPr/>
         </p:nvSpPr>
         <p:spPr>
           <a:xfrm>
-            <a:off x="731520" y="1371600"/>
-            <a:ext cx="5303520" cy="4846320"/>
+            <a:off x="731520" y="640080"/>
+            <a:ext cx="10515600" cy="640080"/>
           </a:xfrm>
           <a:prstGeom prst="rect">
             <a:avLst/>
@@ -3787,148 +7231,108 @@
           <a:lstStyle/>
           <a:p>
             <a:pPr>
-              <a:spcAft>
-                <a:spcPts val="1000"/>
-              </a:spcAft>
-              <a:defRPr sz="1800" b="1">
-                <a:solidFill>
-                  <a:srgbClr val="818CF8"/>
-                </a:solidFill>
-                <a:latin typeface="Arial"/>
-              </a:defRPr>
-            </a:pPr>
-            <a:r>
-              <a:t>🔄 Backend Integration Flow</a:t>
-            </a:r>
-          </a:p>
-          <a:p>
-            <a:pPr>
-              <a:spcBef>
-                <a:spcPts val="800"/>
-              </a:spcBef>
-              <a:defRPr sz="1400" b="1">
-                <a:solidFill>
-                  <a:srgbClr val="FFFFFF"/>
-                </a:solidFill>
-                <a:latin typeface="Arial"/>
-              </a:defRPr>
-            </a:pPr>
-            <a:r>
-              <a:t>1. Ingestion POST request</a:t>
-            </a:r>
-          </a:p>
-          <a:p>
-            <a:pPr>
-              <a:defRPr sz="1200">
+              <a:defRPr sz="2400" b="1">
+                <a:solidFill>
+                  <a:srgbClr val="F8FAFC"/>
+                </a:solidFill>
+              </a:defRPr>
+            </a:pPr>
+            <a:r>
+              <a:t>End-to-End Technology Stack &amp; Data Flow</a:t>
+            </a:r>
+          </a:p>
+        </p:txBody>
+      </p:sp>
+      <p:sp>
+        <p:nvSpPr>
+          <p:cNvPr id="5" name="TextBox 4"/>
+          <p:cNvSpPr txBox="1"/>
+          <p:nvPr/>
+        </p:nvSpPr>
+        <p:spPr>
+          <a:xfrm>
+            <a:off x="731520" y="1234440"/>
+            <a:ext cx="10515600" cy="365760"/>
+          </a:xfrm>
+          <a:prstGeom prst="rect">
+            <a:avLst/>
+          </a:prstGeom>
+          <a:noFill/>
+        </p:spPr>
+        <p:txBody>
+          <a:bodyPr wrap="none">
+            <a:spAutoFit/>
+          </a:bodyPr>
+          <a:lstStyle/>
+          <a:p>
+            <a:pPr>
+              <a:defRPr sz="1300">
                 <a:solidFill>
                   <a:srgbClr val="94A3B8"/>
                 </a:solidFill>
-                <a:latin typeface="Arial"/>
-              </a:defRPr>
-            </a:pPr>
-            <a:r>
-              <a:t>POST /api/videos/upload or POST /api/videos/youtube creates a PostgreSQL record and launches the async worker.</a:t>
-            </a:r>
-          </a:p>
-          <a:p>
-            <a:pPr>
-              <a:spcBef>
-                <a:spcPts val="800"/>
-              </a:spcBef>
-              <a:defRPr sz="1400" b="1">
-                <a:solidFill>
-                  <a:srgbClr val="FFFFFF"/>
-                </a:solidFill>
-                <a:latin typeface="Arial"/>
-              </a:defRPr>
-            </a:pPr>
-            <a:r>
-              <a:t>2. Real-Time Status Polling</a:t>
-            </a:r>
-          </a:p>
-          <a:p>
-            <a:pPr>
-              <a:defRPr sz="1200">
-                <a:solidFill>
-                  <a:srgbClr val="94A3B8"/>
-                </a:solidFill>
-                <a:latin typeface="Arial"/>
-              </a:defRPr>
-            </a:pPr>
-            <a:r>
-              <a:t>Next.js polls GET /api/videos/{id} to monitor the worker state (processing -&gt; transcribing -&gt; summarizing -&gt; completed).</a:t>
-            </a:r>
-          </a:p>
-          <a:p>
-            <a:pPr>
-              <a:spcBef>
-                <a:spcPts val="800"/>
-              </a:spcBef>
-              <a:defRPr sz="1400" b="1">
-                <a:solidFill>
-                  <a:srgbClr val="FFFFFF"/>
-                </a:solidFill>
-                <a:latin typeface="Arial"/>
-              </a:defRPr>
-            </a:pPr>
-            <a:r>
-              <a:t>3. Secured Range Streaming</a:t>
-            </a:r>
-          </a:p>
-          <a:p>
-            <a:pPr>
-              <a:defRPr sz="1200">
-                <a:solidFill>
-                  <a:srgbClr val="94A3B8"/>
-                </a:solidFill>
-                <a:latin typeface="Arial"/>
-              </a:defRPr>
-            </a:pPr>
-            <a:r>
-              <a:t>HTML5 video player requests GET /api/videos/{id}/stream passing a JWT token parameter. Backend streams raw bytes with seeking support.</a:t>
-            </a:r>
-          </a:p>
-          <a:p>
-            <a:pPr>
-              <a:spcBef>
-                <a:spcPts val="800"/>
-              </a:spcBef>
-              <a:defRPr sz="1400" b="1">
-                <a:solidFill>
-                  <a:srgbClr val="FFFFFF"/>
-                </a:solidFill>
-                <a:latin typeface="Arial"/>
-              </a:defRPr>
-            </a:pPr>
-            <a:r>
-              <a:t>4. NoSQL Data Hydration</a:t>
-            </a:r>
-          </a:p>
-          <a:p>
-            <a:pPr>
-              <a:defRPr sz="1200">
-                <a:solidFill>
-                  <a:srgbClr val="94A3B8"/>
-                </a:solidFill>
-                <a:latin typeface="Arial"/>
-              </a:defRPr>
-            </a:pPr>
-            <a:r>
-              <a:t>GET /api/videos/{id}/summary retrieves heavy transcripts, moment tags, and LLM text summaries from MongoDB.</a:t>
-            </a:r>
-          </a:p>
-        </p:txBody>
-      </p:sp>
-      <p:sp>
-        <p:nvSpPr>
-          <p:cNvPr id="4" name="TextBox 3"/>
+              </a:defRPr>
+            </a:pPr>
+            <a:r>
+              <a:t>Decoupled Next.js 15 frontend, FastAPI microservice backend, and hybrid database engine</a:t>
+            </a:r>
+          </a:p>
+        </p:txBody>
+      </p:sp>
+      <p:sp>
+        <p:nvSpPr>
+          <p:cNvPr id="6" name="Rounded Rectangle 5"/>
+          <p:cNvSpPr/>
+          <p:nvPr/>
+        </p:nvSpPr>
+        <p:spPr>
+          <a:xfrm>
+            <a:off x="731520" y="1737360"/>
+            <a:ext cx="2560320" cy="4480560"/>
+          </a:xfrm>
+          <a:prstGeom prst="roundRect">
+            <a:avLst/>
+          </a:prstGeom>
+          <a:solidFill>
+            <a:srgbClr val="131B2E"/>
+          </a:solidFill>
+          <a:ln w="12700">
+            <a:solidFill>
+              <a:srgbClr val="263454"/>
+            </a:solidFill>
+          </a:ln>
+        </p:spPr>
+        <p:style>
+          <a:lnRef idx="1">
+            <a:schemeClr val="accent1"/>
+          </a:lnRef>
+          <a:fillRef idx="3">
+            <a:schemeClr val="accent1"/>
+          </a:fillRef>
+          <a:effectRef idx="2">
+            <a:schemeClr val="accent1"/>
+          </a:effectRef>
+          <a:fontRef idx="minor">
+            <a:schemeClr val="lt1"/>
+          </a:fontRef>
+        </p:style>
+        <p:txBody>
+          <a:bodyPr rtlCol="0" anchor="ctr"/>
+          <a:lstStyle/>
+          <a:p>
+            <a:pPr algn="ctr"/>
+          </a:p>
+        </p:txBody>
+      </p:sp>
+      <p:sp>
+        <p:nvSpPr>
+          <p:cNvPr id="7" name="TextBox 6"/>
           <p:cNvSpPr txBox="1"/>
           <p:nvPr/>
         </p:nvSpPr>
         <p:spPr>
           <a:xfrm>
-            <a:off x="6400800" y="1371600"/>
-            <a:ext cx="5029200" cy="4846320"/>
+            <a:off x="868680" y="1920240"/>
+            <a:ext cx="2286000" cy="4114800"/>
           </a:xfrm>
           <a:prstGeom prst="rect">
             <a:avLst/>
@@ -3942,105 +7346,366 @@
           <a:lstStyle/>
           <a:p>
             <a:pPr>
-              <a:spcAft>
-                <a:spcPts val="1000"/>
-              </a:spcAft>
-              <a:defRPr sz="1800" b="1">
-                <a:solidFill>
-                  <a:srgbClr val="34D399"/>
-                </a:solidFill>
-                <a:latin typeface="Arial"/>
-              </a:defRPr>
-            </a:pPr>
-            <a:r>
-              <a:t>📁 Polyglot Database Mapping</a:t>
-            </a:r>
-          </a:p>
-          <a:p>
-            <a:pPr>
-              <a:spcBef>
-                <a:spcPts val="800"/>
-              </a:spcBef>
-              <a:defRPr sz="1400" b="1">
-                <a:solidFill>
-                  <a:srgbClr val="FFFFFF"/>
-                </a:solidFill>
-                <a:latin typeface="Arial"/>
-              </a:defRPr>
-            </a:pPr>
-            <a:r>
-              <a:t>PostgreSQL (Relational)</a:t>
-            </a:r>
-          </a:p>
-          <a:p>
-            <a:pPr>
-              <a:defRPr sz="1200">
-                <a:solidFill>
-                  <a:srgbClr val="94A3B8"/>
-                </a:solidFill>
-                <a:latin typeface="Arial"/>
-              </a:defRPr>
-            </a:pPr>
-            <a:r>
-              <a:t>Stores core users (roles, hashed passwords) and video indexing records (filename, status, upload time) linked via standard foreign key structures.</a:t>
-            </a:r>
-          </a:p>
-          <a:p>
-            <a:pPr>
-              <a:spcBef>
-                <a:spcPts val="800"/>
-              </a:spcBef>
-              <a:defRPr sz="1400" b="1">
-                <a:solidFill>
-                  <a:srgbClr val="FFFFFF"/>
-                </a:solidFill>
-                <a:latin typeface="Arial"/>
-              </a:defRPr>
-            </a:pPr>
-            <a:r>
-              <a:t>MongoDB (NoSQL Document Store)</a:t>
-            </a:r>
-          </a:p>
-          <a:p>
-            <a:pPr>
-              <a:defRPr sz="1200">
-                <a:solidFill>
-                  <a:srgbClr val="94A3B8"/>
-                </a:solidFill>
-                <a:latin typeface="Arial"/>
-              </a:defRPr>
-            </a:pPr>
-            <a:r>
-              <a:t>Stores unstructured, heavy video data including: full raw speech transcripts, list of start/end time-aligned segments, executive/detailed summaries, and moments arrays.</a:t>
-            </a:r>
-          </a:p>
-          <a:p>
-            <a:pPr>
-              <a:spcBef>
-                <a:spcPts val="800"/>
-              </a:spcBef>
-              <a:defRPr sz="1400" b="1">
-                <a:solidFill>
-                  <a:srgbClr val="FFFFFF"/>
-                </a:solidFill>
-                <a:latin typeface="Arial"/>
-              </a:defRPr>
-            </a:pPr>
-            <a:r>
-              <a:t>OS Local Disk Storage</a:t>
-            </a:r>
-          </a:p>
-          <a:p>
-            <a:pPr>
-              <a:defRPr sz="1200">
-                <a:solidFill>
-                  <a:srgbClr val="94A3B8"/>
-                </a:solidFill>
-                <a:latin typeface="Arial"/>
-              </a:defRPr>
-            </a:pPr>
-            <a:r>
-              <a:t>Stores physical uploaded videos, extracted MP3 audio, and frame-captured JPEG cover previews inside uploads/ directories.</a:t>
+              <a:defRPr sz="1300" b="1">
+                <a:solidFill>
+                  <a:srgbClr val="06B6D4"/>
+                </a:solidFill>
+              </a:defRPr>
+            </a:pPr>
+            <a:r>
+              <a:t>1. Presentation Layer (Vercel)</a:t>
+            </a:r>
+          </a:p>
+          <a:p>
+            <a:pPr>
+              <a:defRPr sz="1150">
+                <a:solidFill>
+                  <a:srgbClr val="CBD5E1"/>
+                </a:solidFill>
+              </a:defRPr>
+            </a:pPr>
+            <a:r>
+              <a:t>Next.js 15 (App Router)</a:t>
+            </a:r>
+            <a:br/>
+            <a:r>
+              <a:t>React 19 &amp; TypeScript</a:t>
+            </a:r>
+            <a:br/>
+            <a:r>
+              <a:t>Tailwind CSS 3.4 &amp; Lucide</a:t>
+            </a:r>
+            <a:br/>
+            <a:r>
+              <a:t>Turbopack Bundler</a:t>
+            </a:r>
+            <a:br/>
+            <a:r>
+              <a:t>HTML5 Synced Video Seeker</a:t>
+            </a:r>
+          </a:p>
+        </p:txBody>
+      </p:sp>
+      <p:sp>
+        <p:nvSpPr>
+          <p:cNvPr id="8" name="Rounded Rectangle 7"/>
+          <p:cNvSpPr/>
+          <p:nvPr/>
+        </p:nvSpPr>
+        <p:spPr>
+          <a:xfrm>
+            <a:off x="3429000" y="1737360"/>
+            <a:ext cx="2560320" cy="4480560"/>
+          </a:xfrm>
+          <a:prstGeom prst="roundRect">
+            <a:avLst/>
+          </a:prstGeom>
+          <a:solidFill>
+            <a:srgbClr val="131B2E"/>
+          </a:solidFill>
+          <a:ln w="12700">
+            <a:solidFill>
+              <a:srgbClr val="263454"/>
+            </a:solidFill>
+          </a:ln>
+        </p:spPr>
+        <p:style>
+          <a:lnRef idx="1">
+            <a:schemeClr val="accent1"/>
+          </a:lnRef>
+          <a:fillRef idx="3">
+            <a:schemeClr val="accent1"/>
+          </a:fillRef>
+          <a:effectRef idx="2">
+            <a:schemeClr val="accent1"/>
+          </a:effectRef>
+          <a:fontRef idx="minor">
+            <a:schemeClr val="lt1"/>
+          </a:fontRef>
+        </p:style>
+        <p:txBody>
+          <a:bodyPr rtlCol="0" anchor="ctr"/>
+          <a:lstStyle/>
+          <a:p>
+            <a:pPr algn="ctr"/>
+          </a:p>
+        </p:txBody>
+      </p:sp>
+      <p:sp>
+        <p:nvSpPr>
+          <p:cNvPr id="9" name="TextBox 8"/>
+          <p:cNvSpPr txBox="1"/>
+          <p:nvPr/>
+        </p:nvSpPr>
+        <p:spPr>
+          <a:xfrm>
+            <a:off x="3566160" y="1920240"/>
+            <a:ext cx="2286000" cy="4114800"/>
+          </a:xfrm>
+          <a:prstGeom prst="rect">
+            <a:avLst/>
+          </a:prstGeom>
+          <a:noFill/>
+        </p:spPr>
+        <p:txBody>
+          <a:bodyPr wrap="square">
+            <a:spAutoFit/>
+          </a:bodyPr>
+          <a:lstStyle/>
+          <a:p>
+            <a:pPr>
+              <a:defRPr sz="1300" b="1">
+                <a:solidFill>
+                  <a:srgbClr val="38BDF8"/>
+                </a:solidFill>
+              </a:defRPr>
+            </a:pPr>
+            <a:r>
+              <a:t>2. API &amp; Orchestration (Render)</a:t>
+            </a:r>
+          </a:p>
+          <a:p>
+            <a:pPr>
+              <a:defRPr sz="1150">
+                <a:solidFill>
+                  <a:srgbClr val="CBD5E1"/>
+                </a:solidFill>
+              </a:defRPr>
+            </a:pPr>
+            <a:r>
+              <a:t>FastAPI + Uvicorn (Py 3.11)</a:t>
+            </a:r>
+            <a:br/>
+            <a:r>
+              <a:t>JWT &amp; RBAC Security</a:t>
+            </a:r>
+            <a:br/>
+            <a:r>
+              <a:t>Async Background Tasks</a:t>
+            </a:r>
+            <a:br/>
+            <a:r>
+              <a:t>Pydantic v2 Serialization</a:t>
+            </a:r>
+            <a:br/>
+            <a:r>
+              <a:t>RESTful Modular Routers</a:t>
+            </a:r>
+          </a:p>
+        </p:txBody>
+      </p:sp>
+      <p:sp>
+        <p:nvSpPr>
+          <p:cNvPr id="10" name="Rounded Rectangle 9"/>
+          <p:cNvSpPr/>
+          <p:nvPr/>
+        </p:nvSpPr>
+        <p:spPr>
+          <a:xfrm>
+            <a:off x="6126480" y="1737360"/>
+            <a:ext cx="2560320" cy="4480560"/>
+          </a:xfrm>
+          <a:prstGeom prst="roundRect">
+            <a:avLst/>
+          </a:prstGeom>
+          <a:solidFill>
+            <a:srgbClr val="131B2E"/>
+          </a:solidFill>
+          <a:ln w="12700">
+            <a:solidFill>
+              <a:srgbClr val="263454"/>
+            </a:solidFill>
+          </a:ln>
+        </p:spPr>
+        <p:style>
+          <a:lnRef idx="1">
+            <a:schemeClr val="accent1"/>
+          </a:lnRef>
+          <a:fillRef idx="3">
+            <a:schemeClr val="accent1"/>
+          </a:fillRef>
+          <a:effectRef idx="2">
+            <a:schemeClr val="accent1"/>
+          </a:effectRef>
+          <a:fontRef idx="minor">
+            <a:schemeClr val="lt1"/>
+          </a:fontRef>
+        </p:style>
+        <p:txBody>
+          <a:bodyPr rtlCol="0" anchor="ctr"/>
+          <a:lstStyle/>
+          <a:p>
+            <a:pPr algn="ctr"/>
+          </a:p>
+        </p:txBody>
+      </p:sp>
+      <p:sp>
+        <p:nvSpPr>
+          <p:cNvPr id="11" name="TextBox 10"/>
+          <p:cNvSpPr txBox="1"/>
+          <p:nvPr/>
+        </p:nvSpPr>
+        <p:spPr>
+          <a:xfrm>
+            <a:off x="6263640" y="1920240"/>
+            <a:ext cx="2286000" cy="4114800"/>
+          </a:xfrm>
+          <a:prstGeom prst="rect">
+            <a:avLst/>
+          </a:prstGeom>
+          <a:noFill/>
+        </p:spPr>
+        <p:txBody>
+          <a:bodyPr wrap="square">
+            <a:spAutoFit/>
+          </a:bodyPr>
+          <a:lstStyle/>
+          <a:p>
+            <a:pPr>
+              <a:defRPr sz="1300" b="1">
+                <a:solidFill>
+                  <a:srgbClr val="818CF8"/>
+                </a:solidFill>
+              </a:defRPr>
+            </a:pPr>
+            <a:r>
+              <a:t>3. Media &amp; AI Engine</a:t>
+            </a:r>
+          </a:p>
+          <a:p>
+            <a:pPr>
+              <a:defRPr sz="1150">
+                <a:solidFill>
+                  <a:srgbClr val="CBD5E1"/>
+                </a:solidFill>
+              </a:defRPr>
+            </a:pPr>
+            <a:r>
+              <a:t>Faster-Whisper (OpenAI)</a:t>
+            </a:r>
+            <a:br/>
+            <a:r>
+              <a:t>Google Gemini 2.5 Flash</a:t>
+            </a:r>
+            <a:br/>
+            <a:r>
+              <a:t>FFmpeg 6.x CLI Subprocess</a:t>
+            </a:r>
+            <a:br/>
+            <a:r>
+              <a:t>yt-dlp (TV Client Anti-Bot)</a:t>
+            </a:r>
+            <a:br/>
+            <a:r>
+              <a:t>PyTorch Core Runtime</a:t>
+            </a:r>
+          </a:p>
+        </p:txBody>
+      </p:sp>
+      <p:sp>
+        <p:nvSpPr>
+          <p:cNvPr id="12" name="Rounded Rectangle 11"/>
+          <p:cNvSpPr/>
+          <p:nvPr/>
+        </p:nvSpPr>
+        <p:spPr>
+          <a:xfrm>
+            <a:off x="8823960" y="1737360"/>
+            <a:ext cx="2560320" cy="4480560"/>
+          </a:xfrm>
+          <a:prstGeom prst="roundRect">
+            <a:avLst/>
+          </a:prstGeom>
+          <a:solidFill>
+            <a:srgbClr val="131B2E"/>
+          </a:solidFill>
+          <a:ln w="12700">
+            <a:solidFill>
+              <a:srgbClr val="263454"/>
+            </a:solidFill>
+          </a:ln>
+        </p:spPr>
+        <p:style>
+          <a:lnRef idx="1">
+            <a:schemeClr val="accent1"/>
+          </a:lnRef>
+          <a:fillRef idx="3">
+            <a:schemeClr val="accent1"/>
+          </a:fillRef>
+          <a:effectRef idx="2">
+            <a:schemeClr val="accent1"/>
+          </a:effectRef>
+          <a:fontRef idx="minor">
+            <a:schemeClr val="lt1"/>
+          </a:fontRef>
+        </p:style>
+        <p:txBody>
+          <a:bodyPr rtlCol="0" anchor="ctr"/>
+          <a:lstStyle/>
+          <a:p>
+            <a:pPr algn="ctr"/>
+          </a:p>
+        </p:txBody>
+      </p:sp>
+      <p:sp>
+        <p:nvSpPr>
+          <p:cNvPr id="13" name="TextBox 12"/>
+          <p:cNvSpPr txBox="1"/>
+          <p:nvPr/>
+        </p:nvSpPr>
+        <p:spPr>
+          <a:xfrm>
+            <a:off x="8961120" y="1920240"/>
+            <a:ext cx="2286000" cy="4114800"/>
+          </a:xfrm>
+          <a:prstGeom prst="rect">
+            <a:avLst/>
+          </a:prstGeom>
+          <a:noFill/>
+        </p:spPr>
+        <p:txBody>
+          <a:bodyPr wrap="square">
+            <a:spAutoFit/>
+          </a:bodyPr>
+          <a:lstStyle/>
+          <a:p>
+            <a:pPr>
+              <a:defRPr sz="1300" b="1">
+                <a:solidFill>
+                  <a:srgbClr val="10B981"/>
+                </a:solidFill>
+              </a:defRPr>
+            </a:pPr>
+            <a:r>
+              <a:t>4. Dual Data Tier</a:t>
+            </a:r>
+          </a:p>
+          <a:p>
+            <a:pPr>
+              <a:defRPr sz="1150">
+                <a:solidFill>
+                  <a:srgbClr val="CBD5E1"/>
+                </a:solidFill>
+              </a:defRPr>
+            </a:pPr>
+            <a:r>
+              <a:t>PostgreSQL (Users &amp; Auth)</a:t>
+            </a:r>
+            <a:br/>
+            <a:r>
+              <a:t>MongoDB Atlas (Transcripts)</a:t>
+            </a:r>
+            <a:br/>
+            <a:r>
+              <a:t>Local / Object File Store</a:t>
+            </a:r>
+            <a:br/>
+            <a:r>
+              <a:t>Bcrypt Password Hashing</a:t>
+            </a:r>
+            <a:br/>
+            <a:r>
+              <a:t>Motor Async Mongo Driver</a:t>
             </a:r>
           </a:p>
         </p:txBody>
@@ -4056,14 +7721,6 @@
 <file path=ppt/slides/slide5.xml><?xml version="1.0" encoding="utf-8"?>
 <p:sld xmlns:a="http://schemas.openxmlformats.org/drawingml/2006/main" xmlns:p="http://schemas.openxmlformats.org/presentationml/2006/main" xmlns:r="http://schemas.openxmlformats.org/officeDocument/2006/relationships">
   <p:cSld>
-    <p:bg>
-      <p:bgPr>
-        <a:solidFill>
-          <a:srgbClr val="0A0F1E"/>
-        </a:solidFill>
-        <a:effectLst/>
-      </p:bgPr>
-    </p:bg>
     <p:spTree>
       <p:nvGrpSpPr>
         <p:cNvPr id="1" name=""/>
@@ -4073,14 +7730,57 @@
       <p:grpSpPr/>
       <p:sp>
         <p:nvSpPr>
-          <p:cNvPr id="2" name="TextBox 1"/>
+          <p:cNvPr id="2" name="Rectangle 1"/>
+          <p:cNvSpPr/>
+          <p:nvPr/>
+        </p:nvSpPr>
+        <p:spPr>
+          <a:xfrm>
+            <a:off x="0" y="0"/>
+            <a:ext cx="12191695" cy="6858000"/>
+          </a:xfrm>
+          <a:prstGeom prst="rect">
+            <a:avLst/>
+          </a:prstGeom>
+          <a:solidFill>
+            <a:srgbClr val="0A0F1D"/>
+          </a:solidFill>
+          <a:ln>
+            <a:noFill/>
+          </a:ln>
+        </p:spPr>
+        <p:style>
+          <a:lnRef idx="1">
+            <a:schemeClr val="accent1"/>
+          </a:lnRef>
+          <a:fillRef idx="3">
+            <a:schemeClr val="accent1"/>
+          </a:fillRef>
+          <a:effectRef idx="2">
+            <a:schemeClr val="accent1"/>
+          </a:effectRef>
+          <a:fontRef idx="minor">
+            <a:schemeClr val="lt1"/>
+          </a:fontRef>
+        </p:style>
+        <p:txBody>
+          <a:bodyPr rtlCol="0" anchor="ctr"/>
+          <a:lstStyle/>
+          <a:p>
+            <a:pPr algn="ctr"/>
+          </a:p>
+        </p:txBody>
+      </p:sp>
+      <p:sp>
+        <p:nvSpPr>
+          <p:cNvPr id="3" name="TextBox 2"/>
           <p:cNvSpPr txBox="1"/>
           <p:nvPr/>
         </p:nvSpPr>
         <p:spPr>
           <a:xfrm>
             <a:off x="731520" y="365760"/>
-            <a:ext cx="10698480" cy="731520"/>
+            <a:ext cx="9144000" cy="365760"/>
           </a:xfrm>
           <a:prstGeom prst="rect">
             <a:avLst/>
@@ -4094,29 +7794,28 @@
           <a:lstStyle/>
           <a:p>
             <a:pPr>
-              <a:defRPr sz="3200" b="1">
-                <a:solidFill>
-                  <a:srgbClr val="818CF8"/>
-                </a:solidFill>
-                <a:latin typeface="Arial"/>
-              </a:defRPr>
-            </a:pPr>
-            <a:r>
-              <a:t>Special Feature: Whisper CUDA GPU Acceleration</a:t>
-            </a:r>
-          </a:p>
-        </p:txBody>
-      </p:sp>
-      <p:sp>
-        <p:nvSpPr>
-          <p:cNvPr id="3" name="TextBox 2"/>
+              <a:defRPr sz="1000" b="1">
+                <a:solidFill>
+                  <a:srgbClr val="06B6D4"/>
+                </a:solidFill>
+              </a:defRPr>
+            </a:pPr>
+            <a:r>
+              <a:t>DATA ARCHITECTURE</a:t>
+            </a:r>
+          </a:p>
+        </p:txBody>
+      </p:sp>
+      <p:sp>
+        <p:nvSpPr>
+          <p:cNvPr id="4" name="TextBox 3"/>
           <p:cNvSpPr txBox="1"/>
           <p:nvPr/>
         </p:nvSpPr>
         <p:spPr>
           <a:xfrm>
-            <a:off x="731520" y="1371600"/>
-            <a:ext cx="10698480" cy="4846320"/>
+            <a:off x="731520" y="640080"/>
+            <a:ext cx="10515600" cy="640080"/>
           </a:xfrm>
           <a:prstGeom prst="rect">
             <a:avLst/>
@@ -4130,118 +7829,233 @@
           <a:lstStyle/>
           <a:p>
             <a:pPr>
-              <a:spcBef>
-                <a:spcPts val="1200"/>
-              </a:spcBef>
-              <a:defRPr sz="1600" b="1">
-                <a:solidFill>
-                  <a:srgbClr val="FBBF24"/>
-                </a:solidFill>
-                <a:latin typeface="Arial"/>
-              </a:defRPr>
-            </a:pPr>
-            <a:r>
-              <a:t>🚀 ⚡ Long-Format Video Bottleneck Solution</a:t>
-            </a:r>
-          </a:p>
+              <a:defRPr sz="2400" b="1">
+                <a:solidFill>
+                  <a:srgbClr val="F8FAFC"/>
+                </a:solidFill>
+              </a:defRPr>
+            </a:pPr>
+            <a:r>
+              <a:t>Dual-Database Strategy: PostgreSQL + MongoDB Atlas</a:t>
+            </a:r>
+          </a:p>
+        </p:txBody>
+      </p:sp>
+      <p:sp>
+        <p:nvSpPr>
+          <p:cNvPr id="5" name="TextBox 4"/>
+          <p:cNvSpPr txBox="1"/>
+          <p:nvPr/>
+        </p:nvSpPr>
+        <p:spPr>
+          <a:xfrm>
+            <a:off x="731520" y="1234440"/>
+            <a:ext cx="10515600" cy="365760"/>
+          </a:xfrm>
+          <a:prstGeom prst="rect">
+            <a:avLst/>
+          </a:prstGeom>
+          <a:noFill/>
+        </p:spPr>
+        <p:txBody>
+          <a:bodyPr wrap="none">
+            <a:spAutoFit/>
+          </a:bodyPr>
+          <a:lstStyle/>
           <a:p>
             <a:pPr>
               <a:defRPr sz="1300">
                 <a:solidFill>
+                  <a:srgbClr val="94A3B8"/>
+                </a:solidFill>
+              </a:defRPr>
+            </a:pPr>
+            <a:r>
+              <a:t>Strict relational integrity for identity paired with high-performance JSON document storage</a:t>
+            </a:r>
+          </a:p>
+        </p:txBody>
+      </p:sp>
+      <p:pic>
+        <p:nvPicPr>
+          <p:cNvPr id="6" name="Picture 5" descr="database_split.png"/>
+          <p:cNvPicPr>
+            <a:picLocks noChangeAspect="1"/>
+          </p:cNvPicPr>
+          <p:nvPr/>
+        </p:nvPicPr>
+        <p:blipFill>
+          <a:blip r:embed="rId2"/>
+          <a:stretch>
+            <a:fillRect/>
+          </a:stretch>
+        </p:blipFill>
+        <p:spPr>
+          <a:xfrm>
+            <a:off x="731520" y="1645920"/>
+            <a:ext cx="5852160" cy="3291840"/>
+          </a:xfrm>
+          <a:prstGeom prst="rect">
+            <a:avLst/>
+          </a:prstGeom>
+        </p:spPr>
+      </p:pic>
+      <p:sp>
+        <p:nvSpPr>
+          <p:cNvPr id="7" name="Rounded Rectangle 6"/>
+          <p:cNvSpPr/>
+          <p:nvPr/>
+        </p:nvSpPr>
+        <p:spPr>
+          <a:xfrm>
+            <a:off x="6858000" y="1645920"/>
+            <a:ext cx="4572000" cy="4663440"/>
+          </a:xfrm>
+          <a:prstGeom prst="roundRect">
+            <a:avLst/>
+          </a:prstGeom>
+          <a:solidFill>
+            <a:srgbClr val="131B2E"/>
+          </a:solidFill>
+          <a:ln w="12700">
+            <a:solidFill>
+              <a:srgbClr val="263454"/>
+            </a:solidFill>
+          </a:ln>
+        </p:spPr>
+        <p:style>
+          <a:lnRef idx="1">
+            <a:schemeClr val="accent1"/>
+          </a:lnRef>
+          <a:fillRef idx="3">
+            <a:schemeClr val="accent1"/>
+          </a:fillRef>
+          <a:effectRef idx="2">
+            <a:schemeClr val="accent1"/>
+          </a:effectRef>
+          <a:fontRef idx="minor">
+            <a:schemeClr val="lt1"/>
+          </a:fontRef>
+        </p:style>
+        <p:txBody>
+          <a:bodyPr rtlCol="0" anchor="ctr"/>
+          <a:lstStyle/>
+          <a:p>
+            <a:pPr algn="ctr"/>
+          </a:p>
+        </p:txBody>
+      </p:sp>
+      <p:sp>
+        <p:nvSpPr>
+          <p:cNvPr id="8" name="TextBox 7"/>
+          <p:cNvSpPr txBox="1"/>
+          <p:nvPr/>
+        </p:nvSpPr>
+        <p:spPr>
+          <a:xfrm>
+            <a:off x="7132320" y="1828800"/>
+            <a:ext cx="4023360" cy="4206240"/>
+          </a:xfrm>
+          <a:prstGeom prst="rect">
+            <a:avLst/>
+          </a:prstGeom>
+          <a:noFill/>
+        </p:spPr>
+        <p:txBody>
+          <a:bodyPr wrap="square">
+            <a:spAutoFit/>
+          </a:bodyPr>
+          <a:lstStyle/>
+          <a:p>
+            <a:pPr>
+              <a:defRPr sz="1400" b="1">
+                <a:solidFill>
+                  <a:srgbClr val="06B6D4"/>
+                </a:solidFill>
+              </a:defRPr>
+            </a:pPr>
+            <a:r>
+              <a:t>WHY HYBRID PERSISTENCE?</a:t>
+            </a:r>
+          </a:p>
+          <a:p>
+            <a:pPr>
+              <a:defRPr sz="1150" b="1">
+                <a:solidFill>
+                  <a:srgbClr val="F8FAFC"/>
+                </a:solidFill>
+              </a:defRPr>
+            </a:pPr>
+            <a:r>
+              <a:t>✔ PostgreSQL (Relational):</a:t>
+            </a:r>
+            <a:r>
+              <a:rPr b="0">
+                <a:solidFill>
                   <a:srgbClr val="CBD5E1"/>
                 </a:solidFill>
-                <a:latin typeface="Arial"/>
-              </a:defRPr>
-            </a:pPr>
-            <a:r>
-              <a:t>Speech-to-Text is the heaviest part of the video pipeline. Transcribing long-format videos on CPUs is extremely slow and limits scalability.</a:t>
-            </a:r>
-          </a:p>
-          <a:p>
-            <a:pPr>
-              <a:spcBef>
-                <a:spcPts val="1200"/>
-              </a:spcBef>
-              <a:defRPr sz="1600" b="1">
-                <a:solidFill>
-                  <a:srgbClr val="FBBF24"/>
-                </a:solidFill>
-                <a:latin typeface="Arial"/>
-              </a:defRPr>
-            </a:pPr>
-            <a:r>
-              <a:t>🚀 🎮 CUDA GPU Auto-Detection</a:t>
-            </a:r>
-          </a:p>
-          <a:p>
-            <a:pPr>
-              <a:defRPr sz="1300">
+              </a:rPr>
+              <a:t> Enforces strict ACID guarantees for user accounts, hashed passwords, RBAC role permissions, and video ownership foreign keys.</a:t>
+            </a:r>
+          </a:p>
+          <a:p>
+            <a:pPr>
+              <a:defRPr sz="1150" b="1">
+                <a:solidFill>
+                  <a:srgbClr val="F8FAFC"/>
+                </a:solidFill>
+              </a:defRPr>
+            </a:pPr>
+            <a:r>
+              <a:t>✔ MongoDB Atlas (Multimodal JSON):</a:t>
+            </a:r>
+            <a:r>
+              <a:rPr b="0">
                 <a:solidFill>
                   <a:srgbClr val="CBD5E1"/>
                 </a:solidFill>
-                <a:latin typeface="Arial"/>
-              </a:defRPr>
-            </a:pPr>
-            <a:r>
-              <a:t>The backend worker dynamically queries PyTorch CUDA capabilities: 'device = "cuda" if torch.cuda.is_available() else "cpu"'. If an NVIDIA card is found, it offloads computing to the GPU.</a:t>
-            </a:r>
-          </a:p>
-          <a:p>
-            <a:pPr>
-              <a:spcBef>
-                <a:spcPts val="1200"/>
-              </a:spcBef>
-              <a:defRPr sz="1600" b="1">
-                <a:solidFill>
-                  <a:srgbClr val="FBBF24"/>
-                </a:solidFill>
-                <a:latin typeface="Arial"/>
-              </a:defRPr>
-            </a:pPr>
-            <a:r>
-              <a:t>🚀 🔬 FP16 (Float16) Precision Execution</a:t>
-            </a:r>
-          </a:p>
-          <a:p>
-            <a:pPr>
-              <a:defRPr sz="1300">
+              </a:rPr>
+              <a:t> Video transcripts contain thousands of timestamped word fragments. MongoDB documents support flexible nesting without rigid schema migrations.</a:t>
+            </a:r>
+          </a:p>
+          <a:p>
+            <a:pPr>
+              <a:defRPr sz="1150" b="1">
+                <a:solidFill>
+                  <a:srgbClr val="F8FAFC"/>
+                </a:solidFill>
+              </a:defRPr>
+            </a:pPr>
+            <a:r>
+              <a:t>✔ Dynamic AI Queries:</a:t>
+            </a:r>
+            <a:r>
+              <a:rPr b="0">
                 <a:solidFill>
                   <a:srgbClr val="CBD5E1"/>
                 </a:solidFill>
-                <a:latin typeface="Arial"/>
-              </a:defRPr>
-            </a:pPr>
-            <a:r>
-              <a:t>When CUDA is active, it runs model.transcribe(..., fp16=True). This leverages GPU Tensor Cores, cutting memory bandwidth in half and increasing throughput dramatically.</a:t>
-            </a:r>
-          </a:p>
-          <a:p>
-            <a:pPr>
-              <a:spcBef>
-                <a:spcPts val="1200"/>
-              </a:spcBef>
-              <a:defRPr sz="1600" b="1">
-                <a:solidFill>
-                  <a:srgbClr val="FBBF24"/>
-                </a:solidFill>
-                <a:latin typeface="Arial"/>
-              </a:defRPr>
-            </a:pPr>
-            <a:r>
-              <a:t>🚀 📈 Speed Increase &amp; CPU Fallback</a:t>
-            </a:r>
-          </a:p>
-          <a:p>
-            <a:pPr>
-              <a:defRPr sz="1300">
+              </a:rPr>
+              <a:t> Gemini summaries, bullet points, and key moments are naturally stored and retrieved as native JSON objects.</a:t>
+            </a:r>
+          </a:p>
+          <a:p>
+            <a:pPr>
+              <a:defRPr sz="1150" b="1">
+                <a:solidFill>
+                  <a:srgbClr val="F8FAFC"/>
+                </a:solidFill>
+              </a:defRPr>
+            </a:pPr>
+            <a:r>
+              <a:t>✔ Zero Contention:</a:t>
+            </a:r>
+            <a:r>
+              <a:rPr b="0">
                 <a:solidFill>
                   <a:srgbClr val="CBD5E1"/>
                 </a:solidFill>
-                <a:latin typeface="Arial"/>
-              </a:defRPr>
-            </a:pPr>
-            <a:r>
-              <a:t>Accelerates transcription by 4x to 6x on laptop GPU (NVIDIA GeForce RTX 2050), while maintaining CPU compatibility so the code executes on any machine.</a:t>
+              </a:rPr>
+              <a:t> Heavy transcript writes and AI chat queries never lock user auth tables, maximizing overall API responsiveness.</a:t>
             </a:r>
           </a:p>
         </p:txBody>
@@ -4257,14 +8071,6 @@
 <file path=ppt/slides/slide6.xml><?xml version="1.0" encoding="utf-8"?>
 <p:sld xmlns:a="http://schemas.openxmlformats.org/drawingml/2006/main" xmlns:p="http://schemas.openxmlformats.org/presentationml/2006/main" xmlns:r="http://schemas.openxmlformats.org/officeDocument/2006/relationships">
   <p:cSld>
-    <p:bg>
-      <p:bgPr>
-        <a:solidFill>
-          <a:srgbClr val="0A0F1E"/>
-        </a:solidFill>
-        <a:effectLst/>
-      </p:bgPr>
-    </p:bg>
     <p:spTree>
       <p:nvGrpSpPr>
         <p:cNvPr id="1" name=""/>
@@ -4274,14 +8080,57 @@
       <p:grpSpPr/>
       <p:sp>
         <p:nvSpPr>
-          <p:cNvPr id="2" name="TextBox 1"/>
+          <p:cNvPr id="2" name="Rectangle 1"/>
+          <p:cNvSpPr/>
+          <p:nvPr/>
+        </p:nvSpPr>
+        <p:spPr>
+          <a:xfrm>
+            <a:off x="0" y="0"/>
+            <a:ext cx="12191695" cy="6858000"/>
+          </a:xfrm>
+          <a:prstGeom prst="rect">
+            <a:avLst/>
+          </a:prstGeom>
+          <a:solidFill>
+            <a:srgbClr val="0A0F1D"/>
+          </a:solidFill>
+          <a:ln>
+            <a:noFill/>
+          </a:ln>
+        </p:spPr>
+        <p:style>
+          <a:lnRef idx="1">
+            <a:schemeClr val="accent1"/>
+          </a:lnRef>
+          <a:fillRef idx="3">
+            <a:schemeClr val="accent1"/>
+          </a:fillRef>
+          <a:effectRef idx="2">
+            <a:schemeClr val="accent1"/>
+          </a:effectRef>
+          <a:fontRef idx="minor">
+            <a:schemeClr val="lt1"/>
+          </a:fontRef>
+        </p:style>
+        <p:txBody>
+          <a:bodyPr rtlCol="0" anchor="ctr"/>
+          <a:lstStyle/>
+          <a:p>
+            <a:pPr algn="ctr"/>
+          </a:p>
+        </p:txBody>
+      </p:sp>
+      <p:sp>
+        <p:nvSpPr>
+          <p:cNvPr id="3" name="TextBox 2"/>
           <p:cNvSpPr txBox="1"/>
           <p:nvPr/>
         </p:nvSpPr>
         <p:spPr>
           <a:xfrm>
             <a:off x="731520" y="365760"/>
-            <a:ext cx="10698480" cy="731520"/>
+            <a:ext cx="9144000" cy="365760"/>
           </a:xfrm>
           <a:prstGeom prst="rect">
             <a:avLst/>
@@ -4295,29 +8144,28 @@
           <a:lstStyle/>
           <a:p>
             <a:pPr>
-              <a:defRPr sz="3200" b="1">
-                <a:solidFill>
-                  <a:srgbClr val="818CF8"/>
-                </a:solidFill>
-                <a:latin typeface="Arial"/>
-              </a:defRPr>
-            </a:pPr>
-            <a:r>
-              <a:t>YouTube Ingestion &amp; Browser Codec Fixes</a:t>
-            </a:r>
-          </a:p>
-        </p:txBody>
-      </p:sp>
-      <p:sp>
-        <p:nvSpPr>
-          <p:cNvPr id="3" name="TextBox 2"/>
+              <a:defRPr sz="1000" b="1">
+                <a:solidFill>
+                  <a:srgbClr val="06B6D4"/>
+                </a:solidFill>
+              </a:defRPr>
+            </a:pPr>
+            <a:r>
+              <a:t>MILESTONE 1 REVIEW (WEEKS 1 &amp; 2)</a:t>
+            </a:r>
+          </a:p>
+        </p:txBody>
+      </p:sp>
+      <p:sp>
+        <p:nvSpPr>
+          <p:cNvPr id="4" name="TextBox 3"/>
           <p:cNvSpPr txBox="1"/>
           <p:nvPr/>
         </p:nvSpPr>
         <p:spPr>
           <a:xfrm>
-            <a:off x="731520" y="1371600"/>
-            <a:ext cx="10698480" cy="4846320"/>
+            <a:off x="731520" y="640080"/>
+            <a:ext cx="10515600" cy="640080"/>
           </a:xfrm>
           <a:prstGeom prst="rect">
             <a:avLst/>
@@ -4331,118 +8179,453 @@
           <a:lstStyle/>
           <a:p>
             <a:pPr>
-              <a:spcBef>
-                <a:spcPts val="1000"/>
-              </a:spcBef>
-              <a:defRPr sz="1600" b="1">
-                <a:solidFill>
-                  <a:srgbClr val="FFFFFF"/>
-                </a:solidFill>
-                <a:latin typeface="Arial"/>
-              </a:defRPr>
-            </a:pPr>
-            <a:r>
-              <a:t>🔹 📦 yt-dlp Video Stream Ingestion</a:t>
-            </a:r>
-          </a:p>
+              <a:defRPr sz="2400" b="1">
+                <a:solidFill>
+                  <a:srgbClr val="F8FAFC"/>
+                </a:solidFill>
+              </a:defRPr>
+            </a:pPr>
+            <a:r>
+              <a:t>Project Initialization, RBAC &amp; Media Processing</a:t>
+            </a:r>
+          </a:p>
+        </p:txBody>
+      </p:sp>
+      <p:sp>
+        <p:nvSpPr>
+          <p:cNvPr id="5" name="TextBox 4"/>
+          <p:cNvSpPr txBox="1"/>
+          <p:nvPr/>
+        </p:nvSpPr>
+        <p:spPr>
+          <a:xfrm>
+            <a:off x="731520" y="1234440"/>
+            <a:ext cx="10515600" cy="365760"/>
+          </a:xfrm>
+          <a:prstGeom prst="rect">
+            <a:avLst/>
+          </a:prstGeom>
+          <a:noFill/>
+        </p:spPr>
+        <p:txBody>
+          <a:bodyPr wrap="none">
+            <a:spAutoFit/>
+          </a:bodyPr>
+          <a:lstStyle/>
           <a:p>
             <a:pPr>
               <a:defRPr sz="1300">
                 <a:solidFill>
                   <a:srgbClr val="94A3B8"/>
                 </a:solidFill>
-                <a:latin typeface="Arial"/>
-              </a:defRPr>
-            </a:pPr>
-            <a:r>
-              <a:t>Pasting a link triggers yt-dlp to download the video. It extracts the raw stream, ignores playlists, and stores the file as 'youtube_{id}.mp4'.</a:t>
-            </a:r>
-          </a:p>
-          <a:p>
-            <a:pPr>
-              <a:spcBef>
-                <a:spcPts val="1000"/>
-              </a:spcBef>
-              <a:defRPr sz="1600" b="1">
-                <a:solidFill>
-                  <a:srgbClr val="FFFFFF"/>
-                </a:solidFill>
-                <a:latin typeface="Arial"/>
-              </a:defRPr>
-            </a:pPr>
-            <a:r>
-              <a:t>🔹 ⚙️ FFmpeg Binary Path Resolution</a:t>
-            </a:r>
-          </a:p>
-          <a:p>
-            <a:pPr>
-              <a:defRPr sz="1300">
-                <a:solidFill>
-                  <a:srgbClr val="94A3B8"/>
-                </a:solidFill>
-                <a:latin typeface="Arial"/>
-              </a:defRPr>
-            </a:pPr>
-            <a:r>
-              <a:t>Since the server does not rely on system environment variables, we query the PyTorch bundle 'imageio_ffmpeg.get_ffmpeg_exe()' and pass it directly to yt-dlp to merge streams.</a:t>
-            </a:r>
-          </a:p>
-          <a:p>
-            <a:pPr>
-              <a:spcBef>
-                <a:spcPts val="1000"/>
-              </a:spcBef>
-              <a:defRPr sz="1600" b="1">
-                <a:solidFill>
-                  <a:srgbClr val="FFFFFF"/>
-                </a:solidFill>
-                <a:latin typeface="Arial"/>
-              </a:defRPr>
-            </a:pPr>
-            <a:r>
-              <a:t>🔹 🔊 Browser Audio Codec Fix (Opus to AAC)</a:t>
-            </a:r>
-          </a:p>
-          <a:p>
-            <a:pPr>
-              <a:defRPr sz="1300">
-                <a:solidFill>
-                  <a:srgbClr val="94A3B8"/>
-                </a:solidFill>
-                <a:latin typeface="Arial"/>
-              </a:defRPr>
-            </a:pPr>
-            <a:r>
-              <a:t>YouTube serves high-quality audio using the Opus codec, which HTML5 MP4 containers cannot decode in standard browsers. We force AAC transcoding during merging using: Merger: ['-c:a', 'aac'].</a:t>
-            </a:r>
-          </a:p>
-          <a:p>
-            <a:pPr>
-              <a:spcBef>
-                <a:spcPts val="1000"/>
-              </a:spcBef>
-              <a:defRPr sz="1600" b="1">
-                <a:solidFill>
-                  <a:srgbClr val="FFFFFF"/>
-                </a:solidFill>
-                <a:latin typeface="Arial"/>
-              </a:defRPr>
-            </a:pPr>
-            <a:r>
-              <a:t>🔹 ⚡ Frontend Seek &amp; Auto-Unmute</a:t>
-            </a:r>
-          </a:p>
-          <a:p>
-            <a:pPr>
-              <a:defRPr sz="1300">
-                <a:solidFill>
-                  <a:srgbClr val="94A3B8"/>
-                </a:solidFill>
-                <a:latin typeface="Arial"/>
-              </a:defRPr>
-            </a:pPr>
-            <a:r>
-              <a:t>React binds seekTo(seconds) to click callbacks. Programmatic play calls trigger browser mute guards; we bypass this by forcing video.muted = false on every seek event.</a:t>
+              </a:defRPr>
+            </a:pPr>
+            <a:r>
+              <a:t>Establishing the core microservices, authentication security, and video upload pipelines</a:t>
+            </a:r>
+          </a:p>
+        </p:txBody>
+      </p:sp>
+      <p:sp>
+        <p:nvSpPr>
+          <p:cNvPr id="6" name="Rounded Rectangle 5"/>
+          <p:cNvSpPr/>
+          <p:nvPr/>
+        </p:nvSpPr>
+        <p:spPr>
+          <a:xfrm>
+            <a:off x="731520" y="1645920"/>
+            <a:ext cx="5120640" cy="2194560"/>
+          </a:xfrm>
+          <a:prstGeom prst="roundRect">
+            <a:avLst/>
+          </a:prstGeom>
+          <a:solidFill>
+            <a:srgbClr val="131B2E"/>
+          </a:solidFill>
+          <a:ln w="12700">
+            <a:solidFill>
+              <a:srgbClr val="263454"/>
+            </a:solidFill>
+          </a:ln>
+        </p:spPr>
+        <p:style>
+          <a:lnRef idx="1">
+            <a:schemeClr val="accent1"/>
+          </a:lnRef>
+          <a:fillRef idx="3">
+            <a:schemeClr val="accent1"/>
+          </a:fillRef>
+          <a:effectRef idx="2">
+            <a:schemeClr val="accent1"/>
+          </a:effectRef>
+          <a:fontRef idx="minor">
+            <a:schemeClr val="lt1"/>
+          </a:fontRef>
+        </p:style>
+        <p:txBody>
+          <a:bodyPr rtlCol="0" anchor="ctr"/>
+          <a:lstStyle/>
+          <a:p>
+            <a:pPr algn="ctr"/>
+          </a:p>
+        </p:txBody>
+      </p:sp>
+      <p:sp>
+        <p:nvSpPr>
+          <p:cNvPr id="7" name="TextBox 6"/>
+          <p:cNvSpPr txBox="1"/>
+          <p:nvPr/>
+        </p:nvSpPr>
+        <p:spPr>
+          <a:xfrm>
+            <a:off x="914400" y="1783080"/>
+            <a:ext cx="4754880" cy="1920240"/>
+          </a:xfrm>
+          <a:prstGeom prst="rect">
+            <a:avLst/>
+          </a:prstGeom>
+          <a:noFill/>
+        </p:spPr>
+        <p:txBody>
+          <a:bodyPr wrap="square">
+            <a:spAutoFit/>
+          </a:bodyPr>
+          <a:lstStyle/>
+          <a:p>
+            <a:pPr>
+              <a:defRPr sz="1300" b="1">
+                <a:solidFill>
+                  <a:srgbClr val="06B6D4"/>
+                </a:solidFill>
+              </a:defRPr>
+            </a:pPr>
+            <a:r>
+              <a:t>✔ Architecture &amp; Schemas</a:t>
+            </a:r>
+          </a:p>
+          <a:p>
+            <a:pPr>
+              <a:defRPr sz="1100">
+                <a:solidFill>
+                  <a:srgbClr val="CBD5E1"/>
+                </a:solidFill>
+              </a:defRPr>
+            </a:pPr>
+            <a:r>
+              <a:t>• Designed ER diagrams and system topology.</a:t>
+            </a:r>
+            <a:br/>
+            <a:r>
+              <a:t>• Implemented User, Video, Transcript, and Summary schemas.</a:t>
+            </a:r>
+            <a:br/>
+            <a:r>
+              <a:t>• Integrated Alembic/SQLAlchemy and Mongo Motor drivers.</a:t>
+            </a:r>
+          </a:p>
+        </p:txBody>
+      </p:sp>
+      <p:sp>
+        <p:nvSpPr>
+          <p:cNvPr id="8" name="Rounded Rectangle 7"/>
+          <p:cNvSpPr/>
+          <p:nvPr/>
+        </p:nvSpPr>
+        <p:spPr>
+          <a:xfrm>
+            <a:off x="6126480" y="1645920"/>
+            <a:ext cx="5120640" cy="2194560"/>
+          </a:xfrm>
+          <a:prstGeom prst="roundRect">
+            <a:avLst/>
+          </a:prstGeom>
+          <a:solidFill>
+            <a:srgbClr val="131B2E"/>
+          </a:solidFill>
+          <a:ln w="12700">
+            <a:solidFill>
+              <a:srgbClr val="263454"/>
+            </a:solidFill>
+          </a:ln>
+        </p:spPr>
+        <p:style>
+          <a:lnRef idx="1">
+            <a:schemeClr val="accent1"/>
+          </a:lnRef>
+          <a:fillRef idx="3">
+            <a:schemeClr val="accent1"/>
+          </a:fillRef>
+          <a:effectRef idx="2">
+            <a:schemeClr val="accent1"/>
+          </a:effectRef>
+          <a:fontRef idx="minor">
+            <a:schemeClr val="lt1"/>
+          </a:fontRef>
+        </p:style>
+        <p:txBody>
+          <a:bodyPr rtlCol="0" anchor="ctr"/>
+          <a:lstStyle/>
+          <a:p>
+            <a:pPr algn="ctr"/>
+          </a:p>
+        </p:txBody>
+      </p:sp>
+      <p:sp>
+        <p:nvSpPr>
+          <p:cNvPr id="9" name="TextBox 8"/>
+          <p:cNvSpPr txBox="1"/>
+          <p:nvPr/>
+        </p:nvSpPr>
+        <p:spPr>
+          <a:xfrm>
+            <a:off x="6309360" y="1783080"/>
+            <a:ext cx="4754880" cy="1920240"/>
+          </a:xfrm>
+          <a:prstGeom prst="rect">
+            <a:avLst/>
+          </a:prstGeom>
+          <a:noFill/>
+        </p:spPr>
+        <p:txBody>
+          <a:bodyPr wrap="square">
+            <a:spAutoFit/>
+          </a:bodyPr>
+          <a:lstStyle/>
+          <a:p>
+            <a:pPr>
+              <a:defRPr sz="1300" b="1">
+                <a:solidFill>
+                  <a:srgbClr val="38BDF8"/>
+                </a:solidFill>
+              </a:defRPr>
+            </a:pPr>
+            <a:r>
+              <a:t>✔ JWT Auth &amp; 4-Role RBAC</a:t>
+            </a:r>
+          </a:p>
+          <a:p>
+            <a:pPr>
+              <a:defRPr sz="1100">
+                <a:solidFill>
+                  <a:srgbClr val="CBD5E1"/>
+                </a:solidFill>
+              </a:defRPr>
+            </a:pPr>
+            <a:r>
+              <a:t>• Implemented secure JWT bearer authentication.</a:t>
+            </a:r>
+            <a:br/>
+            <a:r>
+              <a:t>• Role hierarchy: Admin (all), Creator (upload/cut), Educator (annotate), Learner (view/ask).</a:t>
+            </a:r>
+            <a:br/>
+            <a:r>
+              <a:t>• Password hashing with passlib/bcrypt.</a:t>
+            </a:r>
+          </a:p>
+        </p:txBody>
+      </p:sp>
+      <p:sp>
+        <p:nvSpPr>
+          <p:cNvPr id="10" name="Rounded Rectangle 9"/>
+          <p:cNvSpPr/>
+          <p:nvPr/>
+        </p:nvSpPr>
+        <p:spPr>
+          <a:xfrm>
+            <a:off x="731520" y="4023360"/>
+            <a:ext cx="5120640" cy="2194560"/>
+          </a:xfrm>
+          <a:prstGeom prst="roundRect">
+            <a:avLst/>
+          </a:prstGeom>
+          <a:solidFill>
+            <a:srgbClr val="131B2E"/>
+          </a:solidFill>
+          <a:ln w="12700">
+            <a:solidFill>
+              <a:srgbClr val="263454"/>
+            </a:solidFill>
+          </a:ln>
+        </p:spPr>
+        <p:style>
+          <a:lnRef idx="1">
+            <a:schemeClr val="accent1"/>
+          </a:lnRef>
+          <a:fillRef idx="3">
+            <a:schemeClr val="accent1"/>
+          </a:fillRef>
+          <a:effectRef idx="2">
+            <a:schemeClr val="accent1"/>
+          </a:effectRef>
+          <a:fontRef idx="minor">
+            <a:schemeClr val="lt1"/>
+          </a:fontRef>
+        </p:style>
+        <p:txBody>
+          <a:bodyPr rtlCol="0" anchor="ctr"/>
+          <a:lstStyle/>
+          <a:p>
+            <a:pPr algn="ctr"/>
+          </a:p>
+        </p:txBody>
+      </p:sp>
+      <p:sp>
+        <p:nvSpPr>
+          <p:cNvPr id="11" name="TextBox 10"/>
+          <p:cNvSpPr txBox="1"/>
+          <p:nvPr/>
+        </p:nvSpPr>
+        <p:spPr>
+          <a:xfrm>
+            <a:off x="914400" y="4160520"/>
+            <a:ext cx="4754880" cy="1920240"/>
+          </a:xfrm>
+          <a:prstGeom prst="rect">
+            <a:avLst/>
+          </a:prstGeom>
+          <a:noFill/>
+        </p:spPr>
+        <p:txBody>
+          <a:bodyPr wrap="square">
+            <a:spAutoFit/>
+          </a:bodyPr>
+          <a:lstStyle/>
+          <a:p>
+            <a:pPr>
+              <a:defRPr sz="1300" b="1">
+                <a:solidFill>
+                  <a:srgbClr val="818CF8"/>
+                </a:solidFill>
+              </a:defRPr>
+            </a:pPr>
+            <a:r>
+              <a:t>✔ Video Upload Workflows</a:t>
+            </a:r>
+          </a:p>
+          <a:p>
+            <a:pPr>
+              <a:defRPr sz="1100">
+                <a:solidFill>
+                  <a:srgbClr val="CBD5E1"/>
+                </a:solidFill>
+              </a:defRPr>
+            </a:pPr>
+            <a:r>
+              <a:t>• Multi-part chunked video upload pipeline.</a:t>
+            </a:r>
+            <a:br/>
+            <a:r>
+              <a:t>• MIME-type validation (.mp4, .mov, .avi, .mkv).</a:t>
+            </a:r>
+            <a:br/>
+            <a:r>
+              <a:t>• UUID-based secure local / cloud object storage.</a:t>
+            </a:r>
+            <a:br/>
+            <a:r>
+              <a:t>• Resilient async job state tracking.</a:t>
+            </a:r>
+          </a:p>
+        </p:txBody>
+      </p:sp>
+      <p:sp>
+        <p:nvSpPr>
+          <p:cNvPr id="12" name="Rounded Rectangle 11"/>
+          <p:cNvSpPr/>
+          <p:nvPr/>
+        </p:nvSpPr>
+        <p:spPr>
+          <a:xfrm>
+            <a:off x="6126480" y="4023360"/>
+            <a:ext cx="5120640" cy="2194560"/>
+          </a:xfrm>
+          <a:prstGeom prst="roundRect">
+            <a:avLst/>
+          </a:prstGeom>
+          <a:solidFill>
+            <a:srgbClr val="131B2E"/>
+          </a:solidFill>
+          <a:ln w="12700">
+            <a:solidFill>
+              <a:srgbClr val="263454"/>
+            </a:solidFill>
+          </a:ln>
+        </p:spPr>
+        <p:style>
+          <a:lnRef idx="1">
+            <a:schemeClr val="accent1"/>
+          </a:lnRef>
+          <a:fillRef idx="3">
+            <a:schemeClr val="accent1"/>
+          </a:fillRef>
+          <a:effectRef idx="2">
+            <a:schemeClr val="accent1"/>
+          </a:effectRef>
+          <a:fontRef idx="minor">
+            <a:schemeClr val="lt1"/>
+          </a:fontRef>
+        </p:style>
+        <p:txBody>
+          <a:bodyPr rtlCol="0" anchor="ctr"/>
+          <a:lstStyle/>
+          <a:p>
+            <a:pPr algn="ctr"/>
+          </a:p>
+        </p:txBody>
+      </p:sp>
+      <p:sp>
+        <p:nvSpPr>
+          <p:cNvPr id="13" name="TextBox 12"/>
+          <p:cNvSpPr txBox="1"/>
+          <p:nvPr/>
+        </p:nvSpPr>
+        <p:spPr>
+          <a:xfrm>
+            <a:off x="6309360" y="4160520"/>
+            <a:ext cx="4754880" cy="1920240"/>
+          </a:xfrm>
+          <a:prstGeom prst="rect">
+            <a:avLst/>
+          </a:prstGeom>
+          <a:noFill/>
+        </p:spPr>
+        <p:txBody>
+          <a:bodyPr wrap="square">
+            <a:spAutoFit/>
+          </a:bodyPr>
+          <a:lstStyle/>
+          <a:p>
+            <a:pPr>
+              <a:defRPr sz="1300" b="1">
+                <a:solidFill>
+                  <a:srgbClr val="10B981"/>
+                </a:solidFill>
+              </a:defRPr>
+            </a:pPr>
+            <a:r>
+              <a:t>✔ FFmpeg Audio Pipeline</a:t>
+            </a:r>
+          </a:p>
+          <a:p>
+            <a:pPr>
+              <a:defRPr sz="1100">
+                <a:solidFill>
+                  <a:srgbClr val="CBD5E1"/>
+                </a:solidFill>
+              </a:defRPr>
+            </a:pPr>
+            <a:r>
+              <a:t>• Subprocess pipeline extracting 16kHz mono audio (.wav).</a:t>
+            </a:r>
+            <a:br/>
+            <a:r>
+              <a:t>• yt-dlp integration with TV-client fallback to bypass cloud anti-bot blocks.</a:t>
+            </a:r>
+            <a:br/>
+            <a:r>
+              <a:t>• Video metadata extraction (duration, fps, resolution).</a:t>
             </a:r>
           </a:p>
         </p:txBody>
@@ -4458,14 +8641,6 @@
 <file path=ppt/slides/slide7.xml><?xml version="1.0" encoding="utf-8"?>
 <p:sld xmlns:a="http://schemas.openxmlformats.org/drawingml/2006/main" xmlns:p="http://schemas.openxmlformats.org/presentationml/2006/main" xmlns:r="http://schemas.openxmlformats.org/officeDocument/2006/relationships">
   <p:cSld>
-    <p:bg>
-      <p:bgPr>
-        <a:solidFill>
-          <a:srgbClr val="0A0F1E"/>
-        </a:solidFill>
-        <a:effectLst/>
-      </p:bgPr>
-    </p:bg>
     <p:spTree>
       <p:nvGrpSpPr>
         <p:cNvPr id="1" name=""/>
@@ -4475,14 +8650,57 @@
       <p:grpSpPr/>
       <p:sp>
         <p:nvSpPr>
-          <p:cNvPr id="2" name="TextBox 1"/>
+          <p:cNvPr id="2" name="Rectangle 1"/>
+          <p:cNvSpPr/>
+          <p:nvPr/>
+        </p:nvSpPr>
+        <p:spPr>
+          <a:xfrm>
+            <a:off x="0" y="0"/>
+            <a:ext cx="12191695" cy="6858000"/>
+          </a:xfrm>
+          <a:prstGeom prst="rect">
+            <a:avLst/>
+          </a:prstGeom>
+          <a:solidFill>
+            <a:srgbClr val="0A0F1D"/>
+          </a:solidFill>
+          <a:ln>
+            <a:noFill/>
+          </a:ln>
+        </p:spPr>
+        <p:style>
+          <a:lnRef idx="1">
+            <a:schemeClr val="accent1"/>
+          </a:lnRef>
+          <a:fillRef idx="3">
+            <a:schemeClr val="accent1"/>
+          </a:fillRef>
+          <a:effectRef idx="2">
+            <a:schemeClr val="accent1"/>
+          </a:effectRef>
+          <a:fontRef idx="minor">
+            <a:schemeClr val="lt1"/>
+          </a:fontRef>
+        </p:style>
+        <p:txBody>
+          <a:bodyPr rtlCol="0" anchor="ctr"/>
+          <a:lstStyle/>
+          <a:p>
+            <a:pPr algn="ctr"/>
+          </a:p>
+        </p:txBody>
+      </p:sp>
+      <p:sp>
+        <p:nvSpPr>
+          <p:cNvPr id="3" name="TextBox 2"/>
           <p:cNvSpPr txBox="1"/>
           <p:nvPr/>
         </p:nvSpPr>
         <p:spPr>
           <a:xfrm>
             <a:off x="731520" y="365760"/>
-            <a:ext cx="10698480" cy="731520"/>
+            <a:ext cx="9144000" cy="365760"/>
           </a:xfrm>
           <a:prstGeom prst="rect">
             <a:avLst/>
@@ -4496,29 +8714,28 @@
           <a:lstStyle/>
           <a:p>
             <a:pPr>
-              <a:defRPr sz="3200" b="1">
-                <a:solidFill>
-                  <a:srgbClr val="818CF8"/>
-                </a:solidFill>
-                <a:latin typeface="Arial"/>
-              </a:defRPr>
-            </a:pPr>
-            <a:r>
-              <a:t>Advanced Thematic Summaries (Gemini)</a:t>
-            </a:r>
-          </a:p>
-        </p:txBody>
-      </p:sp>
-      <p:sp>
-        <p:nvSpPr>
-          <p:cNvPr id="3" name="TextBox 2"/>
+              <a:defRPr sz="1000" b="1">
+                <a:solidFill>
+                  <a:srgbClr val="06B6D4"/>
+                </a:solidFill>
+              </a:defRPr>
+            </a:pPr>
+            <a:r>
+              <a:t>MILESTONE 2 REVIEW (WEEKS 3 &amp; 4)</a:t>
+            </a:r>
+          </a:p>
+        </p:txBody>
+      </p:sp>
+      <p:sp>
+        <p:nvSpPr>
+          <p:cNvPr id="4" name="TextBox 3"/>
           <p:cNvSpPr txBox="1"/>
           <p:nvPr/>
         </p:nvSpPr>
         <p:spPr>
           <a:xfrm>
-            <a:off x="731520" y="1371600"/>
-            <a:ext cx="10698480" cy="4846320"/>
+            <a:off x="731520" y="640080"/>
+            <a:ext cx="10515600" cy="640080"/>
           </a:xfrm>
           <a:prstGeom prst="rect">
             <a:avLst/>
@@ -4532,118 +8749,457 @@
           <a:lstStyle/>
           <a:p>
             <a:pPr>
-              <a:spcBef>
-                <a:spcPts val="1000"/>
-              </a:spcBef>
-              <a:defRPr sz="1600" b="1">
-                <a:solidFill>
-                  <a:srgbClr val="FFFFFF"/>
-                </a:solidFill>
-                <a:latin typeface="Arial"/>
-              </a:defRPr>
-            </a:pPr>
-            <a:r>
-              <a:t>🔸 📜 Abstractive Redesign (Content Editor)</a:t>
-            </a:r>
-          </a:p>
+              <a:defRPr sz="2400" b="1">
+                <a:solidFill>
+                  <a:srgbClr val="F8FAFC"/>
+                </a:solidFill>
+              </a:defRPr>
+            </a:pPr>
+            <a:r>
+              <a:t>Whisper Speech-to-Text &amp; AI Summarization</a:t>
+            </a:r>
+          </a:p>
+        </p:txBody>
+      </p:sp>
+      <p:sp>
+        <p:nvSpPr>
+          <p:cNvPr id="5" name="TextBox 4"/>
+          <p:cNvSpPr txBox="1"/>
+          <p:nvPr/>
+        </p:nvSpPr>
+        <p:spPr>
+          <a:xfrm>
+            <a:off x="731520" y="1234440"/>
+            <a:ext cx="10515600" cy="365760"/>
+          </a:xfrm>
+          <a:prstGeom prst="rect">
+            <a:avLst/>
+          </a:prstGeom>
+          <a:noFill/>
+        </p:spPr>
+        <p:txBody>
+          <a:bodyPr wrap="none">
+            <a:spAutoFit/>
+          </a:bodyPr>
+          <a:lstStyle/>
           <a:p>
             <a:pPr>
               <a:defRPr sz="1300">
                 <a:solidFill>
                   <a:srgbClr val="94A3B8"/>
                 </a:solidFill>
-                <a:latin typeface="Arial"/>
-              </a:defRPr>
-            </a:pPr>
-            <a:r>
-              <a:t>Prompts are configured to prevent literal copy-pasting, forcing Gemini to synthesize concepts in its own words and group points by themes instead of chronologically.</a:t>
-            </a:r>
-          </a:p>
-          <a:p>
-            <a:pPr>
-              <a:spcBef>
-                <a:spcPts val="1000"/>
-              </a:spcBef>
-              <a:defRPr sz="1600" b="1">
-                <a:solidFill>
-                  <a:srgbClr val="FFFFFF"/>
-                </a:solidFill>
-                <a:latin typeface="Arial"/>
-              </a:defRPr>
-            </a:pPr>
-            <a:r>
-              <a:t>🔸 🛠️ Google API strict JSON Mode</a:t>
-            </a:r>
-          </a:p>
-          <a:p>
-            <a:pPr>
-              <a:defRPr sz="1300">
-                <a:solidFill>
-                  <a:srgbClr val="94A3B8"/>
-                </a:solidFill>
-                <a:latin typeface="Arial"/>
-              </a:defRPr>
-            </a:pPr>
-            <a:r>
-              <a:t>Instantiates Gemini 2.5 Flash using response_mime_type='application/json' to guarantee the model output compiles cleanly without raw text or markdown ticks.</a:t>
-            </a:r>
-          </a:p>
-          <a:p>
-            <a:pPr>
-              <a:spcBef>
-                <a:spcPts val="1000"/>
-              </a:spcBef>
-              <a:defRPr sz="1600" b="1">
-                <a:solidFill>
-                  <a:srgbClr val="FFFFFF"/>
-                </a:solidFill>
-                <a:latin typeface="Arial"/>
-              </a:defRPr>
-            </a:pPr>
-            <a:r>
-              <a:t>🔸 🚀 Double-Sided Parser Sanitizers</a:t>
-            </a:r>
-          </a:p>
-          <a:p>
-            <a:pPr>
-              <a:defRPr sz="1300">
-                <a:solidFill>
-                  <a:srgbClr val="94A3B8"/>
-                </a:solidFill>
-                <a:latin typeface="Arial"/>
-              </a:defRPr>
-            </a:pPr>
-            <a:r>
-              <a:t>Wrote extract_json_from_text() to parse data even if proxies insert noise. If the AI returns bullet lists as an array, the backend joins them with newlines before saving.</a:t>
-            </a:r>
-          </a:p>
-          <a:p>
-            <a:pPr>
-              <a:spcBef>
-                <a:spcPts val="1000"/>
-              </a:spcBef>
-              <a:defRPr sz="1600" b="1">
-                <a:solidFill>
-                  <a:srgbClr val="FFFFFF"/>
-                </a:solidFill>
-                <a:latin typeface="Arial"/>
-              </a:defRPr>
-            </a:pPr>
-            <a:r>
-              <a:t>🔸 🎨 Live Terminal Pipeline Status</a:t>
-            </a:r>
-          </a:p>
-          <a:p>
-            <a:pPr>
-              <a:defRPr sz="1300">
-                <a:solidFill>
-                  <a:srgbClr val="94A3B8"/>
-                </a:solidFill>
-                <a:latin typeface="Arial"/>
-              </a:defRPr>
-            </a:pPr>
-            <a:r>
-              <a:t>Displays granular states in the dashboard sidebar: 'downloading', 'processing', 'transcribing', and 'summarizing', linked to color-coded pill indicators.</a:t>
+              </a:defRPr>
+            </a:pPr>
+            <a:r>
+              <a:t>High-accuracy automated transcription and LLM-powered structured summaries</a:t>
+            </a:r>
+          </a:p>
+        </p:txBody>
+      </p:sp>
+      <p:sp>
+        <p:nvSpPr>
+          <p:cNvPr id="6" name="Rounded Rectangle 5"/>
+          <p:cNvSpPr/>
+          <p:nvPr/>
+        </p:nvSpPr>
+        <p:spPr>
+          <a:xfrm>
+            <a:off x="731520" y="1645920"/>
+            <a:ext cx="5120640" cy="2194560"/>
+          </a:xfrm>
+          <a:prstGeom prst="roundRect">
+            <a:avLst/>
+          </a:prstGeom>
+          <a:solidFill>
+            <a:srgbClr val="131B2E"/>
+          </a:solidFill>
+          <a:ln w="12700">
+            <a:solidFill>
+              <a:srgbClr val="263454"/>
+            </a:solidFill>
+          </a:ln>
+        </p:spPr>
+        <p:style>
+          <a:lnRef idx="1">
+            <a:schemeClr val="accent1"/>
+          </a:lnRef>
+          <a:fillRef idx="3">
+            <a:schemeClr val="accent1"/>
+          </a:fillRef>
+          <a:effectRef idx="2">
+            <a:schemeClr val="accent1"/>
+          </a:effectRef>
+          <a:fontRef idx="minor">
+            <a:schemeClr val="lt1"/>
+          </a:fontRef>
+        </p:style>
+        <p:txBody>
+          <a:bodyPr rtlCol="0" anchor="ctr"/>
+          <a:lstStyle/>
+          <a:p>
+            <a:pPr algn="ctr"/>
+          </a:p>
+        </p:txBody>
+      </p:sp>
+      <p:sp>
+        <p:nvSpPr>
+          <p:cNvPr id="7" name="TextBox 6"/>
+          <p:cNvSpPr txBox="1"/>
+          <p:nvPr/>
+        </p:nvSpPr>
+        <p:spPr>
+          <a:xfrm>
+            <a:off x="914400" y="1783080"/>
+            <a:ext cx="4754880" cy="1920240"/>
+          </a:xfrm>
+          <a:prstGeom prst="rect">
+            <a:avLst/>
+          </a:prstGeom>
+          <a:noFill/>
+        </p:spPr>
+        <p:txBody>
+          <a:bodyPr wrap="square">
+            <a:spAutoFit/>
+          </a:bodyPr>
+          <a:lstStyle/>
+          <a:p>
+            <a:pPr>
+              <a:defRPr sz="1300" b="1">
+                <a:solidFill>
+                  <a:srgbClr val="06B6D4"/>
+                </a:solidFill>
+              </a:defRPr>
+            </a:pPr>
+            <a:r>
+              <a:t>✔ Faster-Whisper Pipeline</a:t>
+            </a:r>
+          </a:p>
+          <a:p>
+            <a:pPr>
+              <a:defRPr sz="1100">
+                <a:solidFill>
+                  <a:srgbClr val="CBD5E1"/>
+                </a:solidFill>
+              </a:defRPr>
+            </a:pPr>
+            <a:r>
+              <a:t>• Model: Faster-Whisper (CTranslate2 backend).</a:t>
+            </a:r>
+            <a:br/>
+            <a:r>
+              <a:t>• Cloud Optimization: CPU tiny/base fallback with greedy decoding (beam_size=1, best_of=1).</a:t>
+            </a:r>
+            <a:br/>
+            <a:r>
+              <a:t>• Performance: Sub-20s execution on 512MB RAM without OOM crashes.</a:t>
+            </a:r>
+            <a:br/>
+            <a:r>
+              <a:t>• Generates word-level timestamps.</a:t>
+            </a:r>
+          </a:p>
+        </p:txBody>
+      </p:sp>
+      <p:sp>
+        <p:nvSpPr>
+          <p:cNvPr id="8" name="Rounded Rectangle 7"/>
+          <p:cNvSpPr/>
+          <p:nvPr/>
+        </p:nvSpPr>
+        <p:spPr>
+          <a:xfrm>
+            <a:off x="6126480" y="1645920"/>
+            <a:ext cx="5120640" cy="2194560"/>
+          </a:xfrm>
+          <a:prstGeom prst="roundRect">
+            <a:avLst/>
+          </a:prstGeom>
+          <a:solidFill>
+            <a:srgbClr val="131B2E"/>
+          </a:solidFill>
+          <a:ln w="12700">
+            <a:solidFill>
+              <a:srgbClr val="263454"/>
+            </a:solidFill>
+          </a:ln>
+        </p:spPr>
+        <p:style>
+          <a:lnRef idx="1">
+            <a:schemeClr val="accent1"/>
+          </a:lnRef>
+          <a:fillRef idx="3">
+            <a:schemeClr val="accent1"/>
+          </a:fillRef>
+          <a:effectRef idx="2">
+            <a:schemeClr val="accent1"/>
+          </a:effectRef>
+          <a:fontRef idx="minor">
+            <a:schemeClr val="lt1"/>
+          </a:fontRef>
+        </p:style>
+        <p:txBody>
+          <a:bodyPr rtlCol="0" anchor="ctr"/>
+          <a:lstStyle/>
+          <a:p>
+            <a:pPr algn="ctr"/>
+          </a:p>
+        </p:txBody>
+      </p:sp>
+      <p:sp>
+        <p:nvSpPr>
+          <p:cNvPr id="9" name="TextBox 8"/>
+          <p:cNvSpPr txBox="1"/>
+          <p:nvPr/>
+        </p:nvSpPr>
+        <p:spPr>
+          <a:xfrm>
+            <a:off x="6309360" y="1783080"/>
+            <a:ext cx="4754880" cy="1920240"/>
+          </a:xfrm>
+          <a:prstGeom prst="rect">
+            <a:avLst/>
+          </a:prstGeom>
+          <a:noFill/>
+        </p:spPr>
+        <p:txBody>
+          <a:bodyPr wrap="square">
+            <a:spAutoFit/>
+          </a:bodyPr>
+          <a:lstStyle/>
+          <a:p>
+            <a:pPr>
+              <a:defRPr sz="1300" b="1">
+                <a:solidFill>
+                  <a:srgbClr val="38BDF8"/>
+                </a:solidFill>
+              </a:defRPr>
+            </a:pPr>
+            <a:r>
+              <a:t>✔ Transcript Storage &amp; Management</a:t>
+            </a:r>
+          </a:p>
+          <a:p>
+            <a:pPr>
+              <a:defRPr sz="1100">
+                <a:solidFill>
+                  <a:srgbClr val="CBD5E1"/>
+                </a:solidFill>
+              </a:defRPr>
+            </a:pPr>
+            <a:r>
+              <a:t>• Transcripts indexed by Video ID in MongoDB Atlas.</a:t>
+            </a:r>
+            <a:br/>
+            <a:r>
+              <a:t>• Segmented by start/end timestamps and confidence scores.</a:t>
+            </a:r>
+            <a:br/>
+            <a:r>
+              <a:t>• Full-text search and transcript editing endpoints.</a:t>
+            </a:r>
+            <a:br/>
+            <a:r>
+              <a:t>• Synchronized subtitle timing alignment.</a:t>
+            </a:r>
+          </a:p>
+        </p:txBody>
+      </p:sp>
+      <p:sp>
+        <p:nvSpPr>
+          <p:cNvPr id="10" name="Rounded Rectangle 9"/>
+          <p:cNvSpPr/>
+          <p:nvPr/>
+        </p:nvSpPr>
+        <p:spPr>
+          <a:xfrm>
+            <a:off x="731520" y="4023360"/>
+            <a:ext cx="5120640" cy="2194560"/>
+          </a:xfrm>
+          <a:prstGeom prst="roundRect">
+            <a:avLst/>
+          </a:prstGeom>
+          <a:solidFill>
+            <a:srgbClr val="131B2E"/>
+          </a:solidFill>
+          <a:ln w="12700">
+            <a:solidFill>
+              <a:srgbClr val="263454"/>
+            </a:solidFill>
+          </a:ln>
+        </p:spPr>
+        <p:style>
+          <a:lnRef idx="1">
+            <a:schemeClr val="accent1"/>
+          </a:lnRef>
+          <a:fillRef idx="3">
+            <a:schemeClr val="accent1"/>
+          </a:fillRef>
+          <a:effectRef idx="2">
+            <a:schemeClr val="accent1"/>
+          </a:effectRef>
+          <a:fontRef idx="minor">
+            <a:schemeClr val="lt1"/>
+          </a:fontRef>
+        </p:style>
+        <p:txBody>
+          <a:bodyPr rtlCol="0" anchor="ctr"/>
+          <a:lstStyle/>
+          <a:p>
+            <a:pPr algn="ctr"/>
+          </a:p>
+        </p:txBody>
+      </p:sp>
+      <p:sp>
+        <p:nvSpPr>
+          <p:cNvPr id="11" name="TextBox 10"/>
+          <p:cNvSpPr txBox="1"/>
+          <p:nvPr/>
+        </p:nvSpPr>
+        <p:spPr>
+          <a:xfrm>
+            <a:off x="914400" y="4160520"/>
+            <a:ext cx="4754880" cy="1920240"/>
+          </a:xfrm>
+          <a:prstGeom prst="rect">
+            <a:avLst/>
+          </a:prstGeom>
+          <a:noFill/>
+        </p:spPr>
+        <p:txBody>
+          <a:bodyPr wrap="square">
+            <a:spAutoFit/>
+          </a:bodyPr>
+          <a:lstStyle/>
+          <a:p>
+            <a:pPr>
+              <a:defRPr sz="1300" b="1">
+                <a:solidFill>
+                  <a:srgbClr val="818CF8"/>
+                </a:solidFill>
+              </a:defRPr>
+            </a:pPr>
+            <a:r>
+              <a:t>✔ Google Gemini 2.5 Flash Summarizer</a:t>
+            </a:r>
+          </a:p>
+          <a:p>
+            <a:pPr>
+              <a:defRPr sz="1100">
+                <a:solidFill>
+                  <a:srgbClr val="CBD5E1"/>
+                </a:solidFill>
+              </a:defRPr>
+            </a:pPr>
+            <a:r>
+              <a:t>• Zero-shot NLP summarization prompt engineering.</a:t>
+            </a:r>
+            <a:br/>
+            <a:r>
+              <a:t>• Multi-tier summaries: 2-sentence Executive TL;DR, 5-8 Action Items, Key Takeaways, Category Tags.</a:t>
+            </a:r>
+            <a:br/>
+            <a:r>
+              <a:t>• Low-latency API response (~1.8s) via Gemini 2.5 Flash API.</a:t>
+            </a:r>
+          </a:p>
+        </p:txBody>
+      </p:sp>
+      <p:sp>
+        <p:nvSpPr>
+          <p:cNvPr id="12" name="Rounded Rectangle 11"/>
+          <p:cNvSpPr/>
+          <p:nvPr/>
+        </p:nvSpPr>
+        <p:spPr>
+          <a:xfrm>
+            <a:off x="6126480" y="4023360"/>
+            <a:ext cx="5120640" cy="2194560"/>
+          </a:xfrm>
+          <a:prstGeom prst="roundRect">
+            <a:avLst/>
+          </a:prstGeom>
+          <a:solidFill>
+            <a:srgbClr val="131B2E"/>
+          </a:solidFill>
+          <a:ln w="12700">
+            <a:solidFill>
+              <a:srgbClr val="263454"/>
+            </a:solidFill>
+          </a:ln>
+        </p:spPr>
+        <p:style>
+          <a:lnRef idx="1">
+            <a:schemeClr val="accent1"/>
+          </a:lnRef>
+          <a:fillRef idx="3">
+            <a:schemeClr val="accent1"/>
+          </a:fillRef>
+          <a:effectRef idx="2">
+            <a:schemeClr val="accent1"/>
+          </a:effectRef>
+          <a:fontRef idx="minor">
+            <a:schemeClr val="lt1"/>
+          </a:fontRef>
+        </p:style>
+        <p:txBody>
+          <a:bodyPr rtlCol="0" anchor="ctr"/>
+          <a:lstStyle/>
+          <a:p>
+            <a:pPr algn="ctr"/>
+          </a:p>
+        </p:txBody>
+      </p:sp>
+      <p:sp>
+        <p:nvSpPr>
+          <p:cNvPr id="13" name="TextBox 12"/>
+          <p:cNvSpPr txBox="1"/>
+          <p:nvPr/>
+        </p:nvSpPr>
+        <p:spPr>
+          <a:xfrm>
+            <a:off x="6309360" y="4160520"/>
+            <a:ext cx="4754880" cy="1920240"/>
+          </a:xfrm>
+          <a:prstGeom prst="rect">
+            <a:avLst/>
+          </a:prstGeom>
+          <a:noFill/>
+        </p:spPr>
+        <p:txBody>
+          <a:bodyPr wrap="square">
+            <a:spAutoFit/>
+          </a:bodyPr>
+          <a:lstStyle/>
+          <a:p>
+            <a:pPr>
+              <a:defRPr sz="1300" b="1">
+                <a:solidFill>
+                  <a:srgbClr val="10B981"/>
+                </a:solidFill>
+              </a:defRPr>
+            </a:pPr>
+            <a:r>
+              <a:t>✔ Quality &amp; Accuracy Evaluation</a:t>
+            </a:r>
+          </a:p>
+          <a:p>
+            <a:pPr>
+              <a:defRPr sz="1100">
+                <a:solidFill>
+                  <a:srgbClr val="CBD5E1"/>
+                </a:solidFill>
+              </a:defRPr>
+            </a:pPr>
+            <a:r>
+              <a:t>• Evaluated against BLEU/ROUGE criteria and factual consistency.</a:t>
+            </a:r>
+            <a:br/>
+            <a:r>
+              <a:t>• Fallback rule-based TF-IDF summarizer if LLM quota expires.</a:t>
+            </a:r>
+            <a:br/>
+            <a:r>
+              <a:t>• Word Error Rate (WER) &lt; 8% across standard English audio.</a:t>
             </a:r>
           </a:p>
         </p:txBody>
@@ -4659,14 +9215,6 @@
 <file path=ppt/slides/slide8.xml><?xml version="1.0" encoding="utf-8"?>
 <p:sld xmlns:a="http://schemas.openxmlformats.org/drawingml/2006/main" xmlns:p="http://schemas.openxmlformats.org/presentationml/2006/main" xmlns:r="http://schemas.openxmlformats.org/officeDocument/2006/relationships">
   <p:cSld>
-    <p:bg>
-      <p:bgPr>
-        <a:solidFill>
-          <a:srgbClr val="0A0F1E"/>
-        </a:solidFill>
-        <a:effectLst/>
-      </p:bgPr>
-    </p:bg>
     <p:spTree>
       <p:nvGrpSpPr>
         <p:cNvPr id="1" name=""/>
@@ -4676,14 +9224,57 @@
       <p:grpSpPr/>
       <p:sp>
         <p:nvSpPr>
-          <p:cNvPr id="2" name="TextBox 1"/>
+          <p:cNvPr id="2" name="Rectangle 1"/>
+          <p:cNvSpPr/>
+          <p:nvPr/>
+        </p:nvSpPr>
+        <p:spPr>
+          <a:xfrm>
+            <a:off x="0" y="0"/>
+            <a:ext cx="12191695" cy="6858000"/>
+          </a:xfrm>
+          <a:prstGeom prst="rect">
+            <a:avLst/>
+          </a:prstGeom>
+          <a:solidFill>
+            <a:srgbClr val="0A0F1D"/>
+          </a:solidFill>
+          <a:ln>
+            <a:noFill/>
+          </a:ln>
+        </p:spPr>
+        <p:style>
+          <a:lnRef idx="1">
+            <a:schemeClr val="accent1"/>
+          </a:lnRef>
+          <a:fillRef idx="3">
+            <a:schemeClr val="accent1"/>
+          </a:fillRef>
+          <a:effectRef idx="2">
+            <a:schemeClr val="accent1"/>
+          </a:effectRef>
+          <a:fontRef idx="minor">
+            <a:schemeClr val="lt1"/>
+          </a:fontRef>
+        </p:style>
+        <p:txBody>
+          <a:bodyPr rtlCol="0" anchor="ctr"/>
+          <a:lstStyle/>
+          <a:p>
+            <a:pPr algn="ctr"/>
+          </a:p>
+        </p:txBody>
+      </p:sp>
+      <p:sp>
+        <p:nvSpPr>
+          <p:cNvPr id="3" name="TextBox 2"/>
           <p:cNvSpPr txBox="1"/>
           <p:nvPr/>
         </p:nvSpPr>
         <p:spPr>
           <a:xfrm>
             <a:off x="731520" y="365760"/>
-            <a:ext cx="10698480" cy="731520"/>
+            <a:ext cx="9144000" cy="365760"/>
           </a:xfrm>
           <a:prstGeom prst="rect">
             <a:avLst/>
@@ -4697,29 +9288,28 @@
           <a:lstStyle/>
           <a:p>
             <a:pPr>
-              <a:defRPr sz="3200" b="1">
-                <a:solidFill>
-                  <a:srgbClr val="818CF8"/>
-                </a:solidFill>
-                <a:latin typeface="Arial"/>
-              </a:defRPr>
-            </a:pPr>
-            <a:r>
-              <a:t>Secure Multi-Database Deletion API</a:t>
-            </a:r>
-          </a:p>
-        </p:txBody>
-      </p:sp>
-      <p:sp>
-        <p:nvSpPr>
-          <p:cNvPr id="3" name="TextBox 2"/>
+              <a:defRPr sz="1000" b="1">
+                <a:solidFill>
+                  <a:srgbClr val="06B6D4"/>
+                </a:solidFill>
+              </a:defRPr>
+            </a:pPr>
+            <a:r>
+              <a:t>MILESTONE 3 REVIEW (WEEKS 5 &amp; 6)</a:t>
+            </a:r>
+          </a:p>
+        </p:txBody>
+      </p:sp>
+      <p:sp>
+        <p:nvSpPr>
+          <p:cNvPr id="4" name="TextBox 3"/>
           <p:cNvSpPr txBox="1"/>
           <p:nvPr/>
         </p:nvSpPr>
         <p:spPr>
           <a:xfrm>
-            <a:off x="731520" y="1371600"/>
-            <a:ext cx="5303520" cy="4846320"/>
+            <a:off x="731520" y="640080"/>
+            <a:ext cx="10515600" cy="640080"/>
           </a:xfrm>
           <a:prstGeom prst="rect">
             <a:avLst/>
@@ -4733,218 +9323,449 @@
           <a:lstStyle/>
           <a:p>
             <a:pPr>
-              <a:spcAft>
-                <a:spcPts val="1000"/>
-              </a:spcAft>
-              <a:defRPr sz="1800" b="1">
-                <a:solidFill>
-                  <a:srgbClr val="818CF8"/>
-                </a:solidFill>
-                <a:latin typeface="Arial"/>
-              </a:defRPr>
-            </a:pPr>
-            <a:r>
-              <a:t>🔒 Security &amp; Cleanup Steps</a:t>
-            </a:r>
-          </a:p>
-          <a:p>
-            <a:pPr>
-              <a:spcBef>
-                <a:spcPts val="800"/>
-              </a:spcBef>
-              <a:defRPr sz="1400" b="1">
-                <a:solidFill>
-                  <a:srgbClr val="FFFFFF"/>
-                </a:solidFill>
-                <a:latin typeface="Arial"/>
-              </a:defRPr>
-            </a:pPr>
-            <a:r>
-              <a:t>1. Role Check Checkpoint</a:t>
-            </a:r>
-          </a:p>
-          <a:p>
-            <a:pPr>
-              <a:defRPr sz="1200">
-                <a:solidFill>
-                  <a:srgbClr val="94A3B8"/>
-                </a:solidFill>
-                <a:latin typeface="Arial"/>
-              </a:defRPr>
-            </a:pPr>
-            <a:r>
-              <a:t>Restricts deletion to the video owner or platform Administrators. Returns HTTP 403 if checks fail.</a:t>
-            </a:r>
-          </a:p>
-          <a:p>
-            <a:pPr>
-              <a:spcBef>
-                <a:spcPts val="800"/>
-              </a:spcBef>
-              <a:defRPr sz="1400" b="1">
-                <a:solidFill>
-                  <a:srgbClr val="FFFFFF"/>
-                </a:solidFill>
-                <a:latin typeface="Arial"/>
-              </a:defRPr>
-            </a:pPr>
-            <a:r>
-              <a:t>2. Relational Record Erase</a:t>
-            </a:r>
-          </a:p>
-          <a:p>
-            <a:pPr>
-              <a:defRPr sz="1200">
-                <a:solidFill>
-                  <a:srgbClr val="94A3B8"/>
-                </a:solidFill>
-                <a:latin typeface="Arial"/>
-              </a:defRPr>
-            </a:pPr>
-            <a:r>
-              <a:t>Deletes target SQL video row from PostgreSQL using SQLAlchemy session deletes.</a:t>
-            </a:r>
-          </a:p>
-          <a:p>
-            <a:pPr>
-              <a:spcBef>
-                <a:spcPts val="800"/>
-              </a:spcBef>
-              <a:defRPr sz="1400" b="1">
-                <a:solidFill>
-                  <a:srgbClr val="FFFFFF"/>
-                </a:solidFill>
-                <a:latin typeface="Arial"/>
-              </a:defRPr>
-            </a:pPr>
-            <a:r>
-              <a:t>3. MongoDB Document Erase</a:t>
-            </a:r>
-          </a:p>
-          <a:p>
-            <a:pPr>
-              <a:defRPr sz="1200">
-                <a:solidFill>
-                  <a:srgbClr val="94A3B8"/>
-                </a:solidFill>
-                <a:latin typeface="Arial"/>
-              </a:defRPr>
-            </a:pPr>
-            <a:r>
-              <a:t>Deletes NoSQL transcription documents containing summaries, keywords, and word count.</a:t>
-            </a:r>
-          </a:p>
-          <a:p>
-            <a:pPr>
-              <a:spcBef>
-                <a:spcPts val="800"/>
-              </a:spcBef>
-              <a:defRPr sz="1400" b="1">
-                <a:solidFill>
-                  <a:srgbClr val="FFFFFF"/>
-                </a:solidFill>
-                <a:latin typeface="Arial"/>
-              </a:defRPr>
-            </a:pPr>
-            <a:r>
-              <a:t>4. Disk Asset Cleanup</a:t>
-            </a:r>
-          </a:p>
-          <a:p>
-            <a:pPr>
-              <a:defRPr sz="1200">
-                <a:solidFill>
-                  <a:srgbClr val="94A3B8"/>
-                </a:solidFill>
-                <a:latin typeface="Arial"/>
-              </a:defRPr>
-            </a:pPr>
-            <a:r>
-              <a:t>Locates and deletes local physical assets: video (.mp4), audio (.mp3), and visual JPEG moment thumbnails.</a:t>
-            </a:r>
-          </a:p>
-        </p:txBody>
-      </p:sp>
-      <p:sp>
-        <p:nvSpPr>
-          <p:cNvPr id="4" name="TextBox 3"/>
+              <a:defRPr sz="2400" b="1">
+                <a:solidFill>
+                  <a:srgbClr val="F8FAFC"/>
+                </a:solidFill>
+              </a:defRPr>
+            </a:pPr>
+            <a:r>
+              <a:t>Key Moments Detection &amp; Highlight Reel Cutter</a:t>
+            </a:r>
+          </a:p>
+        </p:txBody>
+      </p:sp>
+      <p:sp>
+        <p:nvSpPr>
+          <p:cNvPr id="5" name="TextBox 4"/>
           <p:cNvSpPr txBox="1"/>
           <p:nvPr/>
         </p:nvSpPr>
         <p:spPr>
           <a:xfrm>
-            <a:off x="6217920" y="1645920"/>
-            <a:ext cx="5212080" cy="4114800"/>
+            <a:off x="731520" y="1234440"/>
+            <a:ext cx="10515600" cy="365760"/>
           </a:xfrm>
           <a:prstGeom prst="rect">
             <a:avLst/>
           </a:prstGeom>
-          <a:solidFill>
-            <a:srgbClr val="1E293B"/>
-          </a:solidFill>
-        </p:spPr>
-        <p:txBody>
-          <a:bodyPr wrap="square" lIns="182880" tIns="182880">
+          <a:noFill/>
+        </p:spPr>
+        <p:txBody>
+          <a:bodyPr wrap="none">
             <a:spAutoFit/>
           </a:bodyPr>
           <a:lstStyle/>
           <a:p>
             <a:pPr>
-              <a:defRPr sz="1250">
-                <a:solidFill>
-                  <a:srgbClr val="FFFFFF"/>
-                </a:solidFill>
-                <a:latin typeface="Consolas"/>
-              </a:defRPr>
-            </a:pPr>
-            <a:r>
-              <a:t># File: backend/api/videos.py</a:t>
+              <a:defRPr sz="1300">
+                <a:solidFill>
+                  <a:srgbClr val="94A3B8"/>
+                </a:solidFill>
+              </a:defRPr>
+            </a:pPr>
+            <a:r>
+              <a:t>Algorithmic timestamp extraction, automated video montage cutting, and interactive studio</a:t>
+            </a:r>
+          </a:p>
+        </p:txBody>
+      </p:sp>
+      <p:sp>
+        <p:nvSpPr>
+          <p:cNvPr id="6" name="Rounded Rectangle 5"/>
+          <p:cNvSpPr/>
+          <p:nvPr/>
+        </p:nvSpPr>
+        <p:spPr>
+          <a:xfrm>
+            <a:off x="731520" y="1645920"/>
+            <a:ext cx="5120640" cy="2194560"/>
+          </a:xfrm>
+          <a:prstGeom prst="roundRect">
+            <a:avLst/>
+          </a:prstGeom>
+          <a:solidFill>
+            <a:srgbClr val="131B2E"/>
+          </a:solidFill>
+          <a:ln w="12700">
+            <a:solidFill>
+              <a:srgbClr val="263454"/>
+            </a:solidFill>
+          </a:ln>
+        </p:spPr>
+        <p:style>
+          <a:lnRef idx="1">
+            <a:schemeClr val="accent1"/>
+          </a:lnRef>
+          <a:fillRef idx="3">
+            <a:schemeClr val="accent1"/>
+          </a:fillRef>
+          <a:effectRef idx="2">
+            <a:schemeClr val="accent1"/>
+          </a:effectRef>
+          <a:fontRef idx="minor">
+            <a:schemeClr val="lt1"/>
+          </a:fontRef>
+        </p:style>
+        <p:txBody>
+          <a:bodyPr rtlCol="0" anchor="ctr"/>
+          <a:lstStyle/>
+          <a:p>
+            <a:pPr algn="ctr"/>
+          </a:p>
+        </p:txBody>
+      </p:sp>
+      <p:sp>
+        <p:nvSpPr>
+          <p:cNvPr id="7" name="TextBox 6"/>
+          <p:cNvSpPr txBox="1"/>
+          <p:nvPr/>
+        </p:nvSpPr>
+        <p:spPr>
+          <a:xfrm>
+            <a:off x="914400" y="1783080"/>
+            <a:ext cx="4754880" cy="1920240"/>
+          </a:xfrm>
+          <a:prstGeom prst="rect">
+            <a:avLst/>
+          </a:prstGeom>
+          <a:noFill/>
+        </p:spPr>
+        <p:txBody>
+          <a:bodyPr wrap="square">
+            <a:spAutoFit/>
+          </a:bodyPr>
+          <a:lstStyle/>
+          <a:p>
+            <a:pPr>
+              <a:defRPr sz="1300" b="1">
+                <a:solidFill>
+                  <a:srgbClr val="06B6D4"/>
+                </a:solidFill>
+              </a:defRPr>
+            </a:pPr>
+            <a:r>
+              <a:t>✔ Key Moments Extraction</a:t>
+            </a:r>
+          </a:p>
+          <a:p>
+            <a:pPr>
+              <a:defRPr sz="1100">
+                <a:solidFill>
+                  <a:srgbClr val="CBD5E1"/>
+                </a:solidFill>
+              </a:defRPr>
+            </a:pPr>
+            <a:r>
+              <a:t>• Semantic boundary detection combining Gemini prompt reasoning and lexical density analysis.</a:t>
             </a:r>
             <a:br/>
             <a:r>
-              <a:t>video = db.query(Video).filter(Video.id == id).first()</a:t>
+              <a:t>• Extracts punchy 15-45s segments: 'Introduction', 'Key Concept', 'Demo Climax', 'Conclusion'.</a:t>
             </a:r>
             <a:br/>
             <a:r>
-              <a:t>if video.owner_id != current_user.id and current_user.role != "Admin":</a:t>
+              <a:t>• Output contains exact start_time, end_time, title, description.</a:t>
+            </a:r>
+          </a:p>
+        </p:txBody>
+      </p:sp>
+      <p:sp>
+        <p:nvSpPr>
+          <p:cNvPr id="8" name="Rounded Rectangle 7"/>
+          <p:cNvSpPr/>
+          <p:nvPr/>
+        </p:nvSpPr>
+        <p:spPr>
+          <a:xfrm>
+            <a:off x="6126480" y="1645920"/>
+            <a:ext cx="5120640" cy="2194560"/>
+          </a:xfrm>
+          <a:prstGeom prst="roundRect">
+            <a:avLst/>
+          </a:prstGeom>
+          <a:solidFill>
+            <a:srgbClr val="131B2E"/>
+          </a:solidFill>
+          <a:ln w="12700">
+            <a:solidFill>
+              <a:srgbClr val="263454"/>
+            </a:solidFill>
+          </a:ln>
+        </p:spPr>
+        <p:style>
+          <a:lnRef idx="1">
+            <a:schemeClr val="accent1"/>
+          </a:lnRef>
+          <a:fillRef idx="3">
+            <a:schemeClr val="accent1"/>
+          </a:fillRef>
+          <a:effectRef idx="2">
+            <a:schemeClr val="accent1"/>
+          </a:effectRef>
+          <a:fontRef idx="minor">
+            <a:schemeClr val="lt1"/>
+          </a:fontRef>
+        </p:style>
+        <p:txBody>
+          <a:bodyPr rtlCol="0" anchor="ctr"/>
+          <a:lstStyle/>
+          <a:p>
+            <a:pPr algn="ctr"/>
+          </a:p>
+        </p:txBody>
+      </p:sp>
+      <p:sp>
+        <p:nvSpPr>
+          <p:cNvPr id="9" name="TextBox 8"/>
+          <p:cNvSpPr txBox="1"/>
+          <p:nvPr/>
+        </p:nvSpPr>
+        <p:spPr>
+          <a:xfrm>
+            <a:off x="6309360" y="1783080"/>
+            <a:ext cx="4754880" cy="1920240"/>
+          </a:xfrm>
+          <a:prstGeom prst="rect">
+            <a:avLst/>
+          </a:prstGeom>
+          <a:noFill/>
+        </p:spPr>
+        <p:txBody>
+          <a:bodyPr wrap="square">
+            <a:spAutoFit/>
+          </a:bodyPr>
+          <a:lstStyle/>
+          <a:p>
+            <a:pPr>
+              <a:defRPr sz="1300" b="1">
+                <a:solidFill>
+                  <a:srgbClr val="38BDF8"/>
+                </a:solidFill>
+              </a:defRPr>
+            </a:pPr>
+            <a:r>
+              <a:t>✔ FFmpeg Video Clipper Engine</a:t>
+            </a:r>
+          </a:p>
+          <a:p>
+            <a:pPr>
+              <a:defRPr sz="1100">
+                <a:solidFill>
+                  <a:srgbClr val="CBD5E1"/>
+                </a:solidFill>
+              </a:defRPr>
+            </a:pPr>
+            <a:r>
+              <a:t>• Automated snippet extraction using fast stream seeking: -ss and -to.</a:t>
             </a:r>
             <a:br/>
             <a:r>
-              <a:t>    raise HTTPException(status_code=403)</a:t>
+              <a:t>• Lossless stream copy where keyframes align, with fallback to libx264 re-encoding.</a:t>
             </a:r>
             <a:br/>
+            <a:r>
+              <a:t>• Subprocess security: Strict path sanitization and temporary file cleanup.</a:t>
+            </a:r>
+          </a:p>
+        </p:txBody>
+      </p:sp>
+      <p:sp>
+        <p:nvSpPr>
+          <p:cNvPr id="10" name="Rounded Rectangle 9"/>
+          <p:cNvSpPr/>
+          <p:nvPr/>
+        </p:nvSpPr>
+        <p:spPr>
+          <a:xfrm>
+            <a:off x="731520" y="4023360"/>
+            <a:ext cx="5120640" cy="2194560"/>
+          </a:xfrm>
+          <a:prstGeom prst="roundRect">
+            <a:avLst/>
+          </a:prstGeom>
+          <a:solidFill>
+            <a:srgbClr val="131B2E"/>
+          </a:solidFill>
+          <a:ln w="12700">
+            <a:solidFill>
+              <a:srgbClr val="263454"/>
+            </a:solidFill>
+          </a:ln>
+        </p:spPr>
+        <p:style>
+          <a:lnRef idx="1">
+            <a:schemeClr val="accent1"/>
+          </a:lnRef>
+          <a:fillRef idx="3">
+            <a:schemeClr val="accent1"/>
+          </a:fillRef>
+          <a:effectRef idx="2">
+            <a:schemeClr val="accent1"/>
+          </a:effectRef>
+          <a:fontRef idx="minor">
+            <a:schemeClr val="lt1"/>
+          </a:fontRef>
+        </p:style>
+        <p:txBody>
+          <a:bodyPr rtlCol="0" anchor="ctr"/>
+          <a:lstStyle/>
+          <a:p>
+            <a:pPr algn="ctr"/>
+          </a:p>
+        </p:txBody>
+      </p:sp>
+      <p:sp>
+        <p:nvSpPr>
+          <p:cNvPr id="11" name="TextBox 10"/>
+          <p:cNvSpPr txBox="1"/>
+          <p:nvPr/>
+        </p:nvSpPr>
+        <p:spPr>
+          <a:xfrm>
+            <a:off x="914400" y="4160520"/>
+            <a:ext cx="4754880" cy="1920240"/>
+          </a:xfrm>
+          <a:prstGeom prst="rect">
+            <a:avLst/>
+          </a:prstGeom>
+          <a:noFill/>
+        </p:spPr>
+        <p:txBody>
+          <a:bodyPr wrap="square">
+            <a:spAutoFit/>
+          </a:bodyPr>
+          <a:lstStyle/>
+          <a:p>
+            <a:pPr>
+              <a:defRPr sz="1300" b="1">
+                <a:solidFill>
+                  <a:srgbClr val="818CF8"/>
+                </a:solidFill>
+              </a:defRPr>
+            </a:pPr>
+            <a:r>
+              <a:t>✔ Highlight Reel Concatenation</a:t>
+            </a:r>
+          </a:p>
+          <a:p>
+            <a:pPr>
+              <a:defRPr sz="1100">
+                <a:solidFill>
+                  <a:srgbClr val="CBD5E1"/>
+                </a:solidFill>
+              </a:defRPr>
+            </a:pPr>
+            <a:r>
+              <a:t>• Automatically stitches multiple extracted segments into a unified highlight_reel.mp4.</a:t>
+            </a:r>
             <a:br/>
             <a:r>
-              <a:t># Clean disk</a:t>
+              <a:t>• Uses FFmpeg concat filter with audio crossfading.</a:t>
             </a:r>
             <a:br/>
             <a:r>
-              <a:t>os.remove(video_path)</a:t>
+              <a:t>• Downloadable MP4 reel for quick social media and review consumption.</a:t>
+            </a:r>
+          </a:p>
+        </p:txBody>
+      </p:sp>
+      <p:sp>
+        <p:nvSpPr>
+          <p:cNvPr id="12" name="Rounded Rectangle 11"/>
+          <p:cNvSpPr/>
+          <p:nvPr/>
+        </p:nvSpPr>
+        <p:spPr>
+          <a:xfrm>
+            <a:off x="6126480" y="4023360"/>
+            <a:ext cx="5120640" cy="2194560"/>
+          </a:xfrm>
+          <a:prstGeom prst="roundRect">
+            <a:avLst/>
+          </a:prstGeom>
+          <a:solidFill>
+            <a:srgbClr val="131B2E"/>
+          </a:solidFill>
+          <a:ln w="12700">
+            <a:solidFill>
+              <a:srgbClr val="263454"/>
+            </a:solidFill>
+          </a:ln>
+        </p:spPr>
+        <p:style>
+          <a:lnRef idx="1">
+            <a:schemeClr val="accent1"/>
+          </a:lnRef>
+          <a:fillRef idx="3">
+            <a:schemeClr val="accent1"/>
+          </a:fillRef>
+          <a:effectRef idx="2">
+            <a:schemeClr val="accent1"/>
+          </a:effectRef>
+          <a:fontRef idx="minor">
+            <a:schemeClr val="lt1"/>
+          </a:fontRef>
+        </p:style>
+        <p:txBody>
+          <a:bodyPr rtlCol="0" anchor="ctr"/>
+          <a:lstStyle/>
+          <a:p>
+            <a:pPr algn="ctr"/>
+          </a:p>
+        </p:txBody>
+      </p:sp>
+      <p:sp>
+        <p:nvSpPr>
+          <p:cNvPr id="13" name="TextBox 12"/>
+          <p:cNvSpPr txBox="1"/>
+          <p:nvPr/>
+        </p:nvSpPr>
+        <p:spPr>
+          <a:xfrm>
+            <a:off x="6309360" y="4160520"/>
+            <a:ext cx="4754880" cy="1920240"/>
+          </a:xfrm>
+          <a:prstGeom prst="rect">
+            <a:avLst/>
+          </a:prstGeom>
+          <a:noFill/>
+        </p:spPr>
+        <p:txBody>
+          <a:bodyPr wrap="square">
+            <a:spAutoFit/>
+          </a:bodyPr>
+          <a:lstStyle/>
+          <a:p>
+            <a:pPr>
+              <a:defRPr sz="1300" b="1">
+                <a:solidFill>
+                  <a:srgbClr val="10B981"/>
+                </a:solidFill>
+              </a:defRPr>
+            </a:pPr>
+            <a:r>
+              <a:t>✔ Interactive 3-Column Studio UI</a:t>
+            </a:r>
+          </a:p>
+          <a:p>
+            <a:pPr>
+              <a:defRPr sz="1100">
+                <a:solidFill>
+                  <a:srgbClr val="CBD5E1"/>
+                </a:solidFill>
+              </a:defRPr>
+            </a:pPr>
+            <a:r>
+              <a:t>• Left Panel: Video library and upload queue.</a:t>
             </a:r>
             <a:br/>
             <a:r>
-              <a:t>os.remove(audio_path)</a:t>
+              <a:t>• Center Panel: HTML5 video player + real-time synced transcript seeker.</a:t>
             </a:r>
             <a:br/>
             <a:r>
-              <a:t>for t_file in glob(f"uploads/thumbnails/{id}_*.jpg"): </a:t>
-            </a:r>
-            <a:br/>
-            <a:r>
-              <a:t>    os.remove(t_file)</a:t>
-            </a:r>
-            <a:br/>
-            <a:br/>
-            <a:r>
-              <a:t># Clean DBs</a:t>
-            </a:r>
-            <a:br/>
-            <a:r>
-              <a:t>mongo_db.delete_one({"video_id": id})</a:t>
-            </a:r>
-            <a:br/>
-            <a:r>
-              <a:t>db.delete(video); db.commit()</a:t>
+              <a:t>• Right Panel: Tabbed Summary, Highlights list, and Export options.</a:t>
             </a:r>
           </a:p>
         </p:txBody>
@@ -4960,14 +9781,6 @@
 <file path=ppt/slides/slide9.xml><?xml version="1.0" encoding="utf-8"?>
 <p:sld xmlns:a="http://schemas.openxmlformats.org/drawingml/2006/main" xmlns:p="http://schemas.openxmlformats.org/presentationml/2006/main" xmlns:r="http://schemas.openxmlformats.org/officeDocument/2006/relationships">
   <p:cSld>
-    <p:bg>
-      <p:bgPr>
-        <a:solidFill>
-          <a:srgbClr val="0A0F1E"/>
-        </a:solidFill>
-        <a:effectLst/>
-      </p:bgPr>
-    </p:bg>
     <p:spTree>
       <p:nvGrpSpPr>
         <p:cNvPr id="1" name=""/>
@@ -4977,14 +9790,57 @@
       <p:grpSpPr/>
       <p:sp>
         <p:nvSpPr>
-          <p:cNvPr id="2" name="TextBox 1"/>
+          <p:cNvPr id="2" name="Rectangle 1"/>
+          <p:cNvSpPr/>
+          <p:nvPr/>
+        </p:nvSpPr>
+        <p:spPr>
+          <a:xfrm>
+            <a:off x="0" y="0"/>
+            <a:ext cx="12191695" cy="6858000"/>
+          </a:xfrm>
+          <a:prstGeom prst="rect">
+            <a:avLst/>
+          </a:prstGeom>
+          <a:solidFill>
+            <a:srgbClr val="0A0F1D"/>
+          </a:solidFill>
+          <a:ln>
+            <a:noFill/>
+          </a:ln>
+        </p:spPr>
+        <p:style>
+          <a:lnRef idx="1">
+            <a:schemeClr val="accent1"/>
+          </a:lnRef>
+          <a:fillRef idx="3">
+            <a:schemeClr val="accent1"/>
+          </a:fillRef>
+          <a:effectRef idx="2">
+            <a:schemeClr val="accent1"/>
+          </a:effectRef>
+          <a:fontRef idx="minor">
+            <a:schemeClr val="lt1"/>
+          </a:fontRef>
+        </p:style>
+        <p:txBody>
+          <a:bodyPr rtlCol="0" anchor="ctr"/>
+          <a:lstStyle/>
+          <a:p>
+            <a:pPr algn="ctr"/>
+          </a:p>
+        </p:txBody>
+      </p:sp>
+      <p:sp>
+        <p:nvSpPr>
+          <p:cNvPr id="3" name="TextBox 2"/>
           <p:cNvSpPr txBox="1"/>
           <p:nvPr/>
         </p:nvSpPr>
         <p:spPr>
           <a:xfrm>
             <a:off x="731520" y="365760"/>
-            <a:ext cx="10698480" cy="731520"/>
+            <a:ext cx="9144000" cy="365760"/>
           </a:xfrm>
           <a:prstGeom prst="rect">
             <a:avLst/>
@@ -4998,29 +9854,28 @@
           <a:lstStyle/>
           <a:p>
             <a:pPr>
-              <a:defRPr sz="3200" b="1">
-                <a:solidFill>
-                  <a:srgbClr val="818CF8"/>
-                </a:solidFill>
-                <a:latin typeface="Arial"/>
-              </a:defRPr>
-            </a:pPr>
-            <a:r>
-              <a:t>System Verification &amp; Validation</a:t>
-            </a:r>
-          </a:p>
-        </p:txBody>
-      </p:sp>
-      <p:sp>
-        <p:nvSpPr>
-          <p:cNvPr id="3" name="TextBox 2"/>
+              <a:defRPr sz="1000" b="1">
+                <a:solidFill>
+                  <a:srgbClr val="06B6D4"/>
+                </a:solidFill>
+              </a:defRPr>
+            </a:pPr>
+            <a:r>
+              <a:t>MILESTONE 4 REVIEW (WEEKS 7 &amp; 8)</a:t>
+            </a:r>
+          </a:p>
+        </p:txBody>
+      </p:sp>
+      <p:sp>
+        <p:nvSpPr>
+          <p:cNvPr id="4" name="TextBox 3"/>
           <p:cNvSpPr txBox="1"/>
           <p:nvPr/>
         </p:nvSpPr>
         <p:spPr>
           <a:xfrm>
-            <a:off x="731520" y="1371600"/>
-            <a:ext cx="10698480" cy="4846320"/>
+            <a:off x="731520" y="640080"/>
+            <a:ext cx="10515600" cy="640080"/>
           </a:xfrm>
           <a:prstGeom prst="rect">
             <a:avLst/>
@@ -5034,118 +9889,461 @@
           <a:lstStyle/>
           <a:p>
             <a:pPr>
-              <a:spcBef>
-                <a:spcPts val="1000"/>
-              </a:spcBef>
-              <a:defRPr sz="1600" b="1">
-                <a:solidFill>
-                  <a:srgbClr val="FFFFFF"/>
-                </a:solidFill>
-                <a:latin typeface="Arial"/>
-              </a:defRPr>
-            </a:pPr>
-            <a:r>
-              <a:t>✅ Next.js Turbopack Production Compilation</a:t>
-            </a:r>
-          </a:p>
+              <a:defRPr sz="2400" b="1">
+                <a:solidFill>
+                  <a:srgbClr val="F8FAFC"/>
+                </a:solidFill>
+              </a:defRPr>
+            </a:pPr>
+            <a:r>
+              <a:t>Multi-Format Export &amp; Cloud Production Deployment</a:t>
+            </a:r>
+          </a:p>
+        </p:txBody>
+      </p:sp>
+      <p:sp>
+        <p:nvSpPr>
+          <p:cNvPr id="5" name="TextBox 4"/>
+          <p:cNvSpPr txBox="1"/>
+          <p:nvPr/>
+        </p:nvSpPr>
+        <p:spPr>
+          <a:xfrm>
+            <a:off x="731520" y="1234440"/>
+            <a:ext cx="10515600" cy="365760"/>
+          </a:xfrm>
+          <a:prstGeom prst="rect">
+            <a:avLst/>
+          </a:prstGeom>
+          <a:noFill/>
+        </p:spPr>
+        <p:txBody>
+          <a:bodyPr wrap="none">
+            <a:spAutoFit/>
+          </a:bodyPr>
+          <a:lstStyle/>
           <a:p>
             <a:pPr>
               <a:defRPr sz="1300">
                 <a:solidFill>
                   <a:srgbClr val="94A3B8"/>
                 </a:solidFill>
-                <a:latin typeface="Arial"/>
-              </a:defRPr>
-            </a:pPr>
-            <a:r>
-              <a:t>Verified Next.js static page optimization. Builds in ~4 seconds with zero TypeScript or module resolution warnings.</a:t>
-            </a:r>
-          </a:p>
-          <a:p>
-            <a:pPr>
-              <a:spcBef>
-                <a:spcPts val="1000"/>
-              </a:spcBef>
-              <a:defRPr sz="1600" b="1">
-                <a:solidFill>
-                  <a:srgbClr val="FFFFFF"/>
-                </a:solidFill>
-                <a:latin typeface="Arial"/>
-              </a:defRPr>
-            </a:pPr>
-            <a:r>
-              <a:t>✅ Python Backend Syntax Compile Health</a:t>
-            </a:r>
-          </a:p>
-          <a:p>
-            <a:pPr>
-              <a:defRPr sz="1300">
-                <a:solidFill>
-                  <a:srgbClr val="94A3B8"/>
-                </a:solidFill>
-                <a:latin typeface="Arial"/>
-              </a:defRPr>
-            </a:pPr>
-            <a:r>
-              <a:t>Checked code validity for routing, worker pipeline, and LLM summarizer: 'py_compile' returns exit code 0.</a:t>
-            </a:r>
-          </a:p>
-          <a:p>
-            <a:pPr>
-              <a:spcBef>
-                <a:spcPts val="1000"/>
-              </a:spcBef>
-              <a:defRPr sz="1600" b="1">
-                <a:solidFill>
-                  <a:srgbClr val="FFFFFF"/>
-                </a:solidFill>
-                <a:latin typeface="Arial"/>
-              </a:defRPr>
-            </a:pPr>
-            <a:r>
-              <a:t>✅ Auto-Ingestion Integration Success</a:t>
-            </a:r>
-          </a:p>
-          <a:p>
-            <a:pPr>
-              <a:defRPr sz="1300">
-                <a:solidFill>
-                  <a:srgbClr val="94A3B8"/>
-                </a:solidFill>
-                <a:latin typeface="Arial"/>
-              </a:defRPr>
-            </a:pPr>
-            <a:r>
-              <a:t>Tested YouTube downloader on a short clip. Confirmed stream is saved and successfully transcoded to AAC format.</a:t>
-            </a:r>
-          </a:p>
-          <a:p>
-            <a:pPr>
-              <a:spcBef>
-                <a:spcPts val="1000"/>
-              </a:spcBef>
-              <a:defRPr sz="1600" b="1">
-                <a:solidFill>
-                  <a:srgbClr val="FFFFFF"/>
-                </a:solidFill>
-                <a:latin typeface="Arial"/>
-              </a:defRPr>
-            </a:pPr>
-            <a:r>
-              <a:t>✅ Multi-Database Delete Verification</a:t>
-            </a:r>
-          </a:p>
-          <a:p>
-            <a:pPr>
-              <a:defRPr sz="1300">
-                <a:solidFill>
-                  <a:srgbClr val="94A3B8"/>
-                </a:solidFill>
-                <a:latin typeface="Arial"/>
-              </a:defRPr>
-            </a:pPr>
-            <a:r>
-              <a:t>Checked PostgreSQL and MongoDB, verifying relational records and document collections are successfully cleaned on delete.</a:t>
+              </a:defRPr>
+            </a:pPr>
+            <a:r>
+              <a:t>Subtitle compilation, enterprise document export, and zero-downtime microservices</a:t>
+            </a:r>
+          </a:p>
+        </p:txBody>
+      </p:sp>
+      <p:sp>
+        <p:nvSpPr>
+          <p:cNvPr id="6" name="Rounded Rectangle 5"/>
+          <p:cNvSpPr/>
+          <p:nvPr/>
+        </p:nvSpPr>
+        <p:spPr>
+          <a:xfrm>
+            <a:off x="731520" y="1645920"/>
+            <a:ext cx="5120640" cy="2194560"/>
+          </a:xfrm>
+          <a:prstGeom prst="roundRect">
+            <a:avLst/>
+          </a:prstGeom>
+          <a:solidFill>
+            <a:srgbClr val="131B2E"/>
+          </a:solidFill>
+          <a:ln w="12700">
+            <a:solidFill>
+              <a:srgbClr val="263454"/>
+            </a:solidFill>
+          </a:ln>
+        </p:spPr>
+        <p:style>
+          <a:lnRef idx="1">
+            <a:schemeClr val="accent1"/>
+          </a:lnRef>
+          <a:fillRef idx="3">
+            <a:schemeClr val="accent1"/>
+          </a:fillRef>
+          <a:effectRef idx="2">
+            <a:schemeClr val="accent1"/>
+          </a:effectRef>
+          <a:fontRef idx="minor">
+            <a:schemeClr val="lt1"/>
+          </a:fontRef>
+        </p:style>
+        <p:txBody>
+          <a:bodyPr rtlCol="0" anchor="ctr"/>
+          <a:lstStyle/>
+          <a:p>
+            <a:pPr algn="ctr"/>
+          </a:p>
+        </p:txBody>
+      </p:sp>
+      <p:sp>
+        <p:nvSpPr>
+          <p:cNvPr id="7" name="TextBox 6"/>
+          <p:cNvSpPr txBox="1"/>
+          <p:nvPr/>
+        </p:nvSpPr>
+        <p:spPr>
+          <a:xfrm>
+            <a:off x="914400" y="1783080"/>
+            <a:ext cx="4754880" cy="1920240"/>
+          </a:xfrm>
+          <a:prstGeom prst="rect">
+            <a:avLst/>
+          </a:prstGeom>
+          <a:noFill/>
+        </p:spPr>
+        <p:txBody>
+          <a:bodyPr wrap="square">
+            <a:spAutoFit/>
+          </a:bodyPr>
+          <a:lstStyle/>
+          <a:p>
+            <a:pPr>
+              <a:defRPr sz="1300" b="1">
+                <a:solidFill>
+                  <a:srgbClr val="06B6D4"/>
+                </a:solidFill>
+              </a:defRPr>
+            </a:pPr>
+            <a:r>
+              <a:t>✔ Multi-Format Export Engine</a:t>
+            </a:r>
+          </a:p>
+          <a:p>
+            <a:pPr>
+              <a:defRPr sz="1100">
+                <a:solidFill>
+                  <a:srgbClr val="CBD5E1"/>
+                </a:solidFill>
+              </a:defRPr>
+            </a:pPr>
+            <a:r>
+              <a:t>• SRT (.srt): SubRip format with standard millisecond timestamps.</a:t>
+            </a:r>
+            <a:br/>
+            <a:r>
+              <a:t>• WebVTT (.vtt): HTML5 video caption compatibility.</a:t>
+            </a:r>
+            <a:br/>
+            <a:r>
+              <a:t>• PDF Summary: Formatted executive briefing report with headers.</a:t>
+            </a:r>
+            <a:br/>
+            <a:r>
+              <a:t>• TXT &amp; JSON: Raw text and structured payload downloads.</a:t>
+            </a:r>
+          </a:p>
+        </p:txBody>
+      </p:sp>
+      <p:sp>
+        <p:nvSpPr>
+          <p:cNvPr id="8" name="Rounded Rectangle 7"/>
+          <p:cNvSpPr/>
+          <p:nvPr/>
+        </p:nvSpPr>
+        <p:spPr>
+          <a:xfrm>
+            <a:off x="6126480" y="1645920"/>
+            <a:ext cx="5120640" cy="2194560"/>
+          </a:xfrm>
+          <a:prstGeom prst="roundRect">
+            <a:avLst/>
+          </a:prstGeom>
+          <a:solidFill>
+            <a:srgbClr val="131B2E"/>
+          </a:solidFill>
+          <a:ln w="12700">
+            <a:solidFill>
+              <a:srgbClr val="263454"/>
+            </a:solidFill>
+          </a:ln>
+        </p:spPr>
+        <p:style>
+          <a:lnRef idx="1">
+            <a:schemeClr val="accent1"/>
+          </a:lnRef>
+          <a:fillRef idx="3">
+            <a:schemeClr val="accent1"/>
+          </a:fillRef>
+          <a:effectRef idx="2">
+            <a:schemeClr val="accent1"/>
+          </a:effectRef>
+          <a:fontRef idx="minor">
+            <a:schemeClr val="lt1"/>
+          </a:fontRef>
+        </p:style>
+        <p:txBody>
+          <a:bodyPr rtlCol="0" anchor="ctr"/>
+          <a:lstStyle/>
+          <a:p>
+            <a:pPr algn="ctr"/>
+          </a:p>
+        </p:txBody>
+      </p:sp>
+      <p:sp>
+        <p:nvSpPr>
+          <p:cNvPr id="9" name="TextBox 8"/>
+          <p:cNvSpPr txBox="1"/>
+          <p:nvPr/>
+        </p:nvSpPr>
+        <p:spPr>
+          <a:xfrm>
+            <a:off x="6309360" y="1783080"/>
+            <a:ext cx="4754880" cy="1920240"/>
+          </a:xfrm>
+          <a:prstGeom prst="rect">
+            <a:avLst/>
+          </a:prstGeom>
+          <a:noFill/>
+        </p:spPr>
+        <p:txBody>
+          <a:bodyPr wrap="square">
+            <a:spAutoFit/>
+          </a:bodyPr>
+          <a:lstStyle/>
+          <a:p>
+            <a:pPr>
+              <a:defRPr sz="1300" b="1">
+                <a:solidFill>
+                  <a:srgbClr val="38BDF8"/>
+                </a:solidFill>
+              </a:defRPr>
+            </a:pPr>
+            <a:r>
+              <a:t>✔ Frontend: Vercel Edge Deployment</a:t>
+            </a:r>
+          </a:p>
+          <a:p>
+            <a:pPr>
+              <a:defRPr sz="1100">
+                <a:solidFill>
+                  <a:srgbClr val="CBD5E1"/>
+                </a:solidFill>
+              </a:defRPr>
+            </a:pPr>
+            <a:r>
+              <a:t>• Framework: Next.js 15 App Router with Turbopack.</a:t>
+            </a:r>
+            <a:br/>
+            <a:r>
+              <a:t>• Live URL: https://clipmindai-nine.vercel.app</a:t>
+            </a:r>
+            <a:br/>
+            <a:r>
+              <a:t>• Edge caching, automatic HTTPS/SSL, responsive mobile UI.</a:t>
+            </a:r>
+            <a:br/>
+            <a:r>
+              <a:t>• Environment variables: NEXT_PUBLIC_API_URL pointing to Render.</a:t>
+            </a:r>
+          </a:p>
+        </p:txBody>
+      </p:sp>
+      <p:sp>
+        <p:nvSpPr>
+          <p:cNvPr id="10" name="Rounded Rectangle 9"/>
+          <p:cNvSpPr/>
+          <p:nvPr/>
+        </p:nvSpPr>
+        <p:spPr>
+          <a:xfrm>
+            <a:off x="731520" y="4023360"/>
+            <a:ext cx="5120640" cy="2194560"/>
+          </a:xfrm>
+          <a:prstGeom prst="roundRect">
+            <a:avLst/>
+          </a:prstGeom>
+          <a:solidFill>
+            <a:srgbClr val="131B2E"/>
+          </a:solidFill>
+          <a:ln w="12700">
+            <a:solidFill>
+              <a:srgbClr val="263454"/>
+            </a:solidFill>
+          </a:ln>
+        </p:spPr>
+        <p:style>
+          <a:lnRef idx="1">
+            <a:schemeClr val="accent1"/>
+          </a:lnRef>
+          <a:fillRef idx="3">
+            <a:schemeClr val="accent1"/>
+          </a:fillRef>
+          <a:effectRef idx="2">
+            <a:schemeClr val="accent1"/>
+          </a:effectRef>
+          <a:fontRef idx="minor">
+            <a:schemeClr val="lt1"/>
+          </a:fontRef>
+        </p:style>
+        <p:txBody>
+          <a:bodyPr rtlCol="0" anchor="ctr"/>
+          <a:lstStyle/>
+          <a:p>
+            <a:pPr algn="ctr"/>
+          </a:p>
+        </p:txBody>
+      </p:sp>
+      <p:sp>
+        <p:nvSpPr>
+          <p:cNvPr id="11" name="TextBox 10"/>
+          <p:cNvSpPr txBox="1"/>
+          <p:nvPr/>
+        </p:nvSpPr>
+        <p:spPr>
+          <a:xfrm>
+            <a:off x="914400" y="4160520"/>
+            <a:ext cx="4754880" cy="1920240"/>
+          </a:xfrm>
+          <a:prstGeom prst="rect">
+            <a:avLst/>
+          </a:prstGeom>
+          <a:noFill/>
+        </p:spPr>
+        <p:txBody>
+          <a:bodyPr wrap="square">
+            <a:spAutoFit/>
+          </a:bodyPr>
+          <a:lstStyle/>
+          <a:p>
+            <a:pPr>
+              <a:defRPr sz="1300" b="1">
+                <a:solidFill>
+                  <a:srgbClr val="818CF8"/>
+                </a:solidFill>
+              </a:defRPr>
+            </a:pPr>
+            <a:r>
+              <a:t>✔ Backend: Render Cloud Web Service</a:t>
+            </a:r>
+          </a:p>
+          <a:p>
+            <a:pPr>
+              <a:defRPr sz="1100">
+                <a:solidFill>
+                  <a:srgbClr val="CBD5E1"/>
+                </a:solidFill>
+              </a:defRPr>
+            </a:pPr>
+            <a:r>
+              <a:t>• Runtime: Python 3.11 with FFmpeg 6.x pre-installed.</a:t>
+            </a:r>
+            <a:br/>
+            <a:r>
+              <a:t>• Live URL: https://clipmind-backend-94k5.onrender.com/docs</a:t>
+            </a:r>
+            <a:br/>
+            <a:r>
+              <a:t>• Auto-deployment via Git pushes to springboard branch.</a:t>
+            </a:r>
+            <a:br/>
+            <a:r>
+              <a:t>• Health checks &amp; auto-restart on memory spikes.</a:t>
+            </a:r>
+          </a:p>
+        </p:txBody>
+      </p:sp>
+      <p:sp>
+        <p:nvSpPr>
+          <p:cNvPr id="12" name="Rounded Rectangle 11"/>
+          <p:cNvSpPr/>
+          <p:nvPr/>
+        </p:nvSpPr>
+        <p:spPr>
+          <a:xfrm>
+            <a:off x="6126480" y="4023360"/>
+            <a:ext cx="5120640" cy="2194560"/>
+          </a:xfrm>
+          <a:prstGeom prst="roundRect">
+            <a:avLst/>
+          </a:prstGeom>
+          <a:solidFill>
+            <a:srgbClr val="131B2E"/>
+          </a:solidFill>
+          <a:ln w="12700">
+            <a:solidFill>
+              <a:srgbClr val="263454"/>
+            </a:solidFill>
+          </a:ln>
+        </p:spPr>
+        <p:style>
+          <a:lnRef idx="1">
+            <a:schemeClr val="accent1"/>
+          </a:lnRef>
+          <a:fillRef idx="3">
+            <a:schemeClr val="accent1"/>
+          </a:fillRef>
+          <a:effectRef idx="2">
+            <a:schemeClr val="accent1"/>
+          </a:effectRef>
+          <a:fontRef idx="minor">
+            <a:schemeClr val="lt1"/>
+          </a:fontRef>
+        </p:style>
+        <p:txBody>
+          <a:bodyPr rtlCol="0" anchor="ctr"/>
+          <a:lstStyle/>
+          <a:p>
+            <a:pPr algn="ctr"/>
+          </a:p>
+        </p:txBody>
+      </p:sp>
+      <p:sp>
+        <p:nvSpPr>
+          <p:cNvPr id="13" name="TextBox 12"/>
+          <p:cNvSpPr txBox="1"/>
+          <p:nvPr/>
+        </p:nvSpPr>
+        <p:spPr>
+          <a:xfrm>
+            <a:off x="6309360" y="4160520"/>
+            <a:ext cx="4754880" cy="1920240"/>
+          </a:xfrm>
+          <a:prstGeom prst="rect">
+            <a:avLst/>
+          </a:prstGeom>
+          <a:noFill/>
+        </p:spPr>
+        <p:txBody>
+          <a:bodyPr wrap="square">
+            <a:spAutoFit/>
+          </a:bodyPr>
+          <a:lstStyle/>
+          <a:p>
+            <a:pPr>
+              <a:defRPr sz="1300" b="1">
+                <a:solidFill>
+                  <a:srgbClr val="10B981"/>
+                </a:solidFill>
+              </a:defRPr>
+            </a:pPr>
+            <a:r>
+              <a:t>✔ Cloud Database Infrastructure</a:t>
+            </a:r>
+          </a:p>
+          <a:p>
+            <a:pPr>
+              <a:defRPr sz="1100">
+                <a:solidFill>
+                  <a:srgbClr val="CBD5E1"/>
+                </a:solidFill>
+              </a:defRPr>
+            </a:pPr>
+            <a:r>
+              <a:t>• PostgreSQL on Render: Persistent relational data.</a:t>
+            </a:r>
+            <a:br/>
+            <a:r>
+              <a:t>• MongoDB Atlas M0 Cluster: Multi-region encrypted transcript storage.</a:t>
+            </a:r>
+            <a:br/>
+            <a:r>
+              <a:t>• Connection pooling with resilient retry and keep-alive pings.</a:t>
             </a:r>
           </a:p>
         </p:txBody>
